--- a/01_Semester_1/03_Data_Mining/05_Seminars_&_Slides/Feature_Selection_Seminar_v2.pptx
+++ b/01_Semester_1/03_Data_Mining/05_Seminars_&_Slides/Feature_Selection_Seminar_v2.pptx
@@ -1,25 +1,28 @@
 
 <file path=ppt/presentation.xml><?xml version="1.0" encoding="utf-8"?>
-<p:presentation xmlns:a="http://schemas.openxmlformats.org/drawingml/2006/main" xmlns:r="http://schemas.openxmlformats.org/officeDocument/2006/relationships" xmlns:p="http://schemas.openxmlformats.org/presentationml/2006/main" saveSubsetFonts="1" autoCompressPictures="0">
+<p:presentation xmlns:a="http://schemas.openxmlformats.org/drawingml/2006/main" xmlns:r="http://schemas.openxmlformats.org/officeDocument/2006/relationships" xmlns:p="http://schemas.openxmlformats.org/presentationml/2006/main" xmlns:m="http://schemas.openxmlformats.org/officeDocument/2006/math" xmlns:w="http://schemas.openxmlformats.org/wordprocessingml/2006/main" autoCompressPictures="0" saveSubsetFonts="1">
   <p:sldMasterIdLst>
     <p:sldMasterId id="2147483648" r:id="rId1"/>
   </p:sldMasterIdLst>
+  <p:notesMasterIdLst>
+    <p:notesMasterId r:id="rId19"/>
+  </p:notesMasterIdLst>
   <p:sldIdLst>
-    <p:sldId id="256" r:id="rId7"/>
-    <p:sldId id="257" r:id="rId9"/>
-    <p:sldId id="258" r:id="rId10"/>
-    <p:sldId id="259" r:id="rId11"/>
-    <p:sldId id="260" r:id="rId12"/>
-    <p:sldId id="261" r:id="rId13"/>
-    <p:sldId id="262" r:id="rId14"/>
-    <p:sldId id="263" r:id="rId15"/>
-    <p:sldId id="264" r:id="rId16"/>
-    <p:sldId id="265" r:id="rId17"/>
-    <p:sldId id="266" r:id="rId18"/>
-    <p:sldId id="267" r:id="rId19"/>
-    <p:sldId id="268" r:id="rId20"/>
-    <p:sldId id="269" r:id="rId21"/>
-    <p:sldId id="270" r:id="rId22"/>
+    <p:sldId id="256" r:id="rId4"/>
+    <p:sldId id="257" r:id="rId5"/>
+    <p:sldId id="258" r:id="rId6"/>
+    <p:sldId id="259" r:id="rId7"/>
+    <p:sldId id="260" r:id="rId8"/>
+    <p:sldId id="261" r:id="rId9"/>
+    <p:sldId id="262" r:id="rId10"/>
+    <p:sldId id="263" r:id="rId11"/>
+    <p:sldId id="264" r:id="rId12"/>
+    <p:sldId id="265" r:id="rId13"/>
+    <p:sldId id="266" r:id="rId14"/>
+    <p:sldId id="267" r:id="rId15"/>
+    <p:sldId id="268" r:id="rId16"/>
+    <p:sldId id="269" r:id="rId17"/>
+    <p:sldId id="270" r:id="rId18"/>
   </p:sldIdLst>
   <p:sldSz cx="12191695" cy="6858000" type="screen4x3"/>
   <p:notesSz cx="6858000" cy="9144000"/>
@@ -27,8 +30,8 @@
     <a:defPPr>
       <a:defRPr lang="en-US"/>
     </a:defPPr>
-    <a:lvl1pPr marL="0" algn="l" defTabSz="457200" rtl="0" eaLnBrk="1" latinLnBrk="0" hangingPunct="1">
-      <a:defRPr sz="1800" kern="1200">
+    <a:lvl1pPr marL="0" algn="l" defTabSz="457200" rtl="0">
+      <a:defRPr sz="1800">
         <a:solidFill>
           <a:schemeClr val="tx1"/>
         </a:solidFill>
@@ -37,8 +40,8 @@
         <a:cs typeface="+mn-cs"/>
       </a:defRPr>
     </a:lvl1pPr>
-    <a:lvl2pPr marL="457200" algn="l" defTabSz="457200" rtl="0" eaLnBrk="1" latinLnBrk="0" hangingPunct="1">
-      <a:defRPr sz="1800" kern="1200">
+    <a:lvl2pPr marL="457200" algn="l" defTabSz="457200" rtl="0">
+      <a:defRPr sz="1800">
         <a:solidFill>
           <a:schemeClr val="tx1"/>
         </a:solidFill>
@@ -47,8 +50,8 @@
         <a:cs typeface="+mn-cs"/>
       </a:defRPr>
     </a:lvl2pPr>
-    <a:lvl3pPr marL="914400" algn="l" defTabSz="457200" rtl="0" eaLnBrk="1" latinLnBrk="0" hangingPunct="1">
-      <a:defRPr sz="1800" kern="1200">
+    <a:lvl3pPr marL="914400" algn="l" defTabSz="457200" rtl="0">
+      <a:defRPr sz="1800">
         <a:solidFill>
           <a:schemeClr val="tx1"/>
         </a:solidFill>
@@ -57,8 +60,8 @@
         <a:cs typeface="+mn-cs"/>
       </a:defRPr>
     </a:lvl3pPr>
-    <a:lvl4pPr marL="1371600" algn="l" defTabSz="457200" rtl="0" eaLnBrk="1" latinLnBrk="0" hangingPunct="1">
-      <a:defRPr sz="1800" kern="1200">
+    <a:lvl4pPr marL="1371600" algn="l" defTabSz="457200" rtl="0">
+      <a:defRPr sz="1800">
         <a:solidFill>
           <a:schemeClr val="tx1"/>
         </a:solidFill>
@@ -67,8 +70,8 @@
         <a:cs typeface="+mn-cs"/>
       </a:defRPr>
     </a:lvl4pPr>
-    <a:lvl5pPr marL="1828800" algn="l" defTabSz="457200" rtl="0" eaLnBrk="1" latinLnBrk="0" hangingPunct="1">
-      <a:defRPr sz="1800" kern="1200">
+    <a:lvl5pPr marL="1828800" algn="l" defTabSz="457200" rtl="0">
+      <a:defRPr sz="1800">
         <a:solidFill>
           <a:schemeClr val="tx1"/>
         </a:solidFill>
@@ -77,8 +80,8 @@
         <a:cs typeface="+mn-cs"/>
       </a:defRPr>
     </a:lvl5pPr>
-    <a:lvl6pPr marL="2286000" algn="l" defTabSz="457200" rtl="0" eaLnBrk="1" latinLnBrk="0" hangingPunct="1">
-      <a:defRPr sz="1800" kern="1200">
+    <a:lvl6pPr marL="2286000" algn="l" defTabSz="457200" rtl="0">
+      <a:defRPr sz="1800">
         <a:solidFill>
           <a:schemeClr val="tx1"/>
         </a:solidFill>
@@ -87,8 +90,8 @@
         <a:cs typeface="+mn-cs"/>
       </a:defRPr>
     </a:lvl6pPr>
-    <a:lvl7pPr marL="2743200" algn="l" defTabSz="457200" rtl="0" eaLnBrk="1" latinLnBrk="0" hangingPunct="1">
-      <a:defRPr sz="1800" kern="1200">
+    <a:lvl7pPr marL="2743200" algn="l" defTabSz="457200" rtl="0">
+      <a:defRPr sz="1800">
         <a:solidFill>
           <a:schemeClr val="tx1"/>
         </a:solidFill>
@@ -97,8 +100,8 @@
         <a:cs typeface="+mn-cs"/>
       </a:defRPr>
     </a:lvl7pPr>
-    <a:lvl8pPr marL="3200400" algn="l" defTabSz="457200" rtl="0" eaLnBrk="1" latinLnBrk="0" hangingPunct="1">
-      <a:defRPr sz="1800" kern="1200">
+    <a:lvl8pPr marL="3200400" algn="l" defTabSz="457200" rtl="0">
+      <a:defRPr sz="1800">
         <a:solidFill>
           <a:schemeClr val="tx1"/>
         </a:solidFill>
@@ -107,8 +110,8 @@
         <a:cs typeface="+mn-cs"/>
       </a:defRPr>
     </a:lvl8pPr>
-    <a:lvl9pPr marL="3657600" algn="l" defTabSz="457200" rtl="0" eaLnBrk="1" latinLnBrk="0" hangingPunct="1">
-      <a:defRPr sz="1800" kern="1200">
+    <a:lvl9pPr marL="3657600" algn="l" defTabSz="457200" rtl="0">
+      <a:defRPr sz="1800">
         <a:solidFill>
           <a:schemeClr val="tx1"/>
         </a:solidFill>
@@ -122,8 +125,8 @@
 </file>
 
 <file path=ppt/notesMasters/notesMaster1.xml><?xml version="1.0" encoding="utf-8"?>
-<p:notesMaster xmlns:a="http://schemas.openxmlformats.org/drawingml/2006/main" xmlns:p="http://schemas.openxmlformats.org/presentationml/2006/main" xmlns:r="http://schemas.openxmlformats.org/officeDocument/2006/relationships">
-  <p:cSld>
+<p:notesMaster xmlns:a="http://schemas.openxmlformats.org/drawingml/2006/main" xmlns:r="http://schemas.openxmlformats.org/officeDocument/2006/relationships" xmlns:p="http://schemas.openxmlformats.org/presentationml/2006/main">
+  <p:cSld name="">
     <p:bg>
       <p:bgRef idx="1001">
         <a:schemeClr val="bg1"/>
@@ -135,7 +138,7 @@
         <p:cNvGrpSpPr/>
         <p:nvPr/>
       </p:nvGrpSpPr>
-      <p:grpSpPr>
+      <p:grpSpPr bwMode="auto">
         <a:xfrm>
           <a:off x="0" y="0"/>
           <a:ext cx="0" cy="0"/>
@@ -153,24 +156,27 @@
             <p:ph type="hdr" sz="quarter"/>
           </p:nvPr>
         </p:nvSpPr>
-        <p:spPr>
+        <p:spPr bwMode="auto">
           <a:xfrm>
             <a:off x="0" y="0"/>
-            <a:ext cx="2971800" cy="457200"/>
+            <a:ext cx="2971800" cy="458788"/>
           </a:xfrm>
           <a:prstGeom prst="rect">
             <a:avLst/>
           </a:prstGeom>
         </p:spPr>
         <p:txBody>
-          <a:bodyPr vert="horz" lIns="91440" tIns="45720" rIns="91440" bIns="45720" rtlCol="0"/>
+          <a:bodyPr vert="horz" lIns="91440" tIns="45720" rIns="91440" bIns="45720" rtlCol="0" anchor="ctr"/>
           <a:lstStyle>
             <a:lvl1pPr algn="l">
               <a:defRPr sz="1200"/>
             </a:lvl1pPr>
           </a:lstStyle>
           <a:p>
-            <a:endParaRPr lang="en-US"/>
+            <a:pPr>
+              <a:defRPr/>
+            </a:pPr>
+            <a:endParaRPr/>
           </a:p>
         </p:txBody>
       </p:sp>
@@ -181,64 +187,64 @@
             <a:spLocks noGrp="1"/>
           </p:cNvSpPr>
           <p:nvPr>
-            <p:ph type="dt" idx="1"/>
-          </p:nvPr>
-        </p:nvSpPr>
-        <p:spPr>
+            <p:ph type="dt" idx="2"/>
+          </p:nvPr>
+        </p:nvSpPr>
+        <p:spPr bwMode="auto">
           <a:xfrm>
             <a:off x="3884613" y="0"/>
-            <a:ext cx="2971800" cy="457200"/>
+            <a:ext cx="2971800" cy="458788"/>
           </a:xfrm>
           <a:prstGeom prst="rect">
             <a:avLst/>
           </a:prstGeom>
         </p:spPr>
         <p:txBody>
-          <a:bodyPr vert="horz" lIns="91440" tIns="45720" rIns="91440" bIns="45720" rtlCol="0"/>
+          <a:bodyPr vert="horz" lIns="91440" tIns="45720" rIns="91440" bIns="45720" rtlCol="0" anchor="ctr"/>
           <a:lstStyle>
             <a:lvl1pPr algn="r">
               <a:defRPr sz="1200"/>
             </a:lvl1pPr>
           </a:lstStyle>
           <a:p>
-            <a:fld id="{0F89C1C7-3DCD-1040-A9CF-14679D8B5DDD}" type="datetimeFigureOut">
-              <a:rPr lang="en-US" smtClean="0"/>
-              <a:t>10/17/16</a:t>
-            </a:fld>
-            <a:endParaRPr lang="en-US"/>
-          </a:p>
-        </p:txBody>
-      </p:sp>
-      <p:sp>
-        <p:nvSpPr>
-          <p:cNvPr id="4" name="Slide Image Placeholder 3"/>
-          <p:cNvSpPr>
-            <a:spLocks noGrp="1" noRot="1" noChangeAspect="1"/>
-          </p:cNvSpPr>
-          <p:nvPr>
-            <p:ph type="sldImg" idx="2"/>
-          </p:nvPr>
-        </p:nvSpPr>
-        <p:spPr>
-          <a:xfrm>
-            <a:off x="1143000" y="685800"/>
-            <a:ext cx="4572000" cy="3429000"/>
+            <a:pPr>
+              <a:defRPr/>
+            </a:pPr>
+            <a:endParaRPr/>
+          </a:p>
+        </p:txBody>
+      </p:sp>
+      <p:sp>
+        <p:nvSpPr>
+          <p:cNvPr id="3" name="Date Placeholder 2"/>
+          <p:cNvSpPr>
+            <a:spLocks noGrp="1"/>
+          </p:cNvSpPr>
+          <p:nvPr>
+            <p:ph type="dt" idx="3"/>
+          </p:nvPr>
+        </p:nvSpPr>
+        <p:spPr bwMode="auto">
+          <a:xfrm>
+            <a:off x="3884613" y="0"/>
+            <a:ext cx="2971800" cy="458788"/>
           </a:xfrm>
           <a:prstGeom prst="rect">
             <a:avLst/>
           </a:prstGeom>
-          <a:noFill/>
-          <a:ln w="12700">
-            <a:solidFill>
-              <a:prstClr val="black"/>
-            </a:solidFill>
-          </a:ln>
         </p:spPr>
         <p:txBody>
           <a:bodyPr vert="horz" lIns="91440" tIns="45720" rIns="91440" bIns="45720" rtlCol="0" anchor="ctr"/>
-          <a:lstStyle/>
-          <a:p>
-            <a:endParaRPr lang="en-US"/>
+          <a:lstStyle>
+            <a:lvl1pPr algn="r">
+              <a:defRPr sz="1200"/>
+            </a:lvl1pPr>
+          </a:lstStyle>
+          <a:p>
+            <a:pPr>
+              <a:defRPr/>
+            </a:pPr>
+            <a:endParaRPr/>
           </a:p>
         </p:txBody>
       </p:sp>
@@ -249,56 +255,26 @@
             <a:spLocks noGrp="1"/>
           </p:cNvSpPr>
           <p:nvPr>
-            <p:ph type="body" sz="quarter" idx="3"/>
-          </p:nvPr>
-        </p:nvSpPr>
-        <p:spPr>
-          <a:xfrm>
-            <a:off x="685800" y="4343400"/>
-            <a:ext cx="5486400" cy="4114800"/>
+            <p:ph type="body" sz="quarter" idx="1"/>
+          </p:nvPr>
+        </p:nvSpPr>
+        <p:spPr bwMode="auto">
+          <a:xfrm>
+            <a:off x="685800" y="4400550"/>
+            <a:ext cx="5486400" cy="3600450"/>
           </a:xfrm>
           <a:prstGeom prst="rect">
             <a:avLst/>
           </a:prstGeom>
         </p:spPr>
         <p:txBody>
-          <a:bodyPr vert="horz" lIns="91440" tIns="45720" rIns="91440" bIns="45720" rtlCol="0"/>
-          <a:lstStyle/>
-          <a:p>
-            <a:pPr lvl="0"/>
-            <a:r>
-              <a:rPr lang="en-US" smtClean="0"/>
-              <a:t>Click to edit Master text styles</a:t>
-            </a:r>
-          </a:p>
-          <a:p>
-            <a:pPr lvl="1"/>
-            <a:r>
-              <a:rPr lang="en-US" smtClean="0"/>
-              <a:t>Second level</a:t>
-            </a:r>
-          </a:p>
-          <a:p>
-            <a:pPr lvl="2"/>
-            <a:r>
-              <a:rPr lang="en-US" smtClean="0"/>
-              <a:t>Third level</a:t>
-            </a:r>
-          </a:p>
-          <a:p>
-            <a:pPr lvl="3"/>
-            <a:r>
-              <a:rPr lang="en-US" smtClean="0"/>
-              <a:t>Fourth level</a:t>
-            </a:r>
-          </a:p>
-          <a:p>
-            <a:pPr lvl="4"/>
-            <a:r>
-              <a:rPr lang="en-US" smtClean="0"/>
-              <a:t>Fifth level</a:t>
-            </a:r>
-            <a:endParaRPr lang="en-US"/>
+          <a:bodyPr vert="horz" lIns="91440" tIns="45720" rIns="91440" bIns="45720" rtlCol="0" anchor="ctr"/>
+          <a:lstStyle/>
+          <a:p>
+            <a:pPr>
+              <a:defRPr/>
+            </a:pPr>
+            <a:endParaRPr/>
           </a:p>
         </p:txBody>
       </p:sp>
@@ -312,10 +288,10 @@
             <p:ph type="ftr" sz="quarter" idx="4"/>
           </p:nvPr>
         </p:nvSpPr>
-        <p:spPr>
+        <p:spPr bwMode="auto">
           <a:xfrm>
             <a:off x="0" y="8685213"/>
-            <a:ext cx="2971800" cy="457200"/>
+            <a:ext cx="2971800" cy="458787"/>
           </a:xfrm>
           <a:prstGeom prst="rect">
             <a:avLst/>
@@ -329,7 +305,10 @@
             </a:lvl1pPr>
           </a:lstStyle>
           <a:p>
-            <a:endParaRPr lang="en-US"/>
+            <a:pPr>
+              <a:defRPr/>
+            </a:pPr>
+            <a:endParaRPr/>
           </a:p>
         </p:txBody>
       </p:sp>
@@ -340,13 +319,13 @@
             <a:spLocks noGrp="1"/>
           </p:cNvSpPr>
           <p:nvPr>
-            <p:ph type="sldNum" sz="quarter" idx="5"/>
-          </p:nvPr>
-        </p:nvSpPr>
-        <p:spPr>
+            <p:ph type="sldNum" sz="quarter" idx="10"/>
+          </p:nvPr>
+        </p:nvSpPr>
+        <p:spPr bwMode="auto">
           <a:xfrm>
             <a:off x="3884613" y="8685213"/>
-            <a:ext cx="2971800" cy="457200"/>
+            <a:ext cx="2971800" cy="458787"/>
           </a:xfrm>
           <a:prstGeom prst="rect">
             <a:avLst/>
@@ -360,25 +339,19 @@
             </a:lvl1pPr>
           </a:lstStyle>
           <a:p>
-            <a:fld id="{BB5E49A5-4136-284D-997B-48E1D791AD67}" type="slidenum">
-              <a:rPr lang="en-US" smtClean="0"/>
-              <a:t>‹#›</a:t>
-            </a:fld>
-            <a:endParaRPr lang="en-US"/>
+            <a:pPr>
+              <a:defRPr/>
+            </a:pPr>
+            <a:endParaRPr/>
           </a:p>
         </p:txBody>
       </p:sp>
     </p:spTree>
-    <p:extLst>
-      <p:ext uri="{BB962C8B-B14F-4D97-AF65-F5344CB8AC3E}">
-        <p14:creationId xmlns:p14="http://schemas.microsoft.com/office/powerpoint/2010/main" val="2623252185"/>
-      </p:ext>
-    </p:extLst>
   </p:cSld>
   <p:clrMap bg1="lt1" tx1="dk1" bg2="lt2" tx2="dk2" accent1="accent1" accent2="accent2" accent3="accent3" accent4="accent4" accent5="accent5" accent6="accent6" hlink="hlink" folHlink="folHlink"/>
   <p:notesStyle>
-    <a:lvl1pPr marL="0" algn="l" defTabSz="457200" rtl="0" eaLnBrk="1" latinLnBrk="0" hangingPunct="1">
-      <a:defRPr sz="1200" kern="1200">
+    <a:lvl1pPr marL="0" algn="l" defTabSz="914400">
+      <a:defRPr sz="1200">
         <a:solidFill>
           <a:schemeClr val="tx1"/>
         </a:solidFill>
@@ -387,8 +360,8 @@
         <a:cs typeface="+mn-cs"/>
       </a:defRPr>
     </a:lvl1pPr>
-    <a:lvl2pPr marL="457200" algn="l" defTabSz="457200" rtl="0" eaLnBrk="1" latinLnBrk="0" hangingPunct="1">
-      <a:defRPr sz="1200" kern="1200">
+    <a:lvl2pPr marL="457200" algn="l" defTabSz="914400">
+      <a:defRPr sz="1200">
         <a:solidFill>
           <a:schemeClr val="tx1"/>
         </a:solidFill>
@@ -397,8 +370,8 @@
         <a:cs typeface="+mn-cs"/>
       </a:defRPr>
     </a:lvl2pPr>
-    <a:lvl3pPr marL="914400" algn="l" defTabSz="457200" rtl="0" eaLnBrk="1" latinLnBrk="0" hangingPunct="1">
-      <a:defRPr sz="1200" kern="1200">
+    <a:lvl3pPr marL="914400" algn="l" defTabSz="914400">
+      <a:defRPr sz="1200">
         <a:solidFill>
           <a:schemeClr val="tx1"/>
         </a:solidFill>
@@ -407,8 +380,8 @@
         <a:cs typeface="+mn-cs"/>
       </a:defRPr>
     </a:lvl3pPr>
-    <a:lvl4pPr marL="1371600" algn="l" defTabSz="457200" rtl="0" eaLnBrk="1" latinLnBrk="0" hangingPunct="1">
-      <a:defRPr sz="1200" kern="1200">
+    <a:lvl4pPr marL="1371600" algn="l" defTabSz="914400">
+      <a:defRPr sz="1200">
         <a:solidFill>
           <a:schemeClr val="tx1"/>
         </a:solidFill>
@@ -417,8 +390,8 @@
         <a:cs typeface="+mn-cs"/>
       </a:defRPr>
     </a:lvl4pPr>
-    <a:lvl5pPr marL="1828800" algn="l" defTabSz="457200" rtl="0" eaLnBrk="1" latinLnBrk="0" hangingPunct="1">
-      <a:defRPr sz="1200" kern="1200">
+    <a:lvl5pPr marL="1828800" algn="l" defTabSz="914400">
+      <a:defRPr sz="1200">
         <a:solidFill>
           <a:schemeClr val="tx1"/>
         </a:solidFill>
@@ -427,8 +400,8 @@
         <a:cs typeface="+mn-cs"/>
       </a:defRPr>
     </a:lvl5pPr>
-    <a:lvl6pPr marL="2286000" algn="l" defTabSz="457200" rtl="0" eaLnBrk="1" latinLnBrk="0" hangingPunct="1">
-      <a:defRPr sz="1200" kern="1200">
+    <a:lvl6pPr marL="2286000" algn="l" defTabSz="914400">
+      <a:defRPr sz="1200">
         <a:solidFill>
           <a:schemeClr val="tx1"/>
         </a:solidFill>
@@ -437,8 +410,8 @@
         <a:cs typeface="+mn-cs"/>
       </a:defRPr>
     </a:lvl6pPr>
-    <a:lvl7pPr marL="2743200" algn="l" defTabSz="457200" rtl="0" eaLnBrk="1" latinLnBrk="0" hangingPunct="1">
-      <a:defRPr sz="1200" kern="1200">
+    <a:lvl7pPr marL="2743200" algn="l" defTabSz="914400">
+      <a:defRPr sz="1200">
         <a:solidFill>
           <a:schemeClr val="tx1"/>
         </a:solidFill>
@@ -447,8 +420,8 @@
         <a:cs typeface="+mn-cs"/>
       </a:defRPr>
     </a:lvl7pPr>
-    <a:lvl8pPr marL="3200400" algn="l" defTabSz="457200" rtl="0" eaLnBrk="1" latinLnBrk="0" hangingPunct="1">
-      <a:defRPr sz="1200" kern="1200">
+    <a:lvl8pPr marL="3200400" algn="l" defTabSz="914400">
+      <a:defRPr sz="1200">
         <a:solidFill>
           <a:schemeClr val="tx1"/>
         </a:solidFill>
@@ -457,8 +430,8 @@
         <a:cs typeface="+mn-cs"/>
       </a:defRPr>
     </a:lvl8pPr>
-    <a:lvl9pPr marL="3657600" algn="l" defTabSz="457200" rtl="0" eaLnBrk="1" latinLnBrk="0" hangingPunct="1">
-      <a:defRPr sz="1200" kern="1200">
+    <a:lvl9pPr marL="3657600" algn="l" defTabSz="914400">
+      <a:defRPr sz="1200">
         <a:solidFill>
           <a:schemeClr val="tx1"/>
         </a:solidFill>
@@ -472,15 +445,15 @@
 </file>
 
 <file path=ppt/notesSlides/notesSlide1.xml><?xml version="1.0" encoding="utf-8"?>
-<p:notes xmlns:a="http://schemas.openxmlformats.org/drawingml/2006/main" xmlns:p="http://schemas.openxmlformats.org/presentationml/2006/main" xmlns:r="http://schemas.openxmlformats.org/officeDocument/2006/relationships">
-  <p:cSld>
+<p:notes xmlns:a="http://schemas.openxmlformats.org/drawingml/2006/main" xmlns:r="http://schemas.openxmlformats.org/officeDocument/2006/relationships" xmlns:p="http://schemas.openxmlformats.org/presentationml/2006/main" xmlns:m="http://schemas.openxmlformats.org/officeDocument/2006/math" xmlns:w="http://schemas.openxmlformats.org/wordprocessingml/2006/main">
+  <p:cSld name="">
     <p:spTree>
       <p:nvGrpSpPr>
         <p:cNvPr id="1" name=""/>
         <p:cNvGrpSpPr/>
         <p:nvPr/>
       </p:nvGrpSpPr>
-      <p:grpSpPr>
+      <p:grpSpPr bwMode="auto">
         <a:xfrm>
           <a:off x="0" y="0"/>
           <a:ext cx="0" cy="0"/>
@@ -490,7 +463,7 @@
       </p:grpSpPr>
       <p:sp>
         <p:nvSpPr>
-          <p:cNvPr id="2" name="Slide Image Placeholder 1"/>
+          <p:cNvPr id="1621011240" name="Slide Image Placeholder 1"/>
           <p:cNvSpPr>
             <a:spLocks noGrp="1"/>
           </p:cNvSpPr>
@@ -498,40 +471,45 @@
             <p:ph type="sldImg" idx="2"/>
           </p:nvPr>
         </p:nvSpPr>
-        <p:spPr/>
-      </p:sp>
-      <p:sp>
-        <p:nvSpPr>
-          <p:cNvPr id="3" name="Notes Placeholder 2"/>
-          <p:cNvSpPr>
-            <a:spLocks noGrp="1"/>
-          </p:cNvSpPr>
-          <p:nvPr>
-            <p:ph type="body" idx="3" sz="quarter"/>
-          </p:nvPr>
-        </p:nvSpPr>
-        <p:spPr/>
+        <p:spPr bwMode="auto"/>
+      </p:sp>
+      <p:sp>
+        <p:nvSpPr>
+          <p:cNvPr id="749721809" name="Notes Placeholder 2"/>
+          <p:cNvSpPr>
+            <a:spLocks noGrp="1"/>
+          </p:cNvSpPr>
+          <p:nvPr>
+            <p:ph type="body" sz="quarter" idx="3"/>
+          </p:nvPr>
+        </p:nvSpPr>
+        <p:spPr bwMode="auto"/>
         <p:txBody>
           <a:bodyPr/>
           <a:lstStyle/>
           <a:p>
-            <a:r>
+            <a:pPr>
+              <a:defRPr/>
+            </a:pPr>
+            <a:r>
+              <a:rPr/>
               <a:t>Opening line: "Every table in data mining has a dirty secret — most of its columns are not pulling their weight." Then state the roadmap in one breath: the problem, what selection is, the goal, why it is hard, how we score, how we search, the three model families, and how the task changes the rule. Sources: Han, Kamber &amp; Pei §3.4.4 and Aggarwal §10.2 / §6.2. Say plainly that this seminar is the lecture, because no further material was issued.</a:t>
             </a:r>
-          </a:p>
-        </p:txBody>
-      </p:sp>
-      <p:sp>
-        <p:nvSpPr>
-          <p:cNvPr id="4" name="Slide Number Placeholder 3"/>
-          <p:cNvSpPr>
-            <a:spLocks noGrp="1"/>
-          </p:cNvSpPr>
-          <p:nvPr>
-            <p:ph type="sldNum" idx="5" sz="quarter"/>
-          </p:nvPr>
-        </p:nvSpPr>
-        <p:spPr/>
+            <a:endParaRPr/>
+          </a:p>
+        </p:txBody>
+      </p:sp>
+      <p:sp>
+        <p:nvSpPr>
+          <p:cNvPr id="558973347" name="Slide Number Placeholder 3"/>
+          <p:cNvSpPr>
+            <a:spLocks noGrp="1"/>
+          </p:cNvSpPr>
+          <p:nvPr>
+            <p:ph type="sldNum" sz="quarter" idx="5"/>
+          </p:nvPr>
+        </p:nvSpPr>
+        <p:spPr bwMode="auto"/>
       </p:sp>
     </p:spTree>
   </p:cSld>
@@ -542,15 +520,15 @@
 </file>
 
 <file path=ppt/notesSlides/notesSlide10.xml><?xml version="1.0" encoding="utf-8"?>
-<p:notes xmlns:a="http://schemas.openxmlformats.org/drawingml/2006/main" xmlns:p="http://schemas.openxmlformats.org/presentationml/2006/main" xmlns:r="http://schemas.openxmlformats.org/officeDocument/2006/relationships">
-  <p:cSld>
+<p:notes xmlns:a="http://schemas.openxmlformats.org/drawingml/2006/main" xmlns:r="http://schemas.openxmlformats.org/officeDocument/2006/relationships" xmlns:p="http://schemas.openxmlformats.org/presentationml/2006/main" xmlns:m="http://schemas.openxmlformats.org/officeDocument/2006/math" xmlns:w="http://schemas.openxmlformats.org/wordprocessingml/2006/main">
+  <p:cSld name="">
     <p:spTree>
       <p:nvGrpSpPr>
         <p:cNvPr id="1" name=""/>
         <p:cNvGrpSpPr/>
         <p:nvPr/>
       </p:nvGrpSpPr>
-      <p:grpSpPr>
+      <p:grpSpPr bwMode="auto">
         <a:xfrm>
           <a:off x="0" y="0"/>
           <a:ext cx="0" cy="0"/>
@@ -560,7 +538,7 @@
       </p:grpSpPr>
       <p:sp>
         <p:nvSpPr>
-          <p:cNvPr id="2" name="Slide Image Placeholder 1"/>
+          <p:cNvPr id="1867317133" name="Slide Image Placeholder 1"/>
           <p:cNvSpPr>
             <a:spLocks noGrp="1"/>
           </p:cNvSpPr>
@@ -568,40 +546,45 @@
             <p:ph type="sldImg" idx="2"/>
           </p:nvPr>
         </p:nvSpPr>
-        <p:spPr/>
-      </p:sp>
-      <p:sp>
-        <p:nvSpPr>
-          <p:cNvPr id="3" name="Notes Placeholder 2"/>
-          <p:cNvSpPr>
-            <a:spLocks noGrp="1"/>
-          </p:cNvSpPr>
-          <p:nvPr>
-            <p:ph type="body" idx="3" sz="quarter"/>
-          </p:nvPr>
-        </p:nvSpPr>
-        <p:spPr/>
+        <p:spPr bwMode="auto"/>
+      </p:sp>
+      <p:sp>
+        <p:nvSpPr>
+          <p:cNvPr id="1915156382" name="Notes Placeholder 2"/>
+          <p:cNvSpPr>
+            <a:spLocks noGrp="1"/>
+          </p:cNvSpPr>
+          <p:nvPr>
+            <p:ph type="body" sz="quarter" idx="3"/>
+          </p:nvPr>
+        </p:nvSpPr>
+        <p:spPr bwMode="auto"/>
         <p:txBody>
           <a:bodyPr/>
           <a:lstStyle/>
           <a:p>
-            <a:r>
+            <a:pPr>
+              <a:defRPr/>
+            </a:pPr>
+            <a:r>
+              <a:rPr/>
               <a:t>Read Aggarwal's three definitions verbatim. Filter: "A crisp mathematical criterion is available to evaluate the quality of a feature or a subset of features." Wrapper: "It is assumed that a classification algorithm is available to evaluate how well the algorithm performs with a particular subset of features. A feature search algorithm is then wrapped around this algorithm." Embedded: "The solution to a classification model often contains useful hints about the most relevant features." Then the decisive contrast: "Filter models are agnostic to the particular classification algorithm being used" — whereas a wrapper's result "will be sensitive to the choice of the algorithm A." Walk the figure: filter selects first, then learns (no feedback loop); wrapper loops generate-subset → learning algorithm → performance; embedded folds selection into the learning algorithm itself. Named embedded techniques: Lasso / L1-regularised SVM (sparse learning), decision trees, and recursive feature elimination (RFE). Image credits: Lucien Mousin and Lastdreamer7591, CC BY-SA 4.0, via Wikimedia Commons.</a:t>
             </a:r>
-          </a:p>
-        </p:txBody>
-      </p:sp>
-      <p:sp>
-        <p:nvSpPr>
-          <p:cNvPr id="4" name="Slide Number Placeholder 3"/>
-          <p:cNvSpPr>
-            <a:spLocks noGrp="1"/>
-          </p:cNvSpPr>
-          <p:nvPr>
-            <p:ph type="sldNum" idx="5" sz="quarter"/>
-          </p:nvPr>
-        </p:nvSpPr>
-        <p:spPr/>
+            <a:endParaRPr/>
+          </a:p>
+        </p:txBody>
+      </p:sp>
+      <p:sp>
+        <p:nvSpPr>
+          <p:cNvPr id="619311421" name="Slide Number Placeholder 3"/>
+          <p:cNvSpPr>
+            <a:spLocks noGrp="1"/>
+          </p:cNvSpPr>
+          <p:nvPr>
+            <p:ph type="sldNum" sz="quarter" idx="5"/>
+          </p:nvPr>
+        </p:nvSpPr>
+        <p:spPr bwMode="auto"/>
       </p:sp>
     </p:spTree>
   </p:cSld>
@@ -612,15 +595,15 @@
 </file>
 
 <file path=ppt/notesSlides/notesSlide11.xml><?xml version="1.0" encoding="utf-8"?>
-<p:notes xmlns:a="http://schemas.openxmlformats.org/drawingml/2006/main" xmlns:p="http://schemas.openxmlformats.org/presentationml/2006/main" xmlns:r="http://schemas.openxmlformats.org/officeDocument/2006/relationships">
-  <p:cSld>
+<p:notes xmlns:a="http://schemas.openxmlformats.org/drawingml/2006/main" xmlns:r="http://schemas.openxmlformats.org/officeDocument/2006/relationships" xmlns:p="http://schemas.openxmlformats.org/presentationml/2006/main" xmlns:m="http://schemas.openxmlformats.org/officeDocument/2006/math" xmlns:w="http://schemas.openxmlformats.org/wordprocessingml/2006/main">
+  <p:cSld name="">
     <p:spTree>
       <p:nvGrpSpPr>
         <p:cNvPr id="1" name=""/>
         <p:cNvGrpSpPr/>
         <p:nvPr/>
       </p:nvGrpSpPr>
-      <p:grpSpPr>
+      <p:grpSpPr bwMode="auto">
         <a:xfrm>
           <a:off x="0" y="0"/>
           <a:ext cx="0" cy="0"/>
@@ -630,7 +613,7 @@
       </p:grpSpPr>
       <p:sp>
         <p:nvSpPr>
-          <p:cNvPr id="2" name="Slide Image Placeholder 1"/>
+          <p:cNvPr id="1996785607" name="Slide Image Placeholder 1"/>
           <p:cNvSpPr>
             <a:spLocks noGrp="1"/>
           </p:cNvSpPr>
@@ -638,40 +621,45 @@
             <p:ph type="sldImg" idx="2"/>
           </p:nvPr>
         </p:nvSpPr>
-        <p:spPr/>
-      </p:sp>
-      <p:sp>
-        <p:nvSpPr>
-          <p:cNvPr id="3" name="Notes Placeholder 2"/>
-          <p:cNvSpPr>
-            <a:spLocks noGrp="1"/>
-          </p:cNvSpPr>
-          <p:nvPr>
-            <p:ph type="body" idx="3" sz="quarter"/>
-          </p:nvPr>
-        </p:nvSpPr>
-        <p:spPr/>
+        <p:spPr bwMode="auto"/>
+      </p:sp>
+      <p:sp>
+        <p:nvSpPr>
+          <p:cNvPr id="354060304" name="Notes Placeholder 2"/>
+          <p:cNvSpPr>
+            <a:spLocks noGrp="1"/>
+          </p:cNvSpPr>
+          <p:nvPr>
+            <p:ph type="body" sz="quarter" idx="3"/>
+          </p:nvPr>
+        </p:nvSpPr>
+        <p:spPr bwMode="auto"/>
         <p:txBody>
           <a:bodyPr/>
           <a:lstStyle/>
           <a:p>
-            <a:r>
+            <a:pPr>
+              <a:defRPr/>
+            </a:pPr>
+            <a:r>
+              <a:rPr/>
               <a:t>Explain the task split: classification has a label, so the score is class-sensitive; clustering has no label, so the score must ask whether the feature subset makes the data look clustered. Read Aggarwal: "the distance distribution for uniform data is arranged in the form of a bell curve, whereas that for clustered data has two different peaks corresponding to the intercluster distributions and intracluster distributions." In the figure, panels (c) and (d) show the two distributions. Then the three named measures: term strength (Eq. 6.1, for sparse text data), classification-based relevance (predict one attribute from the rest; accuracy is relevance), and the Hopkins statistic (Eq. 6.3), where 0.5 means uniform and closer to 1 means clustered. Note that a wrapper in clustering uses a cluster-validity criterion instead of classifier accuracy, because there is no label.</a:t>
             </a:r>
-          </a:p>
-        </p:txBody>
-      </p:sp>
-      <p:sp>
-        <p:nvSpPr>
-          <p:cNvPr id="4" name="Slide Number Placeholder 3"/>
-          <p:cNvSpPr>
-            <a:spLocks noGrp="1"/>
-          </p:cNvSpPr>
-          <p:nvPr>
-            <p:ph type="sldNum" idx="5" sz="quarter"/>
-          </p:nvPr>
-        </p:nvSpPr>
-        <p:spPr/>
+            <a:endParaRPr/>
+          </a:p>
+        </p:txBody>
+      </p:sp>
+      <p:sp>
+        <p:nvSpPr>
+          <p:cNvPr id="34406694" name="Slide Number Placeholder 3"/>
+          <p:cNvSpPr>
+            <a:spLocks noGrp="1"/>
+          </p:cNvSpPr>
+          <p:nvPr>
+            <p:ph type="sldNum" sz="quarter" idx="5"/>
+          </p:nvPr>
+        </p:nvSpPr>
+        <p:spPr bwMode="auto"/>
       </p:sp>
     </p:spTree>
   </p:cSld>
@@ -682,15 +670,15 @@
 </file>
 
 <file path=ppt/notesSlides/notesSlide12.xml><?xml version="1.0" encoding="utf-8"?>
-<p:notes xmlns:a="http://schemas.openxmlformats.org/drawingml/2006/main" xmlns:p="http://schemas.openxmlformats.org/presentationml/2006/main" xmlns:r="http://schemas.openxmlformats.org/officeDocument/2006/relationships">
-  <p:cSld>
+<p:notes xmlns:a="http://schemas.openxmlformats.org/drawingml/2006/main" xmlns:r="http://schemas.openxmlformats.org/officeDocument/2006/relationships" xmlns:p="http://schemas.openxmlformats.org/presentationml/2006/main" xmlns:m="http://schemas.openxmlformats.org/officeDocument/2006/math" xmlns:w="http://schemas.openxmlformats.org/wordprocessingml/2006/main">
+  <p:cSld name="">
     <p:spTree>
       <p:nvGrpSpPr>
         <p:cNvPr id="1" name=""/>
         <p:cNvGrpSpPr/>
         <p:nvPr/>
       </p:nvGrpSpPr>
-      <p:grpSpPr>
+      <p:grpSpPr bwMode="auto">
         <a:xfrm>
           <a:off x="0" y="0"/>
           <a:ext cx="0" cy="0"/>
@@ -700,7 +688,7 @@
       </p:grpSpPr>
       <p:sp>
         <p:nvSpPr>
-          <p:cNvPr id="2" name="Slide Image Placeholder 1"/>
+          <p:cNvPr id="2108511413" name="Slide Image Placeholder 1"/>
           <p:cNvSpPr>
             <a:spLocks noGrp="1"/>
           </p:cNvSpPr>
@@ -708,40 +696,45 @@
             <p:ph type="sldImg" idx="2"/>
           </p:nvPr>
         </p:nvSpPr>
-        <p:spPr/>
-      </p:sp>
-      <p:sp>
-        <p:nvSpPr>
-          <p:cNvPr id="3" name="Notes Placeholder 2"/>
-          <p:cNvSpPr>
-            <a:spLocks noGrp="1"/>
-          </p:cNvSpPr>
-          <p:nvPr>
-            <p:ph type="body" idx="3" sz="quarter"/>
-          </p:nvPr>
-        </p:nvSpPr>
-        <p:spPr/>
+        <p:spPr bwMode="auto"/>
+      </p:sp>
+      <p:sp>
+        <p:nvSpPr>
+          <p:cNvPr id="1792062246" name="Notes Placeholder 2"/>
+          <p:cNvSpPr>
+            <a:spLocks noGrp="1"/>
+          </p:cNvSpPr>
+          <p:nvPr>
+            <p:ph type="body" sz="quarter" idx="3"/>
+          </p:nvPr>
+        </p:nvSpPr>
+        <p:spPr bwMode="auto"/>
         <p:txBody>
           <a:bodyPr/>
           <a:lstStyle/>
           <a:p>
-            <a:r>
+            <a:pPr>
+              <a:defRPr/>
+            </a:pPr>
+            <a:r>
+              <a:rPr/>
               <a:t>Read the H&amp;K passage on attribute construction, and note that "in the machine learning literature, attribute construction is known as feature construction." Its value: "By combining attributes, attribute construction can discover missing information about the relationships between data attributes." Keep the three-way contrast sharp, because it is a recurring exam question: selection removes existing columns, construction adds a new column on the same axes, extraction builds new axes. Give the one-line example: area = height x width.</a:t>
             </a:r>
-          </a:p>
-        </p:txBody>
-      </p:sp>
-      <p:sp>
-        <p:nvSpPr>
-          <p:cNvPr id="4" name="Slide Number Placeholder 3"/>
-          <p:cNvSpPr>
-            <a:spLocks noGrp="1"/>
-          </p:cNvSpPr>
-          <p:nvPr>
-            <p:ph type="sldNum" idx="5" sz="quarter"/>
-          </p:nvPr>
-        </p:nvSpPr>
-        <p:spPr/>
+            <a:endParaRPr/>
+          </a:p>
+        </p:txBody>
+      </p:sp>
+      <p:sp>
+        <p:nvSpPr>
+          <p:cNvPr id="1275390347" name="Slide Number Placeholder 3"/>
+          <p:cNvSpPr>
+            <a:spLocks noGrp="1"/>
+          </p:cNvSpPr>
+          <p:nvPr>
+            <p:ph type="sldNum" sz="quarter" idx="5"/>
+          </p:nvPr>
+        </p:nvSpPr>
+        <p:spPr bwMode="auto"/>
       </p:sp>
     </p:spTree>
   </p:cSld>
@@ -752,15 +745,15 @@
 </file>
 
 <file path=ppt/notesSlides/notesSlide13.xml><?xml version="1.0" encoding="utf-8"?>
-<p:notes xmlns:a="http://schemas.openxmlformats.org/drawingml/2006/main" xmlns:p="http://schemas.openxmlformats.org/presentationml/2006/main" xmlns:r="http://schemas.openxmlformats.org/officeDocument/2006/relationships">
-  <p:cSld>
+<p:notes xmlns:a="http://schemas.openxmlformats.org/drawingml/2006/main" xmlns:r="http://schemas.openxmlformats.org/officeDocument/2006/relationships" xmlns:p="http://schemas.openxmlformats.org/presentationml/2006/main" xmlns:m="http://schemas.openxmlformats.org/officeDocument/2006/math" xmlns:w="http://schemas.openxmlformats.org/wordprocessingml/2006/main">
+  <p:cSld name="">
     <p:spTree>
       <p:nvGrpSpPr>
         <p:cNvPr id="1" name=""/>
         <p:cNvGrpSpPr/>
         <p:nvPr/>
       </p:nvGrpSpPr>
-      <p:grpSpPr>
+      <p:grpSpPr bwMode="auto">
         <a:xfrm>
           <a:off x="0" y="0"/>
           <a:ext cx="0" cy="0"/>
@@ -770,7 +763,7 @@
       </p:grpSpPr>
       <p:sp>
         <p:nvSpPr>
-          <p:cNvPr id="2" name="Slide Image Placeholder 1"/>
+          <p:cNvPr id="1508721277" name="Slide Image Placeholder 1"/>
           <p:cNvSpPr>
             <a:spLocks noGrp="1"/>
           </p:cNvSpPr>
@@ -778,40 +771,45 @@
             <p:ph type="sldImg" idx="2"/>
           </p:nvPr>
         </p:nvSpPr>
-        <p:spPr/>
-      </p:sp>
-      <p:sp>
-        <p:nvSpPr>
-          <p:cNvPr id="3" name="Notes Placeholder 2"/>
-          <p:cNvSpPr>
-            <a:spLocks noGrp="1"/>
-          </p:cNvSpPr>
-          <p:nvPr>
-            <p:ph type="body" idx="3" sz="quarter"/>
-          </p:nvPr>
-        </p:nvSpPr>
-        <p:spPr/>
+        <p:spPr bwMode="auto"/>
+      </p:sp>
+      <p:sp>
+        <p:nvSpPr>
+          <p:cNvPr id="272093095" name="Notes Placeholder 2"/>
+          <p:cNvSpPr>
+            <a:spLocks noGrp="1"/>
+          </p:cNvSpPr>
+          <p:nvPr>
+            <p:ph type="body" sz="quarter" idx="3"/>
+          </p:nvPr>
+        </p:nvSpPr>
+        <p:spPr bwMode="auto"/>
         <p:txBody>
           <a:bodyPr/>
           <a:lstStyle/>
           <a:p>
-            <a:r>
+            <a:pPr>
+              <a:defRPr/>
+            </a:pPr>
+            <a:r>
+              <a:rPr/>
               <a:t>Drill the five traps as a rapid-fire recall. Then add the shapes of question the subject invites: define-and-distinguish (short answer); explain-the-mechanics (why 2ⁿ, why greedy, how a tree selects); compute (Gini and entropy from a small table, Fisher score from means and standard deviations, a forward-selection trace); and judge-and-choose (text data with no labels → term strength or Hopkins; a linear classifier → embedded, inspect |wi|). Close with the three sentences worth memorising verbatim: the goal definition (H&amp;K p.104), "there are 2ⁿ possible subsets" (H&amp;K p.104), and "Filter models are agnostic to the particular classification algorithm being used" (Aggarwal §10.2.2).</a:t>
             </a:r>
-          </a:p>
-        </p:txBody>
-      </p:sp>
-      <p:sp>
-        <p:nvSpPr>
-          <p:cNvPr id="4" name="Slide Number Placeholder 3"/>
-          <p:cNvSpPr>
-            <a:spLocks noGrp="1"/>
-          </p:cNvSpPr>
-          <p:nvPr>
-            <p:ph type="sldNum" idx="5" sz="quarter"/>
-          </p:nvPr>
-        </p:nvSpPr>
-        <p:spPr/>
+            <a:endParaRPr/>
+          </a:p>
+        </p:txBody>
+      </p:sp>
+      <p:sp>
+        <p:nvSpPr>
+          <p:cNvPr id="692971860" name="Slide Number Placeholder 3"/>
+          <p:cNvSpPr>
+            <a:spLocks noGrp="1"/>
+          </p:cNvSpPr>
+          <p:nvPr>
+            <p:ph type="sldNum" sz="quarter" idx="5"/>
+          </p:nvPr>
+        </p:nvSpPr>
+        <p:spPr bwMode="auto"/>
       </p:sp>
     </p:spTree>
   </p:cSld>
@@ -822,15 +820,15 @@
 </file>
 
 <file path=ppt/notesSlides/notesSlide14.xml><?xml version="1.0" encoding="utf-8"?>
-<p:notes xmlns:a="http://schemas.openxmlformats.org/drawingml/2006/main" xmlns:p="http://schemas.openxmlformats.org/presentationml/2006/main" xmlns:r="http://schemas.openxmlformats.org/officeDocument/2006/relationships">
-  <p:cSld>
+<p:notes xmlns:a="http://schemas.openxmlformats.org/drawingml/2006/main" xmlns:r="http://schemas.openxmlformats.org/officeDocument/2006/relationships" xmlns:p="http://schemas.openxmlformats.org/presentationml/2006/main" xmlns:m="http://schemas.openxmlformats.org/officeDocument/2006/math" xmlns:w="http://schemas.openxmlformats.org/wordprocessingml/2006/main">
+  <p:cSld name="">
     <p:spTree>
       <p:nvGrpSpPr>
         <p:cNvPr id="1" name=""/>
         <p:cNvGrpSpPr/>
         <p:nvPr/>
       </p:nvGrpSpPr>
-      <p:grpSpPr>
+      <p:grpSpPr bwMode="auto">
         <a:xfrm>
           <a:off x="0" y="0"/>
           <a:ext cx="0" cy="0"/>
@@ -840,7 +838,7 @@
       </p:grpSpPr>
       <p:sp>
         <p:nvSpPr>
-          <p:cNvPr id="2" name="Slide Image Placeholder 1"/>
+          <p:cNvPr id="676013811" name="Slide Image Placeholder 1"/>
           <p:cNvSpPr>
             <a:spLocks noGrp="1"/>
           </p:cNvSpPr>
@@ -848,40 +846,45 @@
             <p:ph type="sldImg" idx="2"/>
           </p:nvPr>
         </p:nvSpPr>
-        <p:spPr/>
-      </p:sp>
-      <p:sp>
-        <p:nvSpPr>
-          <p:cNvPr id="3" name="Notes Placeholder 2"/>
-          <p:cNvSpPr>
-            <a:spLocks noGrp="1"/>
-          </p:cNvSpPr>
-          <p:nvPr>
-            <p:ph type="body" idx="3" sz="quarter"/>
-          </p:nvPr>
-        </p:nvSpPr>
-        <p:spPr/>
+        <p:spPr bwMode="auto"/>
+      </p:sp>
+      <p:sp>
+        <p:nvSpPr>
+          <p:cNvPr id="236149709" name="Notes Placeholder 2"/>
+          <p:cNvSpPr>
+            <a:spLocks noGrp="1"/>
+          </p:cNvSpPr>
+          <p:nvPr>
+            <p:ph type="body" sz="quarter" idx="3"/>
+          </p:nvPr>
+        </p:nvSpPr>
+        <p:spPr bwMode="auto"/>
         <p:txBody>
           <a:bodyPr/>
           <a:lstStyle/>
           <a:p>
-            <a:r>
+            <a:pPr>
+              <a:defRPr/>
+            </a:pPr>
+            <a:r>
+              <a:rPr/>
               <a:t>Deliver this as the closing summary and stop. If the audience remembers nothing else, they should remember these five lines: the problem, the goal, the obstacle, the two families of scoring, and the one distinction. Invite questions.</a:t>
             </a:r>
-          </a:p>
-        </p:txBody>
-      </p:sp>
-      <p:sp>
-        <p:nvSpPr>
-          <p:cNvPr id="4" name="Slide Number Placeholder 3"/>
-          <p:cNvSpPr>
-            <a:spLocks noGrp="1"/>
-          </p:cNvSpPr>
-          <p:nvPr>
-            <p:ph type="sldNum" idx="5" sz="quarter"/>
-          </p:nvPr>
-        </p:nvSpPr>
-        <p:spPr/>
+            <a:endParaRPr/>
+          </a:p>
+        </p:txBody>
+      </p:sp>
+      <p:sp>
+        <p:nvSpPr>
+          <p:cNvPr id="234438705" name="Slide Number Placeholder 3"/>
+          <p:cNvSpPr>
+            <a:spLocks noGrp="1"/>
+          </p:cNvSpPr>
+          <p:nvPr>
+            <p:ph type="sldNum" sz="quarter" idx="5"/>
+          </p:nvPr>
+        </p:nvSpPr>
+        <p:spPr bwMode="auto"/>
       </p:sp>
     </p:spTree>
   </p:cSld>
@@ -892,15 +895,15 @@
 </file>
 
 <file path=ppt/notesSlides/notesSlide15.xml><?xml version="1.0" encoding="utf-8"?>
-<p:notes xmlns:a="http://schemas.openxmlformats.org/drawingml/2006/main" xmlns:p="http://schemas.openxmlformats.org/presentationml/2006/main" xmlns:r="http://schemas.openxmlformats.org/officeDocument/2006/relationships">
-  <p:cSld>
+<p:notes xmlns:a="http://schemas.openxmlformats.org/drawingml/2006/main" xmlns:r="http://schemas.openxmlformats.org/officeDocument/2006/relationships" xmlns:p="http://schemas.openxmlformats.org/presentationml/2006/main" xmlns:m="http://schemas.openxmlformats.org/officeDocument/2006/math" xmlns:w="http://schemas.openxmlformats.org/wordprocessingml/2006/main">
+  <p:cSld name="">
     <p:spTree>
       <p:nvGrpSpPr>
         <p:cNvPr id="1" name=""/>
         <p:cNvGrpSpPr/>
         <p:nvPr/>
       </p:nvGrpSpPr>
-      <p:grpSpPr>
+      <p:grpSpPr bwMode="auto">
         <a:xfrm>
           <a:off x="0" y="0"/>
           <a:ext cx="0" cy="0"/>
@@ -910,7 +913,7 @@
       </p:grpSpPr>
       <p:sp>
         <p:nvSpPr>
-          <p:cNvPr id="2" name="Slide Image Placeholder 1"/>
+          <p:cNvPr id="425409253" name="Slide Image Placeholder 1"/>
           <p:cNvSpPr>
             <a:spLocks noGrp="1"/>
           </p:cNvSpPr>
@@ -918,40 +921,45 @@
             <p:ph type="sldImg" idx="2"/>
           </p:nvPr>
         </p:nvSpPr>
-        <p:spPr/>
-      </p:sp>
-      <p:sp>
-        <p:nvSpPr>
-          <p:cNvPr id="3" name="Notes Placeholder 2"/>
-          <p:cNvSpPr>
-            <a:spLocks noGrp="1"/>
-          </p:cNvSpPr>
-          <p:nvPr>
-            <p:ph type="body" idx="3" sz="quarter"/>
-          </p:nvPr>
-        </p:nvSpPr>
-        <p:spPr/>
+        <p:spPr bwMode="auto"/>
+      </p:sp>
+      <p:sp>
+        <p:nvSpPr>
+          <p:cNvPr id="1990886020" name="Notes Placeholder 2"/>
+          <p:cNvSpPr>
+            <a:spLocks noGrp="1"/>
+          </p:cNvSpPr>
+          <p:nvPr>
+            <p:ph type="body" sz="quarter" idx="3"/>
+          </p:nvPr>
+        </p:nvSpPr>
+        <p:spPr bwMode="auto"/>
         <p:txBody>
           <a:bodyPr/>
           <a:lstStyle/>
           <a:p>
-            <a:r>
+            <a:pPr>
+              <a:defRPr/>
+            </a:pPr>
+            <a:r>
+              <a:rPr/>
               <a:t>State the sources cleanly and credit the CC BY-SA 4.0 images. If the professor asks where a number or definition came from, every claim is anchored to a page in one of the two books: H&amp;K §3.4.4 (pp. 103-105), Aggarwal §10.2 (pp. 287-293) and §6.2 (pp. 155-158).</a:t>
             </a:r>
-          </a:p>
-        </p:txBody>
-      </p:sp>
-      <p:sp>
-        <p:nvSpPr>
-          <p:cNvPr id="4" name="Slide Number Placeholder 3"/>
-          <p:cNvSpPr>
-            <a:spLocks noGrp="1"/>
-          </p:cNvSpPr>
-          <p:nvPr>
-            <p:ph type="sldNum" idx="5" sz="quarter"/>
-          </p:nvPr>
-        </p:nvSpPr>
-        <p:spPr/>
+            <a:endParaRPr/>
+          </a:p>
+        </p:txBody>
+      </p:sp>
+      <p:sp>
+        <p:nvSpPr>
+          <p:cNvPr id="892472677" name="Slide Number Placeholder 3"/>
+          <p:cNvSpPr>
+            <a:spLocks noGrp="1"/>
+          </p:cNvSpPr>
+          <p:nvPr>
+            <p:ph type="sldNum" sz="quarter" idx="5"/>
+          </p:nvPr>
+        </p:nvSpPr>
+        <p:spPr bwMode="auto"/>
       </p:sp>
     </p:spTree>
   </p:cSld>
@@ -962,15 +970,15 @@
 </file>
 
 <file path=ppt/notesSlides/notesSlide2.xml><?xml version="1.0" encoding="utf-8"?>
-<p:notes xmlns:a="http://schemas.openxmlformats.org/drawingml/2006/main" xmlns:p="http://schemas.openxmlformats.org/presentationml/2006/main" xmlns:r="http://schemas.openxmlformats.org/officeDocument/2006/relationships">
-  <p:cSld>
+<p:notes xmlns:a="http://schemas.openxmlformats.org/drawingml/2006/main" xmlns:r="http://schemas.openxmlformats.org/officeDocument/2006/relationships" xmlns:p="http://schemas.openxmlformats.org/presentationml/2006/main" xmlns:m="http://schemas.openxmlformats.org/officeDocument/2006/math" xmlns:w="http://schemas.openxmlformats.org/wordprocessingml/2006/main">
+  <p:cSld name="">
     <p:spTree>
       <p:nvGrpSpPr>
         <p:cNvPr id="1" name=""/>
         <p:cNvGrpSpPr/>
         <p:nvPr/>
       </p:nvGrpSpPr>
-      <p:grpSpPr>
+      <p:grpSpPr bwMode="auto">
         <a:xfrm>
           <a:off x="0" y="0"/>
           <a:ext cx="0" cy="0"/>
@@ -980,7 +988,7 @@
       </p:grpSpPr>
       <p:sp>
         <p:nvSpPr>
-          <p:cNvPr id="2" name="Slide Image Placeholder 1"/>
+          <p:cNvPr id="1146333787" name="Slide Image Placeholder 1"/>
           <p:cNvSpPr>
             <a:spLocks noGrp="1"/>
           </p:cNvSpPr>
@@ -988,40 +996,45 @@
             <p:ph type="sldImg" idx="2"/>
           </p:nvPr>
         </p:nvSpPr>
-        <p:spPr/>
-      </p:sp>
-      <p:sp>
-        <p:nvSpPr>
-          <p:cNvPr id="3" name="Notes Placeholder 2"/>
-          <p:cNvSpPr>
-            <a:spLocks noGrp="1"/>
-          </p:cNvSpPr>
-          <p:nvPr>
-            <p:ph type="body" idx="3" sz="quarter"/>
-          </p:nvPr>
-        </p:nvSpPr>
-        <p:spPr/>
+        <p:spPr bwMode="auto"/>
+      </p:sp>
+      <p:sp>
+        <p:nvSpPr>
+          <p:cNvPr id="738243316" name="Notes Placeholder 2"/>
+          <p:cNvSpPr>
+            <a:spLocks noGrp="1"/>
+          </p:cNvSpPr>
+          <p:nvPr>
+            <p:ph type="body" sz="quarter" idx="3"/>
+          </p:nvPr>
+        </p:nvSpPr>
+        <p:spPr bwMode="auto"/>
         <p:txBody>
           <a:bodyPr/>
           <a:lstStyle/>
           <a:p>
-            <a:r>
+            <a:pPr>
+              <a:defRPr/>
+            </a:pPr>
+            <a:r>
+              <a:rPr/>
               <a:t>Read the two H&amp;K sentences: "Data sets for analysis may contain hundreds of attributes, many of which may be irrelevant to the mining task or redundant." and "Leaving out relevant attributes or keeping irrelevant attributes may be detrimental... the added volume of irrelevant or redundant attributes can slow down the mining process." The figure shows exactly what redundancy looks like: the data is correlated, so most of its spread lies along one direction — the other dimensions carry almost no new information. Stress the exam distinction: irrelevant = no link to the target; redundant = duplicates another feature. Then the key sentence: we cannot simply ask the domain expert, because H&amp;K say the job is "difficult and time-consuming, especially when the data's behavior is not well known" — which is the whole reason the selection must be automatic.</a:t>
             </a:r>
-          </a:p>
-        </p:txBody>
-      </p:sp>
-      <p:sp>
-        <p:nvSpPr>
-          <p:cNvPr id="4" name="Slide Number Placeholder 3"/>
-          <p:cNvSpPr>
-            <a:spLocks noGrp="1"/>
-          </p:cNvSpPr>
-          <p:nvPr>
-            <p:ph type="sldNum" idx="5" sz="quarter"/>
-          </p:nvPr>
-        </p:nvSpPr>
-        <p:spPr/>
+            <a:endParaRPr/>
+          </a:p>
+        </p:txBody>
+      </p:sp>
+      <p:sp>
+        <p:nvSpPr>
+          <p:cNvPr id="1673709553" name="Slide Number Placeholder 3"/>
+          <p:cNvSpPr>
+            <a:spLocks noGrp="1"/>
+          </p:cNvSpPr>
+          <p:nvPr>
+            <p:ph type="sldNum" sz="quarter" idx="5"/>
+          </p:nvPr>
+        </p:nvSpPr>
+        <p:spPr bwMode="auto"/>
       </p:sp>
     </p:spTree>
   </p:cSld>
@@ -1032,15 +1045,15 @@
 </file>
 
 <file path=ppt/notesSlides/notesSlide3.xml><?xml version="1.0" encoding="utf-8"?>
-<p:notes xmlns:a="http://schemas.openxmlformats.org/drawingml/2006/main" xmlns:p="http://schemas.openxmlformats.org/presentationml/2006/main" xmlns:r="http://schemas.openxmlformats.org/officeDocument/2006/relationships">
-  <p:cSld>
+<p:notes xmlns:a="http://schemas.openxmlformats.org/drawingml/2006/main" xmlns:r="http://schemas.openxmlformats.org/officeDocument/2006/relationships" xmlns:p="http://schemas.openxmlformats.org/presentationml/2006/main" xmlns:m="http://schemas.openxmlformats.org/officeDocument/2006/math" xmlns:w="http://schemas.openxmlformats.org/wordprocessingml/2006/main">
+  <p:cSld name="">
     <p:spTree>
       <p:nvGrpSpPr>
         <p:cNvPr id="1" name=""/>
         <p:cNvGrpSpPr/>
         <p:nvPr/>
       </p:nvGrpSpPr>
-      <p:grpSpPr>
+      <p:grpSpPr bwMode="auto">
         <a:xfrm>
           <a:off x="0" y="0"/>
           <a:ext cx="0" cy="0"/>
@@ -1050,7 +1063,7 @@
       </p:grpSpPr>
       <p:sp>
         <p:nvSpPr>
-          <p:cNvPr id="2" name="Slide Image Placeholder 1"/>
+          <p:cNvPr id="64438162" name="Slide Image Placeholder 1"/>
           <p:cNvSpPr>
             <a:spLocks noGrp="1"/>
           </p:cNvSpPr>
@@ -1058,40 +1071,45 @@
             <p:ph type="sldImg" idx="2"/>
           </p:nvPr>
         </p:nvSpPr>
-        <p:spPr/>
-      </p:sp>
-      <p:sp>
-        <p:nvSpPr>
-          <p:cNvPr id="3" name="Notes Placeholder 2"/>
-          <p:cNvSpPr>
-            <a:spLocks noGrp="1"/>
-          </p:cNvSpPr>
-          <p:nvPr>
-            <p:ph type="body" idx="3" sz="quarter"/>
-          </p:nvPr>
-        </p:nvSpPr>
-        <p:spPr/>
+        <p:spPr bwMode="auto"/>
+      </p:sp>
+      <p:sp>
+        <p:nvSpPr>
+          <p:cNvPr id="995318400" name="Notes Placeholder 2"/>
+          <p:cNvSpPr>
+            <a:spLocks noGrp="1"/>
+          </p:cNvSpPr>
+          <p:nvPr>
+            <p:ph type="body" sz="quarter" idx="3"/>
+          </p:nvPr>
+        </p:nvSpPr>
+        <p:spPr bwMode="auto"/>
         <p:txBody>
           <a:bodyPr/>
           <a:lstStyle/>
           <a:p>
-            <a:r>
+            <a:pPr>
+              <a:defRPr/>
+            </a:pPr>
+            <a:r>
+              <a:rPr/>
               <a:t>This slide exists to prevent the single most common exam error. H&amp;K define attribute subset selection as reducing the data set "by removing irrelevant or redundant attributes (or dimensions)", and note that "in machine learning, attribute subset selection is known as feature subset selection". The direction of each operation is the thing to memorise: Select removes; Construct adds a column (same axes); Extract changes the axes entirely. One memorable line: "selection picks from the shelf; extraction builds a new shelf." Structural fact worth stating: H&amp;K place §3.4.4 inside §3.4 Data Reduction, right after wavelet transforms (§3.4.2) and PCA (§3.4.3) — so the textbook classifies selection as one reduction strategy among several.</a:t>
             </a:r>
-          </a:p>
-        </p:txBody>
-      </p:sp>
-      <p:sp>
-        <p:nvSpPr>
-          <p:cNvPr id="4" name="Slide Number Placeholder 3"/>
-          <p:cNvSpPr>
-            <a:spLocks noGrp="1"/>
-          </p:cNvSpPr>
-          <p:nvPr>
-            <p:ph type="sldNum" idx="5" sz="quarter"/>
-          </p:nvPr>
-        </p:nvSpPr>
-        <p:spPr/>
+            <a:endParaRPr/>
+          </a:p>
+        </p:txBody>
+      </p:sp>
+      <p:sp>
+        <p:nvSpPr>
+          <p:cNvPr id="1317658734" name="Slide Number Placeholder 3"/>
+          <p:cNvSpPr>
+            <a:spLocks noGrp="1"/>
+          </p:cNvSpPr>
+          <p:nvPr>
+            <p:ph type="sldNum" sz="quarter" idx="5"/>
+          </p:nvPr>
+        </p:nvSpPr>
+        <p:spPr bwMode="auto"/>
       </p:sp>
     </p:spTree>
   </p:cSld>
@@ -1102,15 +1120,15 @@
 </file>
 
 <file path=ppt/notesSlides/notesSlide4.xml><?xml version="1.0" encoding="utf-8"?>
-<p:notes xmlns:a="http://schemas.openxmlformats.org/drawingml/2006/main" xmlns:p="http://schemas.openxmlformats.org/presentationml/2006/main" xmlns:r="http://schemas.openxmlformats.org/officeDocument/2006/relationships">
-  <p:cSld>
+<p:notes xmlns:a="http://schemas.openxmlformats.org/drawingml/2006/main" xmlns:r="http://schemas.openxmlformats.org/officeDocument/2006/relationships" xmlns:p="http://schemas.openxmlformats.org/presentationml/2006/main" xmlns:m="http://schemas.openxmlformats.org/officeDocument/2006/math" xmlns:w="http://schemas.openxmlformats.org/wordprocessingml/2006/main">
+  <p:cSld name="">
     <p:spTree>
       <p:nvGrpSpPr>
         <p:cNvPr id="1" name=""/>
         <p:cNvGrpSpPr/>
         <p:nvPr/>
       </p:nvGrpSpPr>
-      <p:grpSpPr>
+      <p:grpSpPr bwMode="auto">
         <a:xfrm>
           <a:off x="0" y="0"/>
           <a:ext cx="0" cy="0"/>
@@ -1120,7 +1138,7 @@
       </p:grpSpPr>
       <p:sp>
         <p:nvSpPr>
-          <p:cNvPr id="2" name="Slide Image Placeholder 1"/>
+          <p:cNvPr id="724320400" name="Slide Image Placeholder 1"/>
           <p:cNvSpPr>
             <a:spLocks noGrp="1"/>
           </p:cNvSpPr>
@@ -1128,40 +1146,45 @@
             <p:ph type="sldImg" idx="2"/>
           </p:nvPr>
         </p:nvSpPr>
-        <p:spPr/>
-      </p:sp>
-      <p:sp>
-        <p:nvSpPr>
-          <p:cNvPr id="3" name="Notes Placeholder 2"/>
-          <p:cNvSpPr>
-            <a:spLocks noGrp="1"/>
-          </p:cNvSpPr>
-          <p:nvPr>
-            <p:ph type="body" idx="3" sz="quarter"/>
-          </p:nvPr>
-        </p:nvSpPr>
-        <p:spPr/>
+        <p:spPr bwMode="auto"/>
+      </p:sp>
+      <p:sp>
+        <p:nvSpPr>
+          <p:cNvPr id="387921054" name="Notes Placeholder 2"/>
+          <p:cNvSpPr>
+            <a:spLocks noGrp="1"/>
+          </p:cNvSpPr>
+          <p:nvPr>
+            <p:ph type="body" sz="quarter" idx="3"/>
+          </p:nvPr>
+        </p:nvSpPr>
+        <p:spPr bwMode="auto"/>
         <p:txBody>
           <a:bodyPr/>
           <a:lstStyle/>
           <a:p>
-            <a:r>
+            <a:pPr>
+              <a:defRPr/>
+            </a:pPr>
+            <a:r>
+              <a:rPr/>
               <a:t>Unpack the definition into three testable pieces, then explain why it says "class distribution" and not "accuracy": the criterion is defined before any classifier is chosen, so it stays model-independent — which is exactly why such criteria are later called filters. Add the quieter benefit H&amp;K give: "It reduces the number of attributes appearing in the discovered patterns, helping to make the patterns easier to understand" — the interpretability argument. Finally, note that there is no closed-form formula for the optimum; it is a criterion, not an equation, which is precisely why the next slide (the search problem) exists.</a:t>
             </a:r>
-          </a:p>
-        </p:txBody>
-      </p:sp>
-      <p:sp>
-        <p:nvSpPr>
-          <p:cNvPr id="4" name="Slide Number Placeholder 3"/>
-          <p:cNvSpPr>
-            <a:spLocks noGrp="1"/>
-          </p:cNvSpPr>
-          <p:nvPr>
-            <p:ph type="sldNum" idx="5" sz="quarter"/>
-          </p:nvPr>
-        </p:nvSpPr>
-        <p:spPr/>
+            <a:endParaRPr/>
+          </a:p>
+        </p:txBody>
+      </p:sp>
+      <p:sp>
+        <p:nvSpPr>
+          <p:cNvPr id="906439464" name="Slide Number Placeholder 3"/>
+          <p:cNvSpPr>
+            <a:spLocks noGrp="1"/>
+          </p:cNvSpPr>
+          <p:nvPr>
+            <p:ph type="sldNum" sz="quarter" idx="5"/>
+          </p:nvPr>
+        </p:nvSpPr>
+        <p:spPr bwMode="auto"/>
       </p:sp>
     </p:spTree>
   </p:cSld>
@@ -1172,15 +1195,15 @@
 </file>
 
 <file path=ppt/notesSlides/notesSlide5.xml><?xml version="1.0" encoding="utf-8"?>
-<p:notes xmlns:a="http://schemas.openxmlformats.org/drawingml/2006/main" xmlns:p="http://schemas.openxmlformats.org/presentationml/2006/main" xmlns:r="http://schemas.openxmlformats.org/officeDocument/2006/relationships">
-  <p:cSld>
+<p:notes xmlns:a="http://schemas.openxmlformats.org/drawingml/2006/main" xmlns:r="http://schemas.openxmlformats.org/officeDocument/2006/relationships" xmlns:p="http://schemas.openxmlformats.org/presentationml/2006/main" xmlns:m="http://schemas.openxmlformats.org/officeDocument/2006/math" xmlns:w="http://schemas.openxmlformats.org/wordprocessingml/2006/main">
+  <p:cSld name="">
     <p:spTree>
       <p:nvGrpSpPr>
         <p:cNvPr id="1" name=""/>
         <p:cNvGrpSpPr/>
         <p:nvPr/>
       </p:nvGrpSpPr>
-      <p:grpSpPr>
+      <p:grpSpPr bwMode="auto">
         <a:xfrm>
           <a:off x="0" y="0"/>
           <a:ext cx="0" cy="0"/>
@@ -1190,7 +1213,7 @@
       </p:grpSpPr>
       <p:sp>
         <p:nvSpPr>
-          <p:cNvPr id="2" name="Slide Image Placeholder 1"/>
+          <p:cNvPr id="1494560002" name="Slide Image Placeholder 1"/>
           <p:cNvSpPr>
             <a:spLocks noGrp="1"/>
           </p:cNvSpPr>
@@ -1198,40 +1221,45 @@
             <p:ph type="sldImg" idx="2"/>
           </p:nvPr>
         </p:nvSpPr>
-        <p:spPr/>
-      </p:sp>
-      <p:sp>
-        <p:nvSpPr>
-          <p:cNvPr id="3" name="Notes Placeholder 2"/>
-          <p:cNvSpPr>
-            <a:spLocks noGrp="1"/>
-          </p:cNvSpPr>
-          <p:nvPr>
-            <p:ph type="body" idx="3" sz="quarter"/>
-          </p:nvPr>
-        </p:nvSpPr>
-        <p:spPr/>
+        <p:spPr bwMode="auto"/>
+      </p:sp>
+      <p:sp>
+        <p:nvSpPr>
+          <p:cNvPr id="1715105955" name="Notes Placeholder 2"/>
+          <p:cNvSpPr>
+            <a:spLocks noGrp="1"/>
+          </p:cNvSpPr>
+          <p:nvPr>
+            <p:ph type="body" sz="quarter" idx="3"/>
+          </p:nvPr>
+        </p:nvSpPr>
+        <p:spPr bwMode="auto"/>
         <p:txBody>
           <a:bodyPr/>
           <a:lstStyle/>
           <a:p>
-            <a:r>
+            <a:pPr>
+              <a:defRPr/>
+            </a:pPr>
+            <a:r>
+              <a:rPr/>
               <a:t>Quote H&amp;K directly: "For n attributes, there are 2ⁿ possible subsets. An exhaustive search for the optimal subset of attributes can be prohibitively expensive." Walk the numbers table: 20 → ~1 million (about a second at a million per second); 30 → over a billion (~18 minutes); 50 → over a quadrillion (~36 years). Then the honest vocabulary: a greedy method is not wrong — it is near-optimal with no guarantee. H&amp;K say such methods "are effective in practice and may come close to estimating an optimal solution." Exam-ready sentence: exhaustive = optimal but impossible; greedy = possible but unguaranteed.</a:t>
             </a:r>
-          </a:p>
-        </p:txBody>
-      </p:sp>
-      <p:sp>
-        <p:nvSpPr>
-          <p:cNvPr id="4" name="Slide Number Placeholder 3"/>
-          <p:cNvSpPr>
-            <a:spLocks noGrp="1"/>
-          </p:cNvSpPr>
-          <p:nvPr>
-            <p:ph type="sldNum" idx="5" sz="quarter"/>
-          </p:nvPr>
-        </p:nvSpPr>
-        <p:spPr/>
+            <a:endParaRPr/>
+          </a:p>
+        </p:txBody>
+      </p:sp>
+      <p:sp>
+        <p:nvSpPr>
+          <p:cNvPr id="1380522422" name="Slide Number Placeholder 3"/>
+          <p:cNvSpPr>
+            <a:spLocks noGrp="1"/>
+          </p:cNvSpPr>
+          <p:nvPr>
+            <p:ph type="sldNum" sz="quarter" idx="5"/>
+          </p:nvPr>
+        </p:nvSpPr>
+        <p:spPr bwMode="auto"/>
       </p:sp>
     </p:spTree>
   </p:cSld>
@@ -1242,15 +1270,15 @@
 </file>
 
 <file path=ppt/notesSlides/notesSlide6.xml><?xml version="1.0" encoding="utf-8"?>
-<p:notes xmlns:a="http://schemas.openxmlformats.org/drawingml/2006/main" xmlns:p="http://schemas.openxmlformats.org/presentationml/2006/main" xmlns:r="http://schemas.openxmlformats.org/officeDocument/2006/relationships">
-  <p:cSld>
+<p:notes xmlns:a="http://schemas.openxmlformats.org/drawingml/2006/main" xmlns:r="http://schemas.openxmlformats.org/officeDocument/2006/relationships" xmlns:p="http://schemas.openxmlformats.org/presentationml/2006/main" xmlns:m="http://schemas.openxmlformats.org/officeDocument/2006/math" xmlns:w="http://schemas.openxmlformats.org/wordprocessingml/2006/main">
+  <p:cSld name="">
     <p:spTree>
       <p:nvGrpSpPr>
         <p:cNvPr id="1" name=""/>
         <p:cNvGrpSpPr/>
         <p:nvPr/>
       </p:nvGrpSpPr>
-      <p:grpSpPr>
+      <p:grpSpPr bwMode="auto">
         <a:xfrm>
           <a:off x="0" y="0"/>
           <a:ext cx="0" cy="0"/>
@@ -1260,7 +1288,7 @@
       </p:grpSpPr>
       <p:sp>
         <p:nvSpPr>
-          <p:cNvPr id="2" name="Slide Image Placeholder 1"/>
+          <p:cNvPr id="597908996" name="Slide Image Placeholder 1"/>
           <p:cNvSpPr>
             <a:spLocks noGrp="1"/>
           </p:cNvSpPr>
@@ -1268,40 +1296,45 @@
             <p:ph type="sldImg" idx="2"/>
           </p:nvPr>
         </p:nvSpPr>
-        <p:spPr/>
-      </p:sp>
-      <p:sp>
-        <p:nvSpPr>
-          <p:cNvPr id="3" name="Notes Placeholder 2"/>
-          <p:cNvSpPr>
-            <a:spLocks noGrp="1"/>
-          </p:cNvSpPr>
-          <p:nvPr>
-            <p:ph type="body" idx="3" sz="quarter"/>
-          </p:nvPr>
-        </p:nvSpPr>
-        <p:spPr/>
+        <p:spPr bwMode="auto"/>
+      </p:sp>
+      <p:sp>
+        <p:nvSpPr>
+          <p:cNvPr id="262228729" name="Notes Placeholder 2"/>
+          <p:cNvSpPr>
+            <a:spLocks noGrp="1"/>
+          </p:cNvSpPr>
+          <p:nvPr>
+            <p:ph type="body" sz="quarter" idx="3"/>
+          </p:nvPr>
+        </p:nvSpPr>
+        <p:spPr bwMode="auto"/>
         <p:txBody>
           <a:bodyPr/>
           <a:lstStyle/>
           <a:p>
-            <a:r>
+            <a:pPr>
+              <a:defRPr/>
+            </a:pPr>
+            <a:r>
+              <a:rPr/>
               <a:t>Explain both formulas from first principles. Gini: if every point at a value belongs to one class, the sum of squares is 1 and Gini is 0; if the classes are evenly split across k classes, Gini reaches 1 − 1/k (0.5 for two classes). Entropy: the −log2 p term encodes that rare events carry more information; entropy is the expected surprise, ranging from 0 to log2 k. Then read the figure: both curves are 0 at the extremes (p1 = 0 or 1) and peak at an even split (p1 = 0.5) — Gini peaks at 0.5, entropy at 1.0. Worked example: a value with 5 of class A and 0 of class B gives Gini 0; a value with 2 and 3 gives 0.48; the attribute's Gini is the weighted average (0.24). The rule to memorise: for Gini and entropy, lower is better. Contrast with the next slide: Fisher is the opposite direction.</a:t>
             </a:r>
-          </a:p>
-        </p:txBody>
-      </p:sp>
-      <p:sp>
-        <p:nvSpPr>
-          <p:cNvPr id="4" name="Slide Number Placeholder 3"/>
-          <p:cNvSpPr>
-            <a:spLocks noGrp="1"/>
-          </p:cNvSpPr>
-          <p:nvPr>
-            <p:ph type="sldNum" idx="5" sz="quarter"/>
-          </p:nvPr>
-        </p:nvSpPr>
-        <p:spPr/>
+            <a:endParaRPr/>
+          </a:p>
+        </p:txBody>
+      </p:sp>
+      <p:sp>
+        <p:nvSpPr>
+          <p:cNvPr id="2025616572" name="Slide Number Placeholder 3"/>
+          <p:cNvSpPr>
+            <a:spLocks noGrp="1"/>
+          </p:cNvSpPr>
+          <p:nvPr>
+            <p:ph type="sldNum" sz="quarter" idx="5"/>
+          </p:nvPr>
+        </p:nvSpPr>
+        <p:spPr bwMode="auto"/>
       </p:sp>
     </p:spTree>
   </p:cSld>
@@ -1312,15 +1345,15 @@
 </file>
 
 <file path=ppt/notesSlides/notesSlide7.xml><?xml version="1.0" encoding="utf-8"?>
-<p:notes xmlns:a="http://schemas.openxmlformats.org/drawingml/2006/main" xmlns:p="http://schemas.openxmlformats.org/presentationml/2006/main" xmlns:r="http://schemas.openxmlformats.org/officeDocument/2006/relationships">
-  <p:cSld>
+<p:notes xmlns:a="http://schemas.openxmlformats.org/drawingml/2006/main" xmlns:r="http://schemas.openxmlformats.org/officeDocument/2006/relationships" xmlns:p="http://schemas.openxmlformats.org/presentationml/2006/main" xmlns:m="http://schemas.openxmlformats.org/officeDocument/2006/math" xmlns:w="http://schemas.openxmlformats.org/wordprocessingml/2006/main">
+  <p:cSld name="">
     <p:spTree>
       <p:nvGrpSpPr>
         <p:cNvPr id="1" name=""/>
         <p:cNvGrpSpPr/>
         <p:nvPr/>
       </p:nvGrpSpPr>
-      <p:grpSpPr>
+      <p:grpSpPr bwMode="auto">
         <a:xfrm>
           <a:off x="0" y="0"/>
           <a:ext cx="0" cy="0"/>
@@ -1330,7 +1363,7 @@
       </p:grpSpPr>
       <p:sp>
         <p:nvSpPr>
-          <p:cNvPr id="2" name="Slide Image Placeholder 1"/>
+          <p:cNvPr id="246054675" name="Slide Image Placeholder 1"/>
           <p:cNvSpPr>
             <a:spLocks noGrp="1"/>
           </p:cNvSpPr>
@@ -1338,40 +1371,45 @@
             <p:ph type="sldImg" idx="2"/>
           </p:nvPr>
         </p:nvSpPr>
-        <p:spPr/>
-      </p:sp>
-      <p:sp>
-        <p:nvSpPr>
-          <p:cNvPr id="3" name="Notes Placeholder 2"/>
-          <p:cNvSpPr>
-            <a:spLocks noGrp="1"/>
-          </p:cNvSpPr>
-          <p:nvPr>
-            <p:ph type="body" idx="3" sz="quarter"/>
-          </p:nvPr>
-        </p:nvSpPr>
-        <p:spPr/>
+        <p:spPr bwMode="auto"/>
+      </p:sp>
+      <p:sp>
+        <p:nvSpPr>
+          <p:cNvPr id="1947965669" name="Notes Placeholder 2"/>
+          <p:cNvSpPr>
+            <a:spLocks noGrp="1"/>
+          </p:cNvSpPr>
+          <p:nvPr>
+            <p:ph type="body" sz="quarter" idx="3"/>
+          </p:nvPr>
+        </p:nvSpPr>
+        <p:spPr bwMode="auto"/>
         <p:txBody>
           <a:bodyPr/>
           <a:lstStyle/>
           <a:p>
-            <a:r>
+            <a:pPr>
+              <a:defRPr/>
+            </a:pPr>
+            <a:r>
+              <a:rPr/>
               <a:t>Read Aggarwal: "The Fisher score is naturally designed for numeric attributes to measure the ratio of the average interclass separation to the average intraclass separation. The larger the Fisher score, the greater the discriminatory power." The geometric reading: two clouds of points — good if the clouds are far apart and each is tight. Then the subtlety that separates a strong answer from a weak one: Fisher's linear discriminant is not the Fisher score. The score evaluates an existing feature; the discriminant builds a new direction W, from the between-class scatter and the within-class scatter. Use the figure: the most discriminating direction is not necessarily the highest-variance direction — in panel (b) it is aligned with the lowest-variance direction. That is why Fisher's discriminant is supervised dimensionality reduction, and is not the same as PCA.</a:t>
             </a:r>
-          </a:p>
-        </p:txBody>
-      </p:sp>
-      <p:sp>
-        <p:nvSpPr>
-          <p:cNvPr id="4" name="Slide Number Placeholder 3"/>
-          <p:cNvSpPr>
-            <a:spLocks noGrp="1"/>
-          </p:cNvSpPr>
-          <p:nvPr>
-            <p:ph type="sldNum" idx="5" sz="quarter"/>
-          </p:nvPr>
-        </p:nvSpPr>
-        <p:spPr/>
+            <a:endParaRPr/>
+          </a:p>
+        </p:txBody>
+      </p:sp>
+      <p:sp>
+        <p:nvSpPr>
+          <p:cNvPr id="1624058950" name="Slide Number Placeholder 3"/>
+          <p:cNvSpPr>
+            <a:spLocks noGrp="1"/>
+          </p:cNvSpPr>
+          <p:nvPr>
+            <p:ph type="sldNum" sz="quarter" idx="5"/>
+          </p:nvPr>
+        </p:nvSpPr>
+        <p:spPr bwMode="auto"/>
       </p:sp>
     </p:spTree>
   </p:cSld>
@@ -1382,15 +1420,15 @@
 </file>
 
 <file path=ppt/notesSlides/notesSlide8.xml><?xml version="1.0" encoding="utf-8"?>
-<p:notes xmlns:a="http://schemas.openxmlformats.org/drawingml/2006/main" xmlns:p="http://schemas.openxmlformats.org/presentationml/2006/main" xmlns:r="http://schemas.openxmlformats.org/officeDocument/2006/relationships">
-  <p:cSld>
+<p:notes xmlns:a="http://schemas.openxmlformats.org/drawingml/2006/main" xmlns:r="http://schemas.openxmlformats.org/officeDocument/2006/relationships" xmlns:p="http://schemas.openxmlformats.org/presentationml/2006/main" xmlns:m="http://schemas.openxmlformats.org/officeDocument/2006/math" xmlns:w="http://schemas.openxmlformats.org/wordprocessingml/2006/main">
+  <p:cSld name="">
     <p:spTree>
       <p:nvGrpSpPr>
         <p:cNvPr id="1" name=""/>
         <p:cNvGrpSpPr/>
         <p:nvPr/>
       </p:nvGrpSpPr>
-      <p:grpSpPr>
+      <p:grpSpPr bwMode="auto">
         <a:xfrm>
           <a:off x="0" y="0"/>
           <a:ext cx="0" cy="0"/>
@@ -1400,7 +1438,7 @@
       </p:grpSpPr>
       <p:sp>
         <p:nvSpPr>
-          <p:cNvPr id="2" name="Slide Image Placeholder 1"/>
+          <p:cNvPr id="1466825787" name="Slide Image Placeholder 1"/>
           <p:cNvSpPr>
             <a:spLocks noGrp="1"/>
           </p:cNvSpPr>
@@ -1408,40 +1446,45 @@
             <p:ph type="sldImg" idx="2"/>
           </p:nvPr>
         </p:nvSpPr>
-        <p:spPr/>
-      </p:sp>
-      <p:sp>
-        <p:nvSpPr>
-          <p:cNvPr id="3" name="Notes Placeholder 2"/>
-          <p:cNvSpPr>
-            <a:spLocks noGrp="1"/>
-          </p:cNvSpPr>
-          <p:nvPr>
-            <p:ph type="body" idx="3" sz="quarter"/>
-          </p:nvPr>
-        </p:nvSpPr>
-        <p:spPr/>
+        <p:spPr bwMode="auto"/>
+      </p:sp>
+      <p:sp>
+        <p:nvSpPr>
+          <p:cNvPr id="1257592253" name="Notes Placeholder 2"/>
+          <p:cNvSpPr>
+            <a:spLocks noGrp="1"/>
+          </p:cNvSpPr>
+          <p:nvPr>
+            <p:ph type="body" sz="quarter" idx="3"/>
+          </p:nvPr>
+        </p:nvSpPr>
+        <p:spPr bwMode="auto"/>
         <p:txBody>
           <a:bodyPr/>
           <a:lstStyle/>
           <a:p>
-            <a:r>
+            <a:pPr>
+              <a:defRPr/>
+            </a:pPr>
+            <a:r>
+              <a:rPr/>
               <a:t>Walk the figure line by line. Forward selection: {} → {A1} → {A1, A4} → {A1, A4, A6}. Backward elimination: {A1..A6} → drop the worst → ... → {A1, A4, A6}. Decision tree induction: split on A4, then A1 or A6, and the attributes appearing in the tree are exactly the selected subset. The buried lesson: four different strategies converge on the same subset, which is evidence that greedy search is stable. Add the stopping rule: H&amp;K say the criteria "may vary" — a threshold on the evaluation measure — so there is no single universal stopping rule; it is a design choice.</a:t>
             </a:r>
-          </a:p>
-        </p:txBody>
-      </p:sp>
-      <p:sp>
-        <p:nvSpPr>
-          <p:cNvPr id="4" name="Slide Number Placeholder 3"/>
-          <p:cNvSpPr>
-            <a:spLocks noGrp="1"/>
-          </p:cNvSpPr>
-          <p:nvPr>
-            <p:ph type="sldNum" idx="5" sz="quarter"/>
-          </p:nvPr>
-        </p:nvSpPr>
-        <p:spPr/>
+            <a:endParaRPr/>
+          </a:p>
+        </p:txBody>
+      </p:sp>
+      <p:sp>
+        <p:nvSpPr>
+          <p:cNvPr id="1417576162" name="Slide Number Placeholder 3"/>
+          <p:cNvSpPr>
+            <a:spLocks noGrp="1"/>
+          </p:cNvSpPr>
+          <p:nvPr>
+            <p:ph type="sldNum" sz="quarter" idx="5"/>
+          </p:nvPr>
+        </p:nvSpPr>
+        <p:spPr bwMode="auto"/>
       </p:sp>
     </p:spTree>
   </p:cSld>
@@ -1452,15 +1495,15 @@
 </file>
 
 <file path=ppt/notesSlides/notesSlide9.xml><?xml version="1.0" encoding="utf-8"?>
-<p:notes xmlns:a="http://schemas.openxmlformats.org/drawingml/2006/main" xmlns:p="http://schemas.openxmlformats.org/presentationml/2006/main" xmlns:r="http://schemas.openxmlformats.org/officeDocument/2006/relationships">
-  <p:cSld>
+<p:notes xmlns:a="http://schemas.openxmlformats.org/drawingml/2006/main" xmlns:r="http://schemas.openxmlformats.org/officeDocument/2006/relationships" xmlns:p="http://schemas.openxmlformats.org/presentationml/2006/main" xmlns:m="http://schemas.openxmlformats.org/officeDocument/2006/math" xmlns:w="http://schemas.openxmlformats.org/wordprocessingml/2006/main">
+  <p:cSld name="">
     <p:spTree>
       <p:nvGrpSpPr>
         <p:cNvPr id="1" name=""/>
         <p:cNvGrpSpPr/>
         <p:nvPr/>
       </p:nvGrpSpPr>
-      <p:grpSpPr>
+      <p:grpSpPr bwMode="auto">
         <a:xfrm>
           <a:off x="0" y="0"/>
           <a:ext cx="0" cy="0"/>
@@ -1470,7 +1513,7 @@
       </p:grpSpPr>
       <p:sp>
         <p:nvSpPr>
-          <p:cNvPr id="2" name="Slide Image Placeholder 1"/>
+          <p:cNvPr id="334857730" name="Slide Image Placeholder 1"/>
           <p:cNvSpPr>
             <a:spLocks noGrp="1"/>
           </p:cNvSpPr>
@@ -1478,40 +1521,45 @@
             <p:ph type="sldImg" idx="2"/>
           </p:nvPr>
         </p:nvSpPr>
-        <p:spPr/>
-      </p:sp>
-      <p:sp>
-        <p:nvSpPr>
-          <p:cNvPr id="3" name="Notes Placeholder 2"/>
-          <p:cNvSpPr>
-            <a:spLocks noGrp="1"/>
-          </p:cNvSpPr>
-          <p:nvPr>
-            <p:ph type="body" idx="3" sz="quarter"/>
-          </p:nvPr>
-        </p:nvSpPr>
-        <p:spPr/>
+        <p:spPr bwMode="auto"/>
+      </p:sp>
+      <p:sp>
+        <p:nvSpPr>
+          <p:cNvPr id="964183726" name="Notes Placeholder 2"/>
+          <p:cNvSpPr>
+            <a:spLocks noGrp="1"/>
+          </p:cNvSpPr>
+          <p:nvPr>
+            <p:ph type="body" sz="quarter" idx="3"/>
+          </p:nvPr>
+        </p:nvSpPr>
+        <p:spPr bwMode="auto"/>
         <p:txBody>
           <a:bodyPr/>
           <a:lstStyle/>
           <a:p>
-            <a:r>
+            <a:pPr>
+              <a:defRPr/>
+            </a:pPr>
+            <a:r>
+              <a:rPr/>
               <a:t>This slide deepens the fourth method. Read H&amp;K: "Decision tree induction constructs a flowchart-like structure where each internal (nonleaf) node denotes a test on an attribute, each branch corresponds to an outcome of the test, and each external (leaf) node denotes a class prediction." Then the selection rule, quoted: "All attributes that do not appear in the tree are assumed to be irrelevant. The set of attributes appearing in the tree form the reduced subset." Name the trees H&amp;K list: ID3, C4.5, CART. If asked "which attributes does the tree select?", the answer is mechanical: the ones that earned a split. Image credit: CollaborativeGeneticist, CC BY-SA 4.0, via Wikimedia Commons.</a:t>
             </a:r>
-          </a:p>
-        </p:txBody>
-      </p:sp>
-      <p:sp>
-        <p:nvSpPr>
-          <p:cNvPr id="4" name="Slide Number Placeholder 3"/>
-          <p:cNvSpPr>
-            <a:spLocks noGrp="1"/>
-          </p:cNvSpPr>
-          <p:nvPr>
-            <p:ph type="sldNum" idx="5" sz="quarter"/>
-          </p:nvPr>
-        </p:nvSpPr>
-        <p:spPr/>
+            <a:endParaRPr/>
+          </a:p>
+        </p:txBody>
+      </p:sp>
+      <p:sp>
+        <p:nvSpPr>
+          <p:cNvPr id="41719710" name="Slide Number Placeholder 3"/>
+          <p:cNvSpPr>
+            <a:spLocks noGrp="1"/>
+          </p:cNvSpPr>
+          <p:nvPr>
+            <p:ph type="sldNum" sz="quarter" idx="5"/>
+          </p:nvPr>
+        </p:nvSpPr>
+        <p:spPr bwMode="auto"/>
       </p:sp>
     </p:spTree>
   </p:cSld>
@@ -1522,7 +1570,7 @@
 </file>
 
 <file path=ppt/slideLayouts/slideLayout1.xml><?xml version="1.0" encoding="utf-8"?>
-<p:sldLayout xmlns:a="http://schemas.openxmlformats.org/drawingml/2006/main" xmlns:r="http://schemas.openxmlformats.org/officeDocument/2006/relationships" xmlns:p="http://schemas.openxmlformats.org/presentationml/2006/main" type="title" preserve="1">
+<p:sldLayout xmlns:a="http://schemas.openxmlformats.org/drawingml/2006/main" xmlns:r="http://schemas.openxmlformats.org/officeDocument/2006/relationships" xmlns:p="http://schemas.openxmlformats.org/presentationml/2006/main" xmlns:m="http://schemas.openxmlformats.org/officeDocument/2006/math" xmlns:w="http://schemas.openxmlformats.org/wordprocessingml/2006/main" matchingName="" preserve="1" showMasterPhAnim="0" showMasterSp="1" type="title" userDrawn="1">
   <p:cSld name="Title Slide">
     <p:spTree>
       <p:nvGrpSpPr>
@@ -1530,7 +1578,7 @@
         <p:cNvGrpSpPr/>
         <p:nvPr/>
       </p:nvGrpSpPr>
-      <p:grpSpPr>
+      <p:grpSpPr bwMode="auto">
         <a:xfrm>
           <a:off x="0" y="0"/>
           <a:ext cx="0" cy="0"/>
@@ -1540,7 +1588,7 @@
       </p:grpSpPr>
       <p:sp>
         <p:nvSpPr>
-          <p:cNvPr id="2" name="Title 1"/>
+          <p:cNvPr id="523627616" name="Title 1"/>
           <p:cNvSpPr>
             <a:spLocks noGrp="1"/>
           </p:cNvSpPr>
@@ -1548,7 +1596,7 @@
             <p:ph type="ctrTitle"/>
           </p:nvPr>
         </p:nvSpPr>
-        <p:spPr>
+        <p:spPr bwMode="auto">
           <a:xfrm>
             <a:off x="685800" y="2130425"/>
             <a:ext cx="7772400" cy="1470025"/>
@@ -1558,8 +1606,11 @@
           <a:bodyPr/>
           <a:lstStyle/>
           <a:p>
-            <a:r>
-              <a:rPr lang="en-US" smtClean="0"/>
+            <a:pPr>
+              <a:defRPr/>
+            </a:pPr>
+            <a:r>
+              <a:rPr lang="en-US"/>
               <a:t>Click to edit Master title style</a:t>
             </a:r>
             <a:endParaRPr lang="en-US"/>
@@ -1568,7 +1619,7 @@
       </p:sp>
       <p:sp>
         <p:nvSpPr>
-          <p:cNvPr id="3" name="Subtitle 2"/>
+          <p:cNvPr id="90477953" name="Subtitle 2"/>
           <p:cNvSpPr>
             <a:spLocks noGrp="1"/>
           </p:cNvSpPr>
@@ -1576,10 +1627,10 @@
             <p:ph type="subTitle" idx="1"/>
           </p:nvPr>
         </p:nvSpPr>
-        <p:spPr>
+        <p:spPr bwMode="auto">
           <a:xfrm>
             <a:off x="1371600" y="3886200"/>
-            <a:ext cx="6400800" cy="1752600"/>
+            <a:ext cx="6400800" cy="1752599"/>
           </a:xfrm>
         </p:spPr>
         <p:txBody>
@@ -1677,8 +1728,11 @@
             </a:lvl9pPr>
           </a:lstStyle>
           <a:p>
-            <a:r>
-              <a:rPr lang="en-US" smtClean="0"/>
+            <a:pPr>
+              <a:defRPr/>
+            </a:pPr>
+            <a:r>
+              <a:rPr lang="en-US"/>
               <a:t>Click to edit Master subtitle style</a:t>
             </a:r>
             <a:endParaRPr lang="en-US"/>
@@ -1687,7 +1741,7 @@
       </p:sp>
       <p:sp>
         <p:nvSpPr>
-          <p:cNvPr id="4" name="Date Placeholder 3"/>
+          <p:cNvPr id="1903861524" name="Date Placeholder 3"/>
           <p:cNvSpPr>
             <a:spLocks noGrp="1"/>
           </p:cNvSpPr>
@@ -1695,13 +1749,16 @@
             <p:ph type="dt" sz="half" idx="10"/>
           </p:nvPr>
         </p:nvSpPr>
-        <p:spPr/>
+        <p:spPr bwMode="auto"/>
         <p:txBody>
           <a:bodyPr/>
           <a:lstStyle/>
           <a:p>
+            <a:pPr>
+              <a:defRPr/>
+            </a:pPr>
             <a:fld id="{5BCAD085-E8A6-8845-BD4E-CB4CCA059FC4}" type="datetimeFigureOut">
-              <a:rPr lang="en-US" smtClean="0"/>
+              <a:rPr lang="en-US"/>
               <a:t>1/27/13</a:t>
             </a:fld>
             <a:endParaRPr lang="en-US"/>
@@ -1710,7 +1767,7 @@
       </p:sp>
       <p:sp>
         <p:nvSpPr>
-          <p:cNvPr id="5" name="Footer Placeholder 4"/>
+          <p:cNvPr id="1542382950" name="Footer Placeholder 4"/>
           <p:cNvSpPr>
             <a:spLocks noGrp="1"/>
           </p:cNvSpPr>
@@ -1718,18 +1775,21 @@
             <p:ph type="ftr" sz="quarter" idx="11"/>
           </p:nvPr>
         </p:nvSpPr>
-        <p:spPr/>
+        <p:spPr bwMode="auto"/>
         <p:txBody>
           <a:bodyPr/>
           <a:lstStyle/>
           <a:p>
+            <a:pPr>
+              <a:defRPr/>
+            </a:pPr>
             <a:endParaRPr lang="en-US"/>
           </a:p>
         </p:txBody>
       </p:sp>
       <p:sp>
         <p:nvSpPr>
-          <p:cNvPr id="6" name="Slide Number Placeholder 5"/>
+          <p:cNvPr id="192380638" name="Slide Number Placeholder 5"/>
           <p:cNvSpPr>
             <a:spLocks noGrp="1"/>
           </p:cNvSpPr>
@@ -1737,13 +1797,16 @@
             <p:ph type="sldNum" sz="quarter" idx="12"/>
           </p:nvPr>
         </p:nvSpPr>
-        <p:spPr/>
+        <p:spPr bwMode="auto"/>
         <p:txBody>
           <a:bodyPr/>
           <a:lstStyle/>
           <a:p>
+            <a:pPr>
+              <a:defRPr/>
+            </a:pPr>
             <a:fld id="{C1FF6DA9-008F-8B48-92A6-B652298478BF}" type="slidenum">
-              <a:rPr lang="en-US" smtClean="0"/>
+              <a:rPr lang="en-US"/>
               <a:t>‹#›</a:t>
             </a:fld>
             <a:endParaRPr lang="en-US"/>
@@ -1751,11 +1814,6 @@
         </p:txBody>
       </p:sp>
     </p:spTree>
-    <p:extLst>
-      <p:ext uri="{BB962C8B-B14F-4D97-AF65-F5344CB8AC3E}">
-        <p14:creationId xmlns:p14="http://schemas.microsoft.com/office/powerpoint/2010/main" val="3168075583"/>
-      </p:ext>
-    </p:extLst>
   </p:cSld>
   <p:clrMapOvr>
     <a:masterClrMapping/>
@@ -1764,7 +1822,7 @@
 </file>
 
 <file path=ppt/slideLayouts/slideLayout10.xml><?xml version="1.0" encoding="utf-8"?>
-<p:sldLayout xmlns:a="http://schemas.openxmlformats.org/drawingml/2006/main" xmlns:r="http://schemas.openxmlformats.org/officeDocument/2006/relationships" xmlns:p="http://schemas.openxmlformats.org/presentationml/2006/main" type="vertTx" preserve="1">
+<p:sldLayout xmlns:a="http://schemas.openxmlformats.org/drawingml/2006/main" xmlns:r="http://schemas.openxmlformats.org/officeDocument/2006/relationships" xmlns:p="http://schemas.openxmlformats.org/presentationml/2006/main" xmlns:m="http://schemas.openxmlformats.org/officeDocument/2006/math" xmlns:w="http://schemas.openxmlformats.org/wordprocessingml/2006/main" matchingName="" preserve="1" showMasterPhAnim="0" showMasterSp="1" type="vertTx" userDrawn="1">
   <p:cSld name="Title and Vertical Text">
     <p:spTree>
       <p:nvGrpSpPr>
@@ -1772,7 +1830,7 @@
         <p:cNvGrpSpPr/>
         <p:nvPr/>
       </p:nvGrpSpPr>
-      <p:grpSpPr>
+      <p:grpSpPr bwMode="auto">
         <a:xfrm>
           <a:off x="0" y="0"/>
           <a:ext cx="0" cy="0"/>
@@ -1782,7 +1840,7 @@
       </p:grpSpPr>
       <p:sp>
         <p:nvSpPr>
-          <p:cNvPr id="2" name="Title 1"/>
+          <p:cNvPr id="268551907" name="Title 1"/>
           <p:cNvSpPr>
             <a:spLocks noGrp="1"/>
           </p:cNvSpPr>
@@ -1790,13 +1848,16 @@
             <p:ph type="title"/>
           </p:nvPr>
         </p:nvSpPr>
-        <p:spPr/>
+        <p:spPr bwMode="auto"/>
         <p:txBody>
           <a:bodyPr/>
           <a:lstStyle/>
           <a:p>
-            <a:r>
-              <a:rPr lang="en-US" smtClean="0"/>
+            <a:pPr>
+              <a:defRPr/>
+            </a:pPr>
+            <a:r>
+              <a:rPr lang="en-US"/>
               <a:t>Click to edit Master title style</a:t>
             </a:r>
             <a:endParaRPr lang="en-US"/>
@@ -1805,7 +1866,7 @@
       </p:sp>
       <p:sp>
         <p:nvSpPr>
-          <p:cNvPr id="3" name="Vertical Text Placeholder 2"/>
+          <p:cNvPr id="1049701881" name="Vertical Text Placeholder 2"/>
           <p:cNvSpPr>
             <a:spLocks noGrp="1"/>
           </p:cNvSpPr>
@@ -1813,42 +1874,56 @@
             <p:ph type="body" orient="vert" idx="1"/>
           </p:nvPr>
         </p:nvSpPr>
-        <p:spPr/>
+        <p:spPr bwMode="auto"/>
         <p:txBody>
           <a:bodyPr vert="eaVert"/>
           <a:lstStyle/>
           <a:p>
-            <a:pPr lvl="0"/>
-            <a:r>
-              <a:rPr lang="en-US" smtClean="0"/>
+            <a:pPr lvl="0">
+              <a:defRPr/>
+            </a:pPr>
+            <a:r>
+              <a:rPr lang="en-US"/>
               <a:t>Click to edit Master text styles</a:t>
             </a:r>
-          </a:p>
-          <a:p>
-            <a:pPr lvl="1"/>
-            <a:r>
-              <a:rPr lang="en-US" smtClean="0"/>
+            <a:endParaRPr/>
+          </a:p>
+          <a:p>
+            <a:pPr lvl="1">
+              <a:defRPr/>
+            </a:pPr>
+            <a:r>
+              <a:rPr lang="en-US"/>
               <a:t>Second level</a:t>
             </a:r>
-          </a:p>
-          <a:p>
-            <a:pPr lvl="2"/>
-            <a:r>
-              <a:rPr lang="en-US" smtClean="0"/>
+            <a:endParaRPr/>
+          </a:p>
+          <a:p>
+            <a:pPr lvl="2">
+              <a:defRPr/>
+            </a:pPr>
+            <a:r>
+              <a:rPr lang="en-US"/>
               <a:t>Third level</a:t>
             </a:r>
-          </a:p>
-          <a:p>
-            <a:pPr lvl="3"/>
-            <a:r>
-              <a:rPr lang="en-US" smtClean="0"/>
+            <a:endParaRPr/>
+          </a:p>
+          <a:p>
+            <a:pPr lvl="3">
+              <a:defRPr/>
+            </a:pPr>
+            <a:r>
+              <a:rPr lang="en-US"/>
               <a:t>Fourth level</a:t>
             </a:r>
-          </a:p>
-          <a:p>
-            <a:pPr lvl="4"/>
-            <a:r>
-              <a:rPr lang="en-US" smtClean="0"/>
+            <a:endParaRPr/>
+          </a:p>
+          <a:p>
+            <a:pPr lvl="4">
+              <a:defRPr/>
+            </a:pPr>
+            <a:r>
+              <a:rPr lang="en-US"/>
               <a:t>Fifth level</a:t>
             </a:r>
             <a:endParaRPr lang="en-US"/>
@@ -1857,7 +1932,7 @@
       </p:sp>
       <p:sp>
         <p:nvSpPr>
-          <p:cNvPr id="4" name="Date Placeholder 3"/>
+          <p:cNvPr id="1374590141" name="Date Placeholder 3"/>
           <p:cNvSpPr>
             <a:spLocks noGrp="1"/>
           </p:cNvSpPr>
@@ -1865,13 +1940,16 @@
             <p:ph type="dt" sz="half" idx="10"/>
           </p:nvPr>
         </p:nvSpPr>
-        <p:spPr/>
+        <p:spPr bwMode="auto"/>
         <p:txBody>
           <a:bodyPr/>
           <a:lstStyle/>
           <a:p>
+            <a:pPr>
+              <a:defRPr/>
+            </a:pPr>
             <a:fld id="{5BCAD085-E8A6-8845-BD4E-CB4CCA059FC4}" type="datetimeFigureOut">
-              <a:rPr lang="en-US" smtClean="0"/>
+              <a:rPr lang="en-US"/>
               <a:t>1/27/13</a:t>
             </a:fld>
             <a:endParaRPr lang="en-US"/>
@@ -1880,7 +1958,7 @@
       </p:sp>
       <p:sp>
         <p:nvSpPr>
-          <p:cNvPr id="5" name="Footer Placeholder 4"/>
+          <p:cNvPr id="1930390110" name="Footer Placeholder 4"/>
           <p:cNvSpPr>
             <a:spLocks noGrp="1"/>
           </p:cNvSpPr>
@@ -1888,18 +1966,21 @@
             <p:ph type="ftr" sz="quarter" idx="11"/>
           </p:nvPr>
         </p:nvSpPr>
-        <p:spPr/>
+        <p:spPr bwMode="auto"/>
         <p:txBody>
           <a:bodyPr/>
           <a:lstStyle/>
           <a:p>
+            <a:pPr>
+              <a:defRPr/>
+            </a:pPr>
             <a:endParaRPr lang="en-US"/>
           </a:p>
         </p:txBody>
       </p:sp>
       <p:sp>
         <p:nvSpPr>
-          <p:cNvPr id="6" name="Slide Number Placeholder 5"/>
+          <p:cNvPr id="1546544715" name="Slide Number Placeholder 5"/>
           <p:cNvSpPr>
             <a:spLocks noGrp="1"/>
           </p:cNvSpPr>
@@ -1907,13 +1988,16 @@
             <p:ph type="sldNum" sz="quarter" idx="12"/>
           </p:nvPr>
         </p:nvSpPr>
-        <p:spPr/>
+        <p:spPr bwMode="auto"/>
         <p:txBody>
           <a:bodyPr/>
           <a:lstStyle/>
           <a:p>
+            <a:pPr>
+              <a:defRPr/>
+            </a:pPr>
             <a:fld id="{C1FF6DA9-008F-8B48-92A6-B652298478BF}" type="slidenum">
-              <a:rPr lang="en-US" smtClean="0"/>
+              <a:rPr lang="en-US"/>
               <a:t>‹#›</a:t>
             </a:fld>
             <a:endParaRPr lang="en-US"/>
@@ -1921,11 +2005,6 @@
         </p:txBody>
       </p:sp>
     </p:spTree>
-    <p:extLst>
-      <p:ext uri="{BB962C8B-B14F-4D97-AF65-F5344CB8AC3E}">
-        <p14:creationId xmlns:p14="http://schemas.microsoft.com/office/powerpoint/2010/main" val="2910927964"/>
-      </p:ext>
-    </p:extLst>
   </p:cSld>
   <p:clrMapOvr>
     <a:masterClrMapping/>
@@ -1934,7 +2013,7 @@
 </file>
 
 <file path=ppt/slideLayouts/slideLayout11.xml><?xml version="1.0" encoding="utf-8"?>
-<p:sldLayout xmlns:a="http://schemas.openxmlformats.org/drawingml/2006/main" xmlns:r="http://schemas.openxmlformats.org/officeDocument/2006/relationships" xmlns:p="http://schemas.openxmlformats.org/presentationml/2006/main" type="vertTitleAndTx" preserve="1">
+<p:sldLayout xmlns:a="http://schemas.openxmlformats.org/drawingml/2006/main" xmlns:r="http://schemas.openxmlformats.org/officeDocument/2006/relationships" xmlns:p="http://schemas.openxmlformats.org/presentationml/2006/main" xmlns:m="http://schemas.openxmlformats.org/officeDocument/2006/math" xmlns:w="http://schemas.openxmlformats.org/wordprocessingml/2006/main" matchingName="" preserve="1" showMasterPhAnim="0" showMasterSp="1" type="vertTitleAndTx" userDrawn="1">
   <p:cSld name="Vertical Title and Text">
     <p:spTree>
       <p:nvGrpSpPr>
@@ -1942,7 +2021,7 @@
         <p:cNvGrpSpPr/>
         <p:nvPr/>
       </p:nvGrpSpPr>
-      <p:grpSpPr>
+      <p:grpSpPr bwMode="auto">
         <a:xfrm>
           <a:off x="0" y="0"/>
           <a:ext cx="0" cy="0"/>
@@ -1952,7 +2031,7 @@
       </p:grpSpPr>
       <p:sp>
         <p:nvSpPr>
-          <p:cNvPr id="2" name="Vertical Title 1"/>
+          <p:cNvPr id="927309992" name="Vertical Title 1"/>
           <p:cNvSpPr>
             <a:spLocks noGrp="1"/>
           </p:cNvSpPr>
@@ -1960,7 +2039,7 @@
             <p:ph type="title" orient="vert"/>
           </p:nvPr>
         </p:nvSpPr>
-        <p:spPr>
+        <p:spPr bwMode="auto">
           <a:xfrm>
             <a:off x="6629400" y="274638"/>
             <a:ext cx="2057400" cy="5851525"/>
@@ -1970,8 +2049,11 @@
           <a:bodyPr vert="eaVert"/>
           <a:lstStyle/>
           <a:p>
-            <a:r>
-              <a:rPr lang="en-US" smtClean="0"/>
+            <a:pPr>
+              <a:defRPr/>
+            </a:pPr>
+            <a:r>
+              <a:rPr lang="en-US"/>
               <a:t>Click to edit Master title style</a:t>
             </a:r>
             <a:endParaRPr lang="en-US"/>
@@ -1980,7 +2062,7 @@
       </p:sp>
       <p:sp>
         <p:nvSpPr>
-          <p:cNvPr id="3" name="Vertical Text Placeholder 2"/>
+          <p:cNvPr id="2091437303" name="Vertical Text Placeholder 2"/>
           <p:cNvSpPr>
             <a:spLocks noGrp="1"/>
           </p:cNvSpPr>
@@ -1988,7 +2070,7 @@
             <p:ph type="body" orient="vert" idx="1"/>
           </p:nvPr>
         </p:nvSpPr>
-        <p:spPr>
+        <p:spPr bwMode="auto">
           <a:xfrm>
             <a:off x="457200" y="274638"/>
             <a:ext cx="6019800" cy="5851525"/>
@@ -1998,37 +2080,51 @@
           <a:bodyPr vert="eaVert"/>
           <a:lstStyle/>
           <a:p>
-            <a:pPr lvl="0"/>
-            <a:r>
-              <a:rPr lang="en-US" smtClean="0"/>
+            <a:pPr lvl="0">
+              <a:defRPr/>
+            </a:pPr>
+            <a:r>
+              <a:rPr lang="en-US"/>
               <a:t>Click to edit Master text styles</a:t>
             </a:r>
-          </a:p>
-          <a:p>
-            <a:pPr lvl="1"/>
-            <a:r>
-              <a:rPr lang="en-US" smtClean="0"/>
+            <a:endParaRPr/>
+          </a:p>
+          <a:p>
+            <a:pPr lvl="1">
+              <a:defRPr/>
+            </a:pPr>
+            <a:r>
+              <a:rPr lang="en-US"/>
               <a:t>Second level</a:t>
             </a:r>
-          </a:p>
-          <a:p>
-            <a:pPr lvl="2"/>
-            <a:r>
-              <a:rPr lang="en-US" smtClean="0"/>
+            <a:endParaRPr/>
+          </a:p>
+          <a:p>
+            <a:pPr lvl="2">
+              <a:defRPr/>
+            </a:pPr>
+            <a:r>
+              <a:rPr lang="en-US"/>
               <a:t>Third level</a:t>
             </a:r>
-          </a:p>
-          <a:p>
-            <a:pPr lvl="3"/>
-            <a:r>
-              <a:rPr lang="en-US" smtClean="0"/>
+            <a:endParaRPr/>
+          </a:p>
+          <a:p>
+            <a:pPr lvl="3">
+              <a:defRPr/>
+            </a:pPr>
+            <a:r>
+              <a:rPr lang="en-US"/>
               <a:t>Fourth level</a:t>
             </a:r>
-          </a:p>
-          <a:p>
-            <a:pPr lvl="4"/>
-            <a:r>
-              <a:rPr lang="en-US" smtClean="0"/>
+            <a:endParaRPr/>
+          </a:p>
+          <a:p>
+            <a:pPr lvl="4">
+              <a:defRPr/>
+            </a:pPr>
+            <a:r>
+              <a:rPr lang="en-US"/>
               <a:t>Fifth level</a:t>
             </a:r>
             <a:endParaRPr lang="en-US"/>
@@ -2037,7 +2133,7 @@
       </p:sp>
       <p:sp>
         <p:nvSpPr>
-          <p:cNvPr id="4" name="Date Placeholder 3"/>
+          <p:cNvPr id="1573178752" name="Date Placeholder 3"/>
           <p:cNvSpPr>
             <a:spLocks noGrp="1"/>
           </p:cNvSpPr>
@@ -2045,13 +2141,16 @@
             <p:ph type="dt" sz="half" idx="10"/>
           </p:nvPr>
         </p:nvSpPr>
-        <p:spPr/>
+        <p:spPr bwMode="auto"/>
         <p:txBody>
           <a:bodyPr/>
           <a:lstStyle/>
           <a:p>
+            <a:pPr>
+              <a:defRPr/>
+            </a:pPr>
             <a:fld id="{5BCAD085-E8A6-8845-BD4E-CB4CCA059FC4}" type="datetimeFigureOut">
-              <a:rPr lang="en-US" smtClean="0"/>
+              <a:rPr lang="en-US"/>
               <a:t>1/27/13</a:t>
             </a:fld>
             <a:endParaRPr lang="en-US"/>
@@ -2060,7 +2159,7 @@
       </p:sp>
       <p:sp>
         <p:nvSpPr>
-          <p:cNvPr id="5" name="Footer Placeholder 4"/>
+          <p:cNvPr id="1538104004" name="Footer Placeholder 4"/>
           <p:cNvSpPr>
             <a:spLocks noGrp="1"/>
           </p:cNvSpPr>
@@ -2068,18 +2167,21 @@
             <p:ph type="ftr" sz="quarter" idx="11"/>
           </p:nvPr>
         </p:nvSpPr>
-        <p:spPr/>
+        <p:spPr bwMode="auto"/>
         <p:txBody>
           <a:bodyPr/>
           <a:lstStyle/>
           <a:p>
+            <a:pPr>
+              <a:defRPr/>
+            </a:pPr>
             <a:endParaRPr lang="en-US"/>
           </a:p>
         </p:txBody>
       </p:sp>
       <p:sp>
         <p:nvSpPr>
-          <p:cNvPr id="6" name="Slide Number Placeholder 5"/>
+          <p:cNvPr id="1560482160" name="Slide Number Placeholder 5"/>
           <p:cNvSpPr>
             <a:spLocks noGrp="1"/>
           </p:cNvSpPr>
@@ -2087,13 +2189,16 @@
             <p:ph type="sldNum" sz="quarter" idx="12"/>
           </p:nvPr>
         </p:nvSpPr>
-        <p:spPr/>
+        <p:spPr bwMode="auto"/>
         <p:txBody>
           <a:bodyPr/>
           <a:lstStyle/>
           <a:p>
+            <a:pPr>
+              <a:defRPr/>
+            </a:pPr>
             <a:fld id="{C1FF6DA9-008F-8B48-92A6-B652298478BF}" type="slidenum">
-              <a:rPr lang="en-US" smtClean="0"/>
+              <a:rPr lang="en-US"/>
               <a:t>‹#›</a:t>
             </a:fld>
             <a:endParaRPr lang="en-US"/>
@@ -2101,11 +2206,6 @@
         </p:txBody>
       </p:sp>
     </p:spTree>
-    <p:extLst>
-      <p:ext uri="{BB962C8B-B14F-4D97-AF65-F5344CB8AC3E}">
-        <p14:creationId xmlns:p14="http://schemas.microsoft.com/office/powerpoint/2010/main" val="3612223792"/>
-      </p:ext>
-    </p:extLst>
   </p:cSld>
   <p:clrMapOvr>
     <a:masterClrMapping/>
@@ -2114,7 +2214,7 @@
 </file>
 
 <file path=ppt/slideLayouts/slideLayout2.xml><?xml version="1.0" encoding="utf-8"?>
-<p:sldLayout xmlns:a="http://schemas.openxmlformats.org/drawingml/2006/main" xmlns:r="http://schemas.openxmlformats.org/officeDocument/2006/relationships" xmlns:p="http://schemas.openxmlformats.org/presentationml/2006/main" type="obj" preserve="1">
+<p:sldLayout xmlns:a="http://schemas.openxmlformats.org/drawingml/2006/main" xmlns:r="http://schemas.openxmlformats.org/officeDocument/2006/relationships" xmlns:p="http://schemas.openxmlformats.org/presentationml/2006/main" xmlns:m="http://schemas.openxmlformats.org/officeDocument/2006/math" xmlns:w="http://schemas.openxmlformats.org/wordprocessingml/2006/main" matchingName="" preserve="1" showMasterPhAnim="0" showMasterSp="1" type="obj" userDrawn="1">
   <p:cSld name="Title and Content">
     <p:spTree>
       <p:nvGrpSpPr>
@@ -2122,7 +2222,7 @@
         <p:cNvGrpSpPr/>
         <p:nvPr/>
       </p:nvGrpSpPr>
-      <p:grpSpPr>
+      <p:grpSpPr bwMode="auto">
         <a:xfrm>
           <a:off x="0" y="0"/>
           <a:ext cx="0" cy="0"/>
@@ -2132,7 +2232,7 @@
       </p:grpSpPr>
       <p:sp>
         <p:nvSpPr>
-          <p:cNvPr id="2" name="Title 1"/>
+          <p:cNvPr id="396453151" name="Title 1"/>
           <p:cNvSpPr>
             <a:spLocks noGrp="1"/>
           </p:cNvSpPr>
@@ -2140,13 +2240,16 @@
             <p:ph type="title"/>
           </p:nvPr>
         </p:nvSpPr>
-        <p:spPr/>
+        <p:spPr bwMode="auto"/>
         <p:txBody>
           <a:bodyPr/>
           <a:lstStyle/>
           <a:p>
-            <a:r>
-              <a:rPr lang="en-US" smtClean="0"/>
+            <a:pPr>
+              <a:defRPr/>
+            </a:pPr>
+            <a:r>
+              <a:rPr lang="en-US"/>
               <a:t>Click to edit Master title style</a:t>
             </a:r>
             <a:endParaRPr lang="en-US"/>
@@ -2155,7 +2258,7 @@
       </p:sp>
       <p:sp>
         <p:nvSpPr>
-          <p:cNvPr id="3" name="Content Placeholder 2"/>
+          <p:cNvPr id="711990438" name="Content Placeholder 2"/>
           <p:cNvSpPr>
             <a:spLocks noGrp="1"/>
           </p:cNvSpPr>
@@ -2163,42 +2266,56 @@
             <p:ph idx="1"/>
           </p:nvPr>
         </p:nvSpPr>
-        <p:spPr/>
+        <p:spPr bwMode="auto"/>
         <p:txBody>
           <a:bodyPr/>
           <a:lstStyle/>
           <a:p>
-            <a:pPr lvl="0"/>
-            <a:r>
-              <a:rPr lang="en-US" smtClean="0"/>
+            <a:pPr lvl="0">
+              <a:defRPr/>
+            </a:pPr>
+            <a:r>
+              <a:rPr lang="en-US"/>
               <a:t>Click to edit Master text styles</a:t>
             </a:r>
-          </a:p>
-          <a:p>
-            <a:pPr lvl="1"/>
-            <a:r>
-              <a:rPr lang="en-US" smtClean="0"/>
+            <a:endParaRPr/>
+          </a:p>
+          <a:p>
+            <a:pPr lvl="1">
+              <a:defRPr/>
+            </a:pPr>
+            <a:r>
+              <a:rPr lang="en-US"/>
               <a:t>Second level</a:t>
             </a:r>
-          </a:p>
-          <a:p>
-            <a:pPr lvl="2"/>
-            <a:r>
-              <a:rPr lang="en-US" smtClean="0"/>
+            <a:endParaRPr/>
+          </a:p>
+          <a:p>
+            <a:pPr lvl="2">
+              <a:defRPr/>
+            </a:pPr>
+            <a:r>
+              <a:rPr lang="en-US"/>
               <a:t>Third level</a:t>
             </a:r>
-          </a:p>
-          <a:p>
-            <a:pPr lvl="3"/>
-            <a:r>
-              <a:rPr lang="en-US" smtClean="0"/>
+            <a:endParaRPr/>
+          </a:p>
+          <a:p>
+            <a:pPr lvl="3">
+              <a:defRPr/>
+            </a:pPr>
+            <a:r>
+              <a:rPr lang="en-US"/>
               <a:t>Fourth level</a:t>
             </a:r>
-          </a:p>
-          <a:p>
-            <a:pPr lvl="4"/>
-            <a:r>
-              <a:rPr lang="en-US" smtClean="0"/>
+            <a:endParaRPr/>
+          </a:p>
+          <a:p>
+            <a:pPr lvl="4">
+              <a:defRPr/>
+            </a:pPr>
+            <a:r>
+              <a:rPr lang="en-US"/>
               <a:t>Fifth level</a:t>
             </a:r>
             <a:endParaRPr lang="en-US"/>
@@ -2207,7 +2324,7 @@
       </p:sp>
       <p:sp>
         <p:nvSpPr>
-          <p:cNvPr id="4" name="Date Placeholder 3"/>
+          <p:cNvPr id="1673121922" name="Date Placeholder 3"/>
           <p:cNvSpPr>
             <a:spLocks noGrp="1"/>
           </p:cNvSpPr>
@@ -2215,13 +2332,16 @@
             <p:ph type="dt" sz="half" idx="10"/>
           </p:nvPr>
         </p:nvSpPr>
-        <p:spPr/>
+        <p:spPr bwMode="auto"/>
         <p:txBody>
           <a:bodyPr/>
           <a:lstStyle/>
           <a:p>
+            <a:pPr>
+              <a:defRPr/>
+            </a:pPr>
             <a:fld id="{5BCAD085-E8A6-8845-BD4E-CB4CCA059FC4}" type="datetimeFigureOut">
-              <a:rPr lang="en-US" smtClean="0"/>
+              <a:rPr lang="en-US"/>
               <a:t>1/27/13</a:t>
             </a:fld>
             <a:endParaRPr lang="en-US"/>
@@ -2230,7 +2350,7 @@
       </p:sp>
       <p:sp>
         <p:nvSpPr>
-          <p:cNvPr id="5" name="Footer Placeholder 4"/>
+          <p:cNvPr id="1102080815" name="Footer Placeholder 4"/>
           <p:cNvSpPr>
             <a:spLocks noGrp="1"/>
           </p:cNvSpPr>
@@ -2238,18 +2358,21 @@
             <p:ph type="ftr" sz="quarter" idx="11"/>
           </p:nvPr>
         </p:nvSpPr>
-        <p:spPr/>
+        <p:spPr bwMode="auto"/>
         <p:txBody>
           <a:bodyPr/>
           <a:lstStyle/>
           <a:p>
+            <a:pPr>
+              <a:defRPr/>
+            </a:pPr>
             <a:endParaRPr lang="en-US"/>
           </a:p>
         </p:txBody>
       </p:sp>
       <p:sp>
         <p:nvSpPr>
-          <p:cNvPr id="6" name="Slide Number Placeholder 5"/>
+          <p:cNvPr id="1569772874" name="Slide Number Placeholder 5"/>
           <p:cNvSpPr>
             <a:spLocks noGrp="1"/>
           </p:cNvSpPr>
@@ -2257,13 +2380,16 @@
             <p:ph type="sldNum" sz="quarter" idx="12"/>
           </p:nvPr>
         </p:nvSpPr>
-        <p:spPr/>
+        <p:spPr bwMode="auto"/>
         <p:txBody>
           <a:bodyPr/>
           <a:lstStyle/>
           <a:p>
+            <a:pPr>
+              <a:defRPr/>
+            </a:pPr>
             <a:fld id="{C1FF6DA9-008F-8B48-92A6-B652298478BF}" type="slidenum">
-              <a:rPr lang="en-US" smtClean="0"/>
+              <a:rPr lang="en-US"/>
               <a:t>‹#›</a:t>
             </a:fld>
             <a:endParaRPr lang="en-US"/>
@@ -2271,11 +2397,6 @@
         </p:txBody>
       </p:sp>
     </p:spTree>
-    <p:extLst>
-      <p:ext uri="{BB962C8B-B14F-4D97-AF65-F5344CB8AC3E}">
-        <p14:creationId xmlns:p14="http://schemas.microsoft.com/office/powerpoint/2010/main" val="2614314258"/>
-      </p:ext>
-    </p:extLst>
   </p:cSld>
   <p:clrMapOvr>
     <a:masterClrMapping/>
@@ -2284,7 +2405,7 @@
 </file>
 
 <file path=ppt/slideLayouts/slideLayout3.xml><?xml version="1.0" encoding="utf-8"?>
-<p:sldLayout xmlns:a="http://schemas.openxmlformats.org/drawingml/2006/main" xmlns:r="http://schemas.openxmlformats.org/officeDocument/2006/relationships" xmlns:p="http://schemas.openxmlformats.org/presentationml/2006/main" type="secHead" preserve="1">
+<p:sldLayout xmlns:a="http://schemas.openxmlformats.org/drawingml/2006/main" xmlns:r="http://schemas.openxmlformats.org/officeDocument/2006/relationships" xmlns:p="http://schemas.openxmlformats.org/presentationml/2006/main" xmlns:m="http://schemas.openxmlformats.org/officeDocument/2006/math" xmlns:w="http://schemas.openxmlformats.org/wordprocessingml/2006/main" matchingName="" preserve="1" showMasterPhAnim="0" showMasterSp="1" type="secHead" userDrawn="1">
   <p:cSld name="Section Header">
     <p:spTree>
       <p:nvGrpSpPr>
@@ -2292,7 +2413,7 @@
         <p:cNvGrpSpPr/>
         <p:nvPr/>
       </p:nvGrpSpPr>
-      <p:grpSpPr>
+      <p:grpSpPr bwMode="auto">
         <a:xfrm>
           <a:off x="0" y="0"/>
           <a:ext cx="0" cy="0"/>
@@ -2302,7 +2423,7 @@
       </p:grpSpPr>
       <p:sp>
         <p:nvSpPr>
-          <p:cNvPr id="2" name="Title 1"/>
+          <p:cNvPr id="672688056" name="Title 1"/>
           <p:cNvSpPr>
             <a:spLocks noGrp="1"/>
           </p:cNvSpPr>
@@ -2310,7 +2431,7 @@
             <p:ph type="title"/>
           </p:nvPr>
         </p:nvSpPr>
-        <p:spPr>
+        <p:spPr bwMode="auto">
           <a:xfrm>
             <a:off x="722313" y="4406900"/>
             <a:ext cx="7772400" cy="1362075"/>
@@ -2324,8 +2445,11 @@
             </a:lvl1pPr>
           </a:lstStyle>
           <a:p>
-            <a:r>
-              <a:rPr lang="en-US" smtClean="0"/>
+            <a:pPr>
+              <a:defRPr/>
+            </a:pPr>
+            <a:r>
+              <a:rPr lang="en-US"/>
               <a:t>Click to edit Master title style</a:t>
             </a:r>
             <a:endParaRPr lang="en-US"/>
@@ -2334,7 +2458,7 @@
       </p:sp>
       <p:sp>
         <p:nvSpPr>
-          <p:cNvPr id="3" name="Text Placeholder 2"/>
+          <p:cNvPr id="1332808735" name="Text Placeholder 2"/>
           <p:cNvSpPr>
             <a:spLocks noGrp="1"/>
           </p:cNvSpPr>
@@ -2342,7 +2466,7 @@
             <p:ph type="body" idx="1"/>
           </p:nvPr>
         </p:nvSpPr>
-        <p:spPr>
+        <p:spPr bwMode="auto">
           <a:xfrm>
             <a:off x="722313" y="2906713"/>
             <a:ext cx="7772400" cy="1500187"/>
@@ -2443,17 +2567,20 @@
             </a:lvl9pPr>
           </a:lstStyle>
           <a:p>
-            <a:pPr lvl="0"/>
-            <a:r>
-              <a:rPr lang="en-US" smtClean="0"/>
+            <a:pPr lvl="0">
+              <a:defRPr/>
+            </a:pPr>
+            <a:r>
+              <a:rPr lang="en-US"/>
               <a:t>Click to edit Master text styles</a:t>
             </a:r>
-          </a:p>
-        </p:txBody>
-      </p:sp>
-      <p:sp>
-        <p:nvSpPr>
-          <p:cNvPr id="4" name="Date Placeholder 3"/>
+            <a:endParaRPr/>
+          </a:p>
+        </p:txBody>
+      </p:sp>
+      <p:sp>
+        <p:nvSpPr>
+          <p:cNvPr id="524268179" name="Date Placeholder 3"/>
           <p:cNvSpPr>
             <a:spLocks noGrp="1"/>
           </p:cNvSpPr>
@@ -2461,13 +2588,16 @@
             <p:ph type="dt" sz="half" idx="10"/>
           </p:nvPr>
         </p:nvSpPr>
-        <p:spPr/>
+        <p:spPr bwMode="auto"/>
         <p:txBody>
           <a:bodyPr/>
           <a:lstStyle/>
           <a:p>
+            <a:pPr>
+              <a:defRPr/>
+            </a:pPr>
             <a:fld id="{5BCAD085-E8A6-8845-BD4E-CB4CCA059FC4}" type="datetimeFigureOut">
-              <a:rPr lang="en-US" smtClean="0"/>
+              <a:rPr lang="en-US"/>
               <a:t>1/27/13</a:t>
             </a:fld>
             <a:endParaRPr lang="en-US"/>
@@ -2476,7 +2606,7 @@
       </p:sp>
       <p:sp>
         <p:nvSpPr>
-          <p:cNvPr id="5" name="Footer Placeholder 4"/>
+          <p:cNvPr id="1880521085" name="Footer Placeholder 4"/>
           <p:cNvSpPr>
             <a:spLocks noGrp="1"/>
           </p:cNvSpPr>
@@ -2484,18 +2614,21 @@
             <p:ph type="ftr" sz="quarter" idx="11"/>
           </p:nvPr>
         </p:nvSpPr>
-        <p:spPr/>
+        <p:spPr bwMode="auto"/>
         <p:txBody>
           <a:bodyPr/>
           <a:lstStyle/>
           <a:p>
+            <a:pPr>
+              <a:defRPr/>
+            </a:pPr>
             <a:endParaRPr lang="en-US"/>
           </a:p>
         </p:txBody>
       </p:sp>
       <p:sp>
         <p:nvSpPr>
-          <p:cNvPr id="6" name="Slide Number Placeholder 5"/>
+          <p:cNvPr id="548399213" name="Slide Number Placeholder 5"/>
           <p:cNvSpPr>
             <a:spLocks noGrp="1"/>
           </p:cNvSpPr>
@@ -2503,13 +2636,16 @@
             <p:ph type="sldNum" sz="quarter" idx="12"/>
           </p:nvPr>
         </p:nvSpPr>
-        <p:spPr/>
+        <p:spPr bwMode="auto"/>
         <p:txBody>
           <a:bodyPr/>
           <a:lstStyle/>
           <a:p>
+            <a:pPr>
+              <a:defRPr/>
+            </a:pPr>
             <a:fld id="{C1FF6DA9-008F-8B48-92A6-B652298478BF}" type="slidenum">
-              <a:rPr lang="en-US" smtClean="0"/>
+              <a:rPr lang="en-US"/>
               <a:t>‹#›</a:t>
             </a:fld>
             <a:endParaRPr lang="en-US"/>
@@ -2517,11 +2653,6 @@
         </p:txBody>
       </p:sp>
     </p:spTree>
-    <p:extLst>
-      <p:ext uri="{BB962C8B-B14F-4D97-AF65-F5344CB8AC3E}">
-        <p14:creationId xmlns:p14="http://schemas.microsoft.com/office/powerpoint/2010/main" val="960648375"/>
-      </p:ext>
-    </p:extLst>
   </p:cSld>
   <p:clrMapOvr>
     <a:masterClrMapping/>
@@ -2530,7 +2661,7 @@
 </file>
 
 <file path=ppt/slideLayouts/slideLayout4.xml><?xml version="1.0" encoding="utf-8"?>
-<p:sldLayout xmlns:a="http://schemas.openxmlformats.org/drawingml/2006/main" xmlns:r="http://schemas.openxmlformats.org/officeDocument/2006/relationships" xmlns:p="http://schemas.openxmlformats.org/presentationml/2006/main" type="twoObj" preserve="1">
+<p:sldLayout xmlns:a="http://schemas.openxmlformats.org/drawingml/2006/main" xmlns:r="http://schemas.openxmlformats.org/officeDocument/2006/relationships" xmlns:p="http://schemas.openxmlformats.org/presentationml/2006/main" xmlns:m="http://schemas.openxmlformats.org/officeDocument/2006/math" xmlns:w="http://schemas.openxmlformats.org/wordprocessingml/2006/main" matchingName="" preserve="1" showMasterPhAnim="0" showMasterSp="1" type="twoObj" userDrawn="1">
   <p:cSld name="Two Content">
     <p:spTree>
       <p:nvGrpSpPr>
@@ -2538,7 +2669,7 @@
         <p:cNvGrpSpPr/>
         <p:nvPr/>
       </p:nvGrpSpPr>
-      <p:grpSpPr>
+      <p:grpSpPr bwMode="auto">
         <a:xfrm>
           <a:off x="0" y="0"/>
           <a:ext cx="0" cy="0"/>
@@ -2548,7 +2679,7 @@
       </p:grpSpPr>
       <p:sp>
         <p:nvSpPr>
-          <p:cNvPr id="2" name="Title 1"/>
+          <p:cNvPr id="722135011" name="Title 1"/>
           <p:cNvSpPr>
             <a:spLocks noGrp="1"/>
           </p:cNvSpPr>
@@ -2556,13 +2687,16 @@
             <p:ph type="title"/>
           </p:nvPr>
         </p:nvSpPr>
-        <p:spPr/>
+        <p:spPr bwMode="auto"/>
         <p:txBody>
           <a:bodyPr/>
           <a:lstStyle/>
           <a:p>
-            <a:r>
-              <a:rPr lang="en-US" smtClean="0"/>
+            <a:pPr>
+              <a:defRPr/>
+            </a:pPr>
+            <a:r>
+              <a:rPr lang="en-US"/>
               <a:t>Click to edit Master title style</a:t>
             </a:r>
             <a:endParaRPr lang="en-US"/>
@@ -2571,7 +2705,7 @@
       </p:sp>
       <p:sp>
         <p:nvSpPr>
-          <p:cNvPr id="3" name="Content Placeholder 2"/>
+          <p:cNvPr id="1905704366" name="Content Placeholder 2"/>
           <p:cNvSpPr>
             <a:spLocks noGrp="1"/>
           </p:cNvSpPr>
@@ -2579,7 +2713,7 @@
             <p:ph sz="half" idx="1"/>
           </p:nvPr>
         </p:nvSpPr>
-        <p:spPr>
+        <p:spPr bwMode="auto">
           <a:xfrm>
             <a:off x="457200" y="1600200"/>
             <a:ext cx="4038600" cy="4525963"/>
@@ -2617,37 +2751,51 @@
             </a:lvl9pPr>
           </a:lstStyle>
           <a:p>
-            <a:pPr lvl="0"/>
-            <a:r>
-              <a:rPr lang="en-US" smtClean="0"/>
+            <a:pPr lvl="0">
+              <a:defRPr/>
+            </a:pPr>
+            <a:r>
+              <a:rPr lang="en-US"/>
               <a:t>Click to edit Master text styles</a:t>
             </a:r>
-          </a:p>
-          <a:p>
-            <a:pPr lvl="1"/>
-            <a:r>
-              <a:rPr lang="en-US" smtClean="0"/>
+            <a:endParaRPr/>
+          </a:p>
+          <a:p>
+            <a:pPr lvl="1">
+              <a:defRPr/>
+            </a:pPr>
+            <a:r>
+              <a:rPr lang="en-US"/>
               <a:t>Second level</a:t>
             </a:r>
-          </a:p>
-          <a:p>
-            <a:pPr lvl="2"/>
-            <a:r>
-              <a:rPr lang="en-US" smtClean="0"/>
+            <a:endParaRPr/>
+          </a:p>
+          <a:p>
+            <a:pPr lvl="2">
+              <a:defRPr/>
+            </a:pPr>
+            <a:r>
+              <a:rPr lang="en-US"/>
               <a:t>Third level</a:t>
             </a:r>
-          </a:p>
-          <a:p>
-            <a:pPr lvl="3"/>
-            <a:r>
-              <a:rPr lang="en-US" smtClean="0"/>
+            <a:endParaRPr/>
+          </a:p>
+          <a:p>
+            <a:pPr lvl="3">
+              <a:defRPr/>
+            </a:pPr>
+            <a:r>
+              <a:rPr lang="en-US"/>
               <a:t>Fourth level</a:t>
             </a:r>
-          </a:p>
-          <a:p>
-            <a:pPr lvl="4"/>
-            <a:r>
-              <a:rPr lang="en-US" smtClean="0"/>
+            <a:endParaRPr/>
+          </a:p>
+          <a:p>
+            <a:pPr lvl="4">
+              <a:defRPr/>
+            </a:pPr>
+            <a:r>
+              <a:rPr lang="en-US"/>
               <a:t>Fifth level</a:t>
             </a:r>
             <a:endParaRPr lang="en-US"/>
@@ -2656,7 +2804,7 @@
       </p:sp>
       <p:sp>
         <p:nvSpPr>
-          <p:cNvPr id="4" name="Content Placeholder 3"/>
+          <p:cNvPr id="343296720" name="Content Placeholder 3"/>
           <p:cNvSpPr>
             <a:spLocks noGrp="1"/>
           </p:cNvSpPr>
@@ -2664,7 +2812,7 @@
             <p:ph sz="half" idx="2"/>
           </p:nvPr>
         </p:nvSpPr>
-        <p:spPr>
+        <p:spPr bwMode="auto">
           <a:xfrm>
             <a:off x="4648200" y="1600200"/>
             <a:ext cx="4038600" cy="4525963"/>
@@ -2702,37 +2850,51 @@
             </a:lvl9pPr>
           </a:lstStyle>
           <a:p>
-            <a:pPr lvl="0"/>
-            <a:r>
-              <a:rPr lang="en-US" smtClean="0"/>
+            <a:pPr lvl="0">
+              <a:defRPr/>
+            </a:pPr>
+            <a:r>
+              <a:rPr lang="en-US"/>
               <a:t>Click to edit Master text styles</a:t>
             </a:r>
-          </a:p>
-          <a:p>
-            <a:pPr lvl="1"/>
-            <a:r>
-              <a:rPr lang="en-US" smtClean="0"/>
+            <a:endParaRPr/>
+          </a:p>
+          <a:p>
+            <a:pPr lvl="1">
+              <a:defRPr/>
+            </a:pPr>
+            <a:r>
+              <a:rPr lang="en-US"/>
               <a:t>Second level</a:t>
             </a:r>
-          </a:p>
-          <a:p>
-            <a:pPr lvl="2"/>
-            <a:r>
-              <a:rPr lang="en-US" smtClean="0"/>
+            <a:endParaRPr/>
+          </a:p>
+          <a:p>
+            <a:pPr lvl="2">
+              <a:defRPr/>
+            </a:pPr>
+            <a:r>
+              <a:rPr lang="en-US"/>
               <a:t>Third level</a:t>
             </a:r>
-          </a:p>
-          <a:p>
-            <a:pPr lvl="3"/>
-            <a:r>
-              <a:rPr lang="en-US" smtClean="0"/>
+            <a:endParaRPr/>
+          </a:p>
+          <a:p>
+            <a:pPr lvl="3">
+              <a:defRPr/>
+            </a:pPr>
+            <a:r>
+              <a:rPr lang="en-US"/>
               <a:t>Fourth level</a:t>
             </a:r>
-          </a:p>
-          <a:p>
-            <a:pPr lvl="4"/>
-            <a:r>
-              <a:rPr lang="en-US" smtClean="0"/>
+            <a:endParaRPr/>
+          </a:p>
+          <a:p>
+            <a:pPr lvl="4">
+              <a:defRPr/>
+            </a:pPr>
+            <a:r>
+              <a:rPr lang="en-US"/>
               <a:t>Fifth level</a:t>
             </a:r>
             <a:endParaRPr lang="en-US"/>
@@ -2741,7 +2903,7 @@
       </p:sp>
       <p:sp>
         <p:nvSpPr>
-          <p:cNvPr id="5" name="Date Placeholder 4"/>
+          <p:cNvPr id="229480770" name="Date Placeholder 4"/>
           <p:cNvSpPr>
             <a:spLocks noGrp="1"/>
           </p:cNvSpPr>
@@ -2749,13 +2911,16 @@
             <p:ph type="dt" sz="half" idx="10"/>
           </p:nvPr>
         </p:nvSpPr>
-        <p:spPr/>
+        <p:spPr bwMode="auto"/>
         <p:txBody>
           <a:bodyPr/>
           <a:lstStyle/>
           <a:p>
+            <a:pPr>
+              <a:defRPr/>
+            </a:pPr>
             <a:fld id="{5BCAD085-E8A6-8845-BD4E-CB4CCA059FC4}" type="datetimeFigureOut">
-              <a:rPr lang="en-US" smtClean="0"/>
+              <a:rPr lang="en-US"/>
               <a:t>1/27/13</a:t>
             </a:fld>
             <a:endParaRPr lang="en-US"/>
@@ -2764,7 +2929,7 @@
       </p:sp>
       <p:sp>
         <p:nvSpPr>
-          <p:cNvPr id="6" name="Footer Placeholder 5"/>
+          <p:cNvPr id="711353437" name="Footer Placeholder 5"/>
           <p:cNvSpPr>
             <a:spLocks noGrp="1"/>
           </p:cNvSpPr>
@@ -2772,18 +2937,21 @@
             <p:ph type="ftr" sz="quarter" idx="11"/>
           </p:nvPr>
         </p:nvSpPr>
-        <p:spPr/>
+        <p:spPr bwMode="auto"/>
         <p:txBody>
           <a:bodyPr/>
           <a:lstStyle/>
           <a:p>
+            <a:pPr>
+              <a:defRPr/>
+            </a:pPr>
             <a:endParaRPr lang="en-US"/>
           </a:p>
         </p:txBody>
       </p:sp>
       <p:sp>
         <p:nvSpPr>
-          <p:cNvPr id="7" name="Slide Number Placeholder 6"/>
+          <p:cNvPr id="2110881949" name="Slide Number Placeholder 6"/>
           <p:cNvSpPr>
             <a:spLocks noGrp="1"/>
           </p:cNvSpPr>
@@ -2791,13 +2959,16 @@
             <p:ph type="sldNum" sz="quarter" idx="12"/>
           </p:nvPr>
         </p:nvSpPr>
-        <p:spPr/>
+        <p:spPr bwMode="auto"/>
         <p:txBody>
           <a:bodyPr/>
           <a:lstStyle/>
           <a:p>
+            <a:pPr>
+              <a:defRPr/>
+            </a:pPr>
             <a:fld id="{C1FF6DA9-008F-8B48-92A6-B652298478BF}" type="slidenum">
-              <a:rPr lang="en-US" smtClean="0"/>
+              <a:rPr lang="en-US"/>
               <a:t>‹#›</a:t>
             </a:fld>
             <a:endParaRPr lang="en-US"/>
@@ -2805,11 +2976,6 @@
         </p:txBody>
       </p:sp>
     </p:spTree>
-    <p:extLst>
-      <p:ext uri="{BB962C8B-B14F-4D97-AF65-F5344CB8AC3E}">
-        <p14:creationId xmlns:p14="http://schemas.microsoft.com/office/powerpoint/2010/main" val="2782244947"/>
-      </p:ext>
-    </p:extLst>
   </p:cSld>
   <p:clrMapOvr>
     <a:masterClrMapping/>
@@ -2818,7 +2984,7 @@
 </file>
 
 <file path=ppt/slideLayouts/slideLayout5.xml><?xml version="1.0" encoding="utf-8"?>
-<p:sldLayout xmlns:a="http://schemas.openxmlformats.org/drawingml/2006/main" xmlns:r="http://schemas.openxmlformats.org/officeDocument/2006/relationships" xmlns:p="http://schemas.openxmlformats.org/presentationml/2006/main" type="twoTxTwoObj" preserve="1">
+<p:sldLayout xmlns:a="http://schemas.openxmlformats.org/drawingml/2006/main" xmlns:r="http://schemas.openxmlformats.org/officeDocument/2006/relationships" xmlns:p="http://schemas.openxmlformats.org/presentationml/2006/main" xmlns:m="http://schemas.openxmlformats.org/officeDocument/2006/math" xmlns:w="http://schemas.openxmlformats.org/wordprocessingml/2006/main" matchingName="" preserve="1" showMasterPhAnim="0" showMasterSp="1" type="twoTxTwoObj" userDrawn="1">
   <p:cSld name="Comparison">
     <p:spTree>
       <p:nvGrpSpPr>
@@ -2826,7 +2992,7 @@
         <p:cNvGrpSpPr/>
         <p:nvPr/>
       </p:nvGrpSpPr>
-      <p:grpSpPr>
+      <p:grpSpPr bwMode="auto">
         <a:xfrm>
           <a:off x="0" y="0"/>
           <a:ext cx="0" cy="0"/>
@@ -2836,7 +3002,7 @@
       </p:grpSpPr>
       <p:sp>
         <p:nvSpPr>
-          <p:cNvPr id="2" name="Title 1"/>
+          <p:cNvPr id="149812053" name="Title 1"/>
           <p:cNvSpPr>
             <a:spLocks noGrp="1"/>
           </p:cNvSpPr>
@@ -2844,7 +3010,7 @@
             <p:ph type="title"/>
           </p:nvPr>
         </p:nvSpPr>
-        <p:spPr/>
+        <p:spPr bwMode="auto"/>
         <p:txBody>
           <a:bodyPr/>
           <a:lstStyle>
@@ -2853,8 +3019,11 @@
             </a:lvl1pPr>
           </a:lstStyle>
           <a:p>
-            <a:r>
-              <a:rPr lang="en-US" smtClean="0"/>
+            <a:pPr>
+              <a:defRPr/>
+            </a:pPr>
+            <a:r>
+              <a:rPr lang="en-US"/>
               <a:t>Click to edit Master title style</a:t>
             </a:r>
             <a:endParaRPr lang="en-US"/>
@@ -2863,7 +3032,7 @@
       </p:sp>
       <p:sp>
         <p:nvSpPr>
-          <p:cNvPr id="3" name="Text Placeholder 2"/>
+          <p:cNvPr id="1687481555" name="Text Placeholder 2"/>
           <p:cNvSpPr>
             <a:spLocks noGrp="1"/>
           </p:cNvSpPr>
@@ -2871,7 +3040,7 @@
             <p:ph type="body" idx="1"/>
           </p:nvPr>
         </p:nvSpPr>
-        <p:spPr>
+        <p:spPr bwMode="auto">
           <a:xfrm>
             <a:off x="457200" y="1535113"/>
             <a:ext cx="4040188" cy="639762"/>
@@ -2918,17 +3087,20 @@
             </a:lvl9pPr>
           </a:lstStyle>
           <a:p>
-            <a:pPr lvl="0"/>
-            <a:r>
-              <a:rPr lang="en-US" smtClean="0"/>
+            <a:pPr lvl="0">
+              <a:defRPr/>
+            </a:pPr>
+            <a:r>
+              <a:rPr lang="en-US"/>
               <a:t>Click to edit Master text styles</a:t>
             </a:r>
-          </a:p>
-        </p:txBody>
-      </p:sp>
-      <p:sp>
-        <p:nvSpPr>
-          <p:cNvPr id="4" name="Content Placeholder 3"/>
+            <a:endParaRPr/>
+          </a:p>
+        </p:txBody>
+      </p:sp>
+      <p:sp>
+        <p:nvSpPr>
+          <p:cNvPr id="52184508" name="Content Placeholder 3"/>
           <p:cNvSpPr>
             <a:spLocks noGrp="1"/>
           </p:cNvSpPr>
@@ -2936,7 +3108,7 @@
             <p:ph sz="half" idx="2"/>
           </p:nvPr>
         </p:nvSpPr>
-        <p:spPr>
+        <p:spPr bwMode="auto">
           <a:xfrm>
             <a:off x="457200" y="2174875"/>
             <a:ext cx="4040188" cy="3951288"/>
@@ -2974,37 +3146,51 @@
             </a:lvl9pPr>
           </a:lstStyle>
           <a:p>
-            <a:pPr lvl="0"/>
-            <a:r>
-              <a:rPr lang="en-US" smtClean="0"/>
+            <a:pPr lvl="0">
+              <a:defRPr/>
+            </a:pPr>
+            <a:r>
+              <a:rPr lang="en-US"/>
               <a:t>Click to edit Master text styles</a:t>
             </a:r>
-          </a:p>
-          <a:p>
-            <a:pPr lvl="1"/>
-            <a:r>
-              <a:rPr lang="en-US" smtClean="0"/>
+            <a:endParaRPr/>
+          </a:p>
+          <a:p>
+            <a:pPr lvl="1">
+              <a:defRPr/>
+            </a:pPr>
+            <a:r>
+              <a:rPr lang="en-US"/>
               <a:t>Second level</a:t>
             </a:r>
-          </a:p>
-          <a:p>
-            <a:pPr lvl="2"/>
-            <a:r>
-              <a:rPr lang="en-US" smtClean="0"/>
+            <a:endParaRPr/>
+          </a:p>
+          <a:p>
+            <a:pPr lvl="2">
+              <a:defRPr/>
+            </a:pPr>
+            <a:r>
+              <a:rPr lang="en-US"/>
               <a:t>Third level</a:t>
             </a:r>
-          </a:p>
-          <a:p>
-            <a:pPr lvl="3"/>
-            <a:r>
-              <a:rPr lang="en-US" smtClean="0"/>
+            <a:endParaRPr/>
+          </a:p>
+          <a:p>
+            <a:pPr lvl="3">
+              <a:defRPr/>
+            </a:pPr>
+            <a:r>
+              <a:rPr lang="en-US"/>
               <a:t>Fourth level</a:t>
             </a:r>
-          </a:p>
-          <a:p>
-            <a:pPr lvl="4"/>
-            <a:r>
-              <a:rPr lang="en-US" smtClean="0"/>
+            <a:endParaRPr/>
+          </a:p>
+          <a:p>
+            <a:pPr lvl="4">
+              <a:defRPr/>
+            </a:pPr>
+            <a:r>
+              <a:rPr lang="en-US"/>
               <a:t>Fifth level</a:t>
             </a:r>
             <a:endParaRPr lang="en-US"/>
@@ -3013,7 +3199,7 @@
       </p:sp>
       <p:sp>
         <p:nvSpPr>
-          <p:cNvPr id="5" name="Text Placeholder 4"/>
+          <p:cNvPr id="1330332918" name="Text Placeholder 4"/>
           <p:cNvSpPr>
             <a:spLocks noGrp="1"/>
           </p:cNvSpPr>
@@ -3021,7 +3207,7 @@
             <p:ph type="body" sz="quarter" idx="3"/>
           </p:nvPr>
         </p:nvSpPr>
-        <p:spPr>
+        <p:spPr bwMode="auto">
           <a:xfrm>
             <a:off x="4645025" y="1535113"/>
             <a:ext cx="4041775" cy="639762"/>
@@ -3068,17 +3254,20 @@
             </a:lvl9pPr>
           </a:lstStyle>
           <a:p>
-            <a:pPr lvl="0"/>
-            <a:r>
-              <a:rPr lang="en-US" smtClean="0"/>
+            <a:pPr lvl="0">
+              <a:defRPr/>
+            </a:pPr>
+            <a:r>
+              <a:rPr lang="en-US"/>
               <a:t>Click to edit Master text styles</a:t>
             </a:r>
-          </a:p>
-        </p:txBody>
-      </p:sp>
-      <p:sp>
-        <p:nvSpPr>
-          <p:cNvPr id="6" name="Content Placeholder 5"/>
+            <a:endParaRPr/>
+          </a:p>
+        </p:txBody>
+      </p:sp>
+      <p:sp>
+        <p:nvSpPr>
+          <p:cNvPr id="913670548" name="Content Placeholder 5"/>
           <p:cNvSpPr>
             <a:spLocks noGrp="1"/>
           </p:cNvSpPr>
@@ -3086,7 +3275,7 @@
             <p:ph sz="quarter" idx="4"/>
           </p:nvPr>
         </p:nvSpPr>
-        <p:spPr>
+        <p:spPr bwMode="auto">
           <a:xfrm>
             <a:off x="4645025" y="2174875"/>
             <a:ext cx="4041775" cy="3951288"/>
@@ -3124,37 +3313,51 @@
             </a:lvl9pPr>
           </a:lstStyle>
           <a:p>
-            <a:pPr lvl="0"/>
-            <a:r>
-              <a:rPr lang="en-US" smtClean="0"/>
+            <a:pPr lvl="0">
+              <a:defRPr/>
+            </a:pPr>
+            <a:r>
+              <a:rPr lang="en-US"/>
               <a:t>Click to edit Master text styles</a:t>
             </a:r>
-          </a:p>
-          <a:p>
-            <a:pPr lvl="1"/>
-            <a:r>
-              <a:rPr lang="en-US" smtClean="0"/>
+            <a:endParaRPr/>
+          </a:p>
+          <a:p>
+            <a:pPr lvl="1">
+              <a:defRPr/>
+            </a:pPr>
+            <a:r>
+              <a:rPr lang="en-US"/>
               <a:t>Second level</a:t>
             </a:r>
-          </a:p>
-          <a:p>
-            <a:pPr lvl="2"/>
-            <a:r>
-              <a:rPr lang="en-US" smtClean="0"/>
+            <a:endParaRPr/>
+          </a:p>
+          <a:p>
+            <a:pPr lvl="2">
+              <a:defRPr/>
+            </a:pPr>
+            <a:r>
+              <a:rPr lang="en-US"/>
               <a:t>Third level</a:t>
             </a:r>
-          </a:p>
-          <a:p>
-            <a:pPr lvl="3"/>
-            <a:r>
-              <a:rPr lang="en-US" smtClean="0"/>
+            <a:endParaRPr/>
+          </a:p>
+          <a:p>
+            <a:pPr lvl="3">
+              <a:defRPr/>
+            </a:pPr>
+            <a:r>
+              <a:rPr lang="en-US"/>
               <a:t>Fourth level</a:t>
             </a:r>
-          </a:p>
-          <a:p>
-            <a:pPr lvl="4"/>
-            <a:r>
-              <a:rPr lang="en-US" smtClean="0"/>
+            <a:endParaRPr/>
+          </a:p>
+          <a:p>
+            <a:pPr lvl="4">
+              <a:defRPr/>
+            </a:pPr>
+            <a:r>
+              <a:rPr lang="en-US"/>
               <a:t>Fifth level</a:t>
             </a:r>
             <a:endParaRPr lang="en-US"/>
@@ -3163,7 +3366,7 @@
       </p:sp>
       <p:sp>
         <p:nvSpPr>
-          <p:cNvPr id="7" name="Date Placeholder 6"/>
+          <p:cNvPr id="891028305" name="Date Placeholder 6"/>
           <p:cNvSpPr>
             <a:spLocks noGrp="1"/>
           </p:cNvSpPr>
@@ -3171,13 +3374,16 @@
             <p:ph type="dt" sz="half" idx="10"/>
           </p:nvPr>
         </p:nvSpPr>
-        <p:spPr/>
+        <p:spPr bwMode="auto"/>
         <p:txBody>
           <a:bodyPr/>
           <a:lstStyle/>
           <a:p>
+            <a:pPr>
+              <a:defRPr/>
+            </a:pPr>
             <a:fld id="{5BCAD085-E8A6-8845-BD4E-CB4CCA059FC4}" type="datetimeFigureOut">
-              <a:rPr lang="en-US" smtClean="0"/>
+              <a:rPr lang="en-US"/>
               <a:t>1/27/13</a:t>
             </a:fld>
             <a:endParaRPr lang="en-US"/>
@@ -3186,7 +3392,7 @@
       </p:sp>
       <p:sp>
         <p:nvSpPr>
-          <p:cNvPr id="8" name="Footer Placeholder 7"/>
+          <p:cNvPr id="1604552280" name="Footer Placeholder 7"/>
           <p:cNvSpPr>
             <a:spLocks noGrp="1"/>
           </p:cNvSpPr>
@@ -3194,18 +3400,21 @@
             <p:ph type="ftr" sz="quarter" idx="11"/>
           </p:nvPr>
         </p:nvSpPr>
-        <p:spPr/>
+        <p:spPr bwMode="auto"/>
         <p:txBody>
           <a:bodyPr/>
           <a:lstStyle/>
           <a:p>
+            <a:pPr>
+              <a:defRPr/>
+            </a:pPr>
             <a:endParaRPr lang="en-US"/>
           </a:p>
         </p:txBody>
       </p:sp>
       <p:sp>
         <p:nvSpPr>
-          <p:cNvPr id="9" name="Slide Number Placeholder 8"/>
+          <p:cNvPr id="577051049" name="Slide Number Placeholder 8"/>
           <p:cNvSpPr>
             <a:spLocks noGrp="1"/>
           </p:cNvSpPr>
@@ -3213,13 +3422,16 @@
             <p:ph type="sldNum" sz="quarter" idx="12"/>
           </p:nvPr>
         </p:nvSpPr>
-        <p:spPr/>
+        <p:spPr bwMode="auto"/>
         <p:txBody>
           <a:bodyPr/>
           <a:lstStyle/>
           <a:p>
+            <a:pPr>
+              <a:defRPr/>
+            </a:pPr>
             <a:fld id="{C1FF6DA9-008F-8B48-92A6-B652298478BF}" type="slidenum">
-              <a:rPr lang="en-US" smtClean="0"/>
+              <a:rPr lang="en-US"/>
               <a:t>‹#›</a:t>
             </a:fld>
             <a:endParaRPr lang="en-US"/>
@@ -3227,11 +3439,6 @@
         </p:txBody>
       </p:sp>
     </p:spTree>
-    <p:extLst>
-      <p:ext uri="{BB962C8B-B14F-4D97-AF65-F5344CB8AC3E}">
-        <p14:creationId xmlns:p14="http://schemas.microsoft.com/office/powerpoint/2010/main" val="990158736"/>
-      </p:ext>
-    </p:extLst>
   </p:cSld>
   <p:clrMapOvr>
     <a:masterClrMapping/>
@@ -3240,7 +3447,7 @@
 </file>
 
 <file path=ppt/slideLayouts/slideLayout6.xml><?xml version="1.0" encoding="utf-8"?>
-<p:sldLayout xmlns:a="http://schemas.openxmlformats.org/drawingml/2006/main" xmlns:r="http://schemas.openxmlformats.org/officeDocument/2006/relationships" xmlns:p="http://schemas.openxmlformats.org/presentationml/2006/main" type="titleOnly" preserve="1">
+<p:sldLayout xmlns:a="http://schemas.openxmlformats.org/drawingml/2006/main" xmlns:r="http://schemas.openxmlformats.org/officeDocument/2006/relationships" xmlns:p="http://schemas.openxmlformats.org/presentationml/2006/main" xmlns:m="http://schemas.openxmlformats.org/officeDocument/2006/math" xmlns:w="http://schemas.openxmlformats.org/wordprocessingml/2006/main" matchingName="" preserve="1" showMasterPhAnim="0" showMasterSp="1" type="titleOnly" userDrawn="1">
   <p:cSld name="Title Only">
     <p:spTree>
       <p:nvGrpSpPr>
@@ -3248,7 +3455,7 @@
         <p:cNvGrpSpPr/>
         <p:nvPr/>
       </p:nvGrpSpPr>
-      <p:grpSpPr>
+      <p:grpSpPr bwMode="auto">
         <a:xfrm>
           <a:off x="0" y="0"/>
           <a:ext cx="0" cy="0"/>
@@ -3258,7 +3465,7 @@
       </p:grpSpPr>
       <p:sp>
         <p:nvSpPr>
-          <p:cNvPr id="2" name="Title 1"/>
+          <p:cNvPr id="1589892643" name="Title 1"/>
           <p:cNvSpPr>
             <a:spLocks noGrp="1"/>
           </p:cNvSpPr>
@@ -3266,13 +3473,16 @@
             <p:ph type="title"/>
           </p:nvPr>
         </p:nvSpPr>
-        <p:spPr/>
+        <p:spPr bwMode="auto"/>
         <p:txBody>
           <a:bodyPr/>
           <a:lstStyle/>
           <a:p>
-            <a:r>
-              <a:rPr lang="en-US" smtClean="0"/>
+            <a:pPr>
+              <a:defRPr/>
+            </a:pPr>
+            <a:r>
+              <a:rPr lang="en-US"/>
               <a:t>Click to edit Master title style</a:t>
             </a:r>
             <a:endParaRPr lang="en-US"/>
@@ -3281,7 +3491,7 @@
       </p:sp>
       <p:sp>
         <p:nvSpPr>
-          <p:cNvPr id="3" name="Date Placeholder 2"/>
+          <p:cNvPr id="747924286" name="Date Placeholder 2"/>
           <p:cNvSpPr>
             <a:spLocks noGrp="1"/>
           </p:cNvSpPr>
@@ -3289,13 +3499,16 @@
             <p:ph type="dt" sz="half" idx="10"/>
           </p:nvPr>
         </p:nvSpPr>
-        <p:spPr/>
+        <p:spPr bwMode="auto"/>
         <p:txBody>
           <a:bodyPr/>
           <a:lstStyle/>
           <a:p>
+            <a:pPr>
+              <a:defRPr/>
+            </a:pPr>
             <a:fld id="{5BCAD085-E8A6-8845-BD4E-CB4CCA059FC4}" type="datetimeFigureOut">
-              <a:rPr lang="en-US" smtClean="0"/>
+              <a:rPr lang="en-US"/>
               <a:t>1/27/13</a:t>
             </a:fld>
             <a:endParaRPr lang="en-US"/>
@@ -3304,7 +3517,7 @@
       </p:sp>
       <p:sp>
         <p:nvSpPr>
-          <p:cNvPr id="4" name="Footer Placeholder 3"/>
+          <p:cNvPr id="1702312958" name="Footer Placeholder 3"/>
           <p:cNvSpPr>
             <a:spLocks noGrp="1"/>
           </p:cNvSpPr>
@@ -3312,18 +3525,21 @@
             <p:ph type="ftr" sz="quarter" idx="11"/>
           </p:nvPr>
         </p:nvSpPr>
-        <p:spPr/>
+        <p:spPr bwMode="auto"/>
         <p:txBody>
           <a:bodyPr/>
           <a:lstStyle/>
           <a:p>
+            <a:pPr>
+              <a:defRPr/>
+            </a:pPr>
             <a:endParaRPr lang="en-US"/>
           </a:p>
         </p:txBody>
       </p:sp>
       <p:sp>
         <p:nvSpPr>
-          <p:cNvPr id="5" name="Slide Number Placeholder 4"/>
+          <p:cNvPr id="1527871738" name="Slide Number Placeholder 4"/>
           <p:cNvSpPr>
             <a:spLocks noGrp="1"/>
           </p:cNvSpPr>
@@ -3331,13 +3547,16 @@
             <p:ph type="sldNum" sz="quarter" idx="12"/>
           </p:nvPr>
         </p:nvSpPr>
-        <p:spPr/>
+        <p:spPr bwMode="auto"/>
         <p:txBody>
           <a:bodyPr/>
           <a:lstStyle/>
           <a:p>
+            <a:pPr>
+              <a:defRPr/>
+            </a:pPr>
             <a:fld id="{C1FF6DA9-008F-8B48-92A6-B652298478BF}" type="slidenum">
-              <a:rPr lang="en-US" smtClean="0"/>
+              <a:rPr lang="en-US"/>
               <a:t>‹#›</a:t>
             </a:fld>
             <a:endParaRPr lang="en-US"/>
@@ -3345,11 +3564,6 @@
         </p:txBody>
       </p:sp>
     </p:spTree>
-    <p:extLst>
-      <p:ext uri="{BB962C8B-B14F-4D97-AF65-F5344CB8AC3E}">
-        <p14:creationId xmlns:p14="http://schemas.microsoft.com/office/powerpoint/2010/main" val="727027711"/>
-      </p:ext>
-    </p:extLst>
   </p:cSld>
   <p:clrMapOvr>
     <a:masterClrMapping/>
@@ -3358,7 +3572,7 @@
 </file>
 
 <file path=ppt/slideLayouts/slideLayout7.xml><?xml version="1.0" encoding="utf-8"?>
-<p:sldLayout xmlns:a="http://schemas.openxmlformats.org/drawingml/2006/main" xmlns:r="http://schemas.openxmlformats.org/officeDocument/2006/relationships" xmlns:p="http://schemas.openxmlformats.org/presentationml/2006/main" type="blank" preserve="1">
+<p:sldLayout xmlns:a="http://schemas.openxmlformats.org/drawingml/2006/main" xmlns:r="http://schemas.openxmlformats.org/officeDocument/2006/relationships" xmlns:p="http://schemas.openxmlformats.org/presentationml/2006/main" xmlns:m="http://schemas.openxmlformats.org/officeDocument/2006/math" xmlns:w="http://schemas.openxmlformats.org/wordprocessingml/2006/main" matchingName="" preserve="1" showMasterPhAnim="0" showMasterSp="1" type="blank" userDrawn="1">
   <p:cSld name="Blank">
     <p:spTree>
       <p:nvGrpSpPr>
@@ -3366,7 +3580,7 @@
         <p:cNvGrpSpPr/>
         <p:nvPr/>
       </p:nvGrpSpPr>
-      <p:grpSpPr>
+      <p:grpSpPr bwMode="auto">
         <a:xfrm>
           <a:off x="0" y="0"/>
           <a:ext cx="0" cy="0"/>
@@ -3376,7 +3590,7 @@
       </p:grpSpPr>
       <p:sp>
         <p:nvSpPr>
-          <p:cNvPr id="2" name="Date Placeholder 1"/>
+          <p:cNvPr id="1737694522" name="Date Placeholder 1"/>
           <p:cNvSpPr>
             <a:spLocks noGrp="1"/>
           </p:cNvSpPr>
@@ -3384,13 +3598,16 @@
             <p:ph type="dt" sz="half" idx="10"/>
           </p:nvPr>
         </p:nvSpPr>
-        <p:spPr/>
+        <p:spPr bwMode="auto"/>
         <p:txBody>
           <a:bodyPr/>
           <a:lstStyle/>
           <a:p>
+            <a:pPr>
+              <a:defRPr/>
+            </a:pPr>
             <a:fld id="{5BCAD085-E8A6-8845-BD4E-CB4CCA059FC4}" type="datetimeFigureOut">
-              <a:rPr lang="en-US" smtClean="0"/>
+              <a:rPr lang="en-US"/>
               <a:t>1/27/13</a:t>
             </a:fld>
             <a:endParaRPr lang="en-US"/>
@@ -3399,7 +3616,7 @@
       </p:sp>
       <p:sp>
         <p:nvSpPr>
-          <p:cNvPr id="3" name="Footer Placeholder 2"/>
+          <p:cNvPr id="121909192" name="Footer Placeholder 2"/>
           <p:cNvSpPr>
             <a:spLocks noGrp="1"/>
           </p:cNvSpPr>
@@ -3407,18 +3624,21 @@
             <p:ph type="ftr" sz="quarter" idx="11"/>
           </p:nvPr>
         </p:nvSpPr>
-        <p:spPr/>
+        <p:spPr bwMode="auto"/>
         <p:txBody>
           <a:bodyPr/>
           <a:lstStyle/>
           <a:p>
+            <a:pPr>
+              <a:defRPr/>
+            </a:pPr>
             <a:endParaRPr lang="en-US"/>
           </a:p>
         </p:txBody>
       </p:sp>
       <p:sp>
         <p:nvSpPr>
-          <p:cNvPr id="4" name="Slide Number Placeholder 3"/>
+          <p:cNvPr id="645730852" name="Slide Number Placeholder 3"/>
           <p:cNvSpPr>
             <a:spLocks noGrp="1"/>
           </p:cNvSpPr>
@@ -3426,13 +3646,16 @@
             <p:ph type="sldNum" sz="quarter" idx="12"/>
           </p:nvPr>
         </p:nvSpPr>
-        <p:spPr/>
+        <p:spPr bwMode="auto"/>
         <p:txBody>
           <a:bodyPr/>
           <a:lstStyle/>
           <a:p>
+            <a:pPr>
+              <a:defRPr/>
+            </a:pPr>
             <a:fld id="{C1FF6DA9-008F-8B48-92A6-B652298478BF}" type="slidenum">
-              <a:rPr lang="en-US" smtClean="0"/>
+              <a:rPr lang="en-US"/>
               <a:t>‹#›</a:t>
             </a:fld>
             <a:endParaRPr lang="en-US"/>
@@ -3440,11 +3663,6 @@
         </p:txBody>
       </p:sp>
     </p:spTree>
-    <p:extLst>
-      <p:ext uri="{BB962C8B-B14F-4D97-AF65-F5344CB8AC3E}">
-        <p14:creationId xmlns:p14="http://schemas.microsoft.com/office/powerpoint/2010/main" val="1212999818"/>
-      </p:ext>
-    </p:extLst>
   </p:cSld>
   <p:clrMapOvr>
     <a:masterClrMapping/>
@@ -3453,7 +3671,7 @@
 </file>
 
 <file path=ppt/slideLayouts/slideLayout8.xml><?xml version="1.0" encoding="utf-8"?>
-<p:sldLayout xmlns:a="http://schemas.openxmlformats.org/drawingml/2006/main" xmlns:r="http://schemas.openxmlformats.org/officeDocument/2006/relationships" xmlns:p="http://schemas.openxmlformats.org/presentationml/2006/main" type="objTx" preserve="1">
+<p:sldLayout xmlns:a="http://schemas.openxmlformats.org/drawingml/2006/main" xmlns:r="http://schemas.openxmlformats.org/officeDocument/2006/relationships" xmlns:p="http://schemas.openxmlformats.org/presentationml/2006/main" xmlns:m="http://schemas.openxmlformats.org/officeDocument/2006/math" xmlns:w="http://schemas.openxmlformats.org/wordprocessingml/2006/main" matchingName="" preserve="1" showMasterPhAnim="0" showMasterSp="1" type="objTx" userDrawn="1">
   <p:cSld name="Content with Caption">
     <p:spTree>
       <p:nvGrpSpPr>
@@ -3461,7 +3679,7 @@
         <p:cNvGrpSpPr/>
         <p:nvPr/>
       </p:nvGrpSpPr>
-      <p:grpSpPr>
+      <p:grpSpPr bwMode="auto">
         <a:xfrm>
           <a:off x="0" y="0"/>
           <a:ext cx="0" cy="0"/>
@@ -3471,7 +3689,7 @@
       </p:grpSpPr>
       <p:sp>
         <p:nvSpPr>
-          <p:cNvPr id="2" name="Title 1"/>
+          <p:cNvPr id="1201684320" name="Title 1"/>
           <p:cNvSpPr>
             <a:spLocks noGrp="1"/>
           </p:cNvSpPr>
@@ -3479,7 +3697,7 @@
             <p:ph type="title"/>
           </p:nvPr>
         </p:nvSpPr>
-        <p:spPr>
+        <p:spPr bwMode="auto">
           <a:xfrm>
             <a:off x="457200" y="273050"/>
             <a:ext cx="3008313" cy="1162050"/>
@@ -3493,8 +3711,11 @@
             </a:lvl1pPr>
           </a:lstStyle>
           <a:p>
-            <a:r>
-              <a:rPr lang="en-US" smtClean="0"/>
+            <a:pPr>
+              <a:defRPr/>
+            </a:pPr>
+            <a:r>
+              <a:rPr lang="en-US"/>
               <a:t>Click to edit Master title style</a:t>
             </a:r>
             <a:endParaRPr lang="en-US"/>
@@ -3503,7 +3724,7 @@
       </p:sp>
       <p:sp>
         <p:nvSpPr>
-          <p:cNvPr id="3" name="Content Placeholder 2"/>
+          <p:cNvPr id="450804860" name="Content Placeholder 2"/>
           <p:cNvSpPr>
             <a:spLocks noGrp="1"/>
           </p:cNvSpPr>
@@ -3511,7 +3732,7 @@
             <p:ph idx="1"/>
           </p:nvPr>
         </p:nvSpPr>
-        <p:spPr>
+        <p:spPr bwMode="auto">
           <a:xfrm>
             <a:off x="3575050" y="273050"/>
             <a:ext cx="5111750" cy="5853113"/>
@@ -3549,37 +3770,51 @@
             </a:lvl9pPr>
           </a:lstStyle>
           <a:p>
-            <a:pPr lvl="0"/>
-            <a:r>
-              <a:rPr lang="en-US" smtClean="0"/>
+            <a:pPr lvl="0">
+              <a:defRPr/>
+            </a:pPr>
+            <a:r>
+              <a:rPr lang="en-US"/>
               <a:t>Click to edit Master text styles</a:t>
             </a:r>
-          </a:p>
-          <a:p>
-            <a:pPr lvl="1"/>
-            <a:r>
-              <a:rPr lang="en-US" smtClean="0"/>
+            <a:endParaRPr/>
+          </a:p>
+          <a:p>
+            <a:pPr lvl="1">
+              <a:defRPr/>
+            </a:pPr>
+            <a:r>
+              <a:rPr lang="en-US"/>
               <a:t>Second level</a:t>
             </a:r>
-          </a:p>
-          <a:p>
-            <a:pPr lvl="2"/>
-            <a:r>
-              <a:rPr lang="en-US" smtClean="0"/>
+            <a:endParaRPr/>
+          </a:p>
+          <a:p>
+            <a:pPr lvl="2">
+              <a:defRPr/>
+            </a:pPr>
+            <a:r>
+              <a:rPr lang="en-US"/>
               <a:t>Third level</a:t>
             </a:r>
-          </a:p>
-          <a:p>
-            <a:pPr lvl="3"/>
-            <a:r>
-              <a:rPr lang="en-US" smtClean="0"/>
+            <a:endParaRPr/>
+          </a:p>
+          <a:p>
+            <a:pPr lvl="3">
+              <a:defRPr/>
+            </a:pPr>
+            <a:r>
+              <a:rPr lang="en-US"/>
               <a:t>Fourth level</a:t>
             </a:r>
-          </a:p>
-          <a:p>
-            <a:pPr lvl="4"/>
-            <a:r>
-              <a:rPr lang="en-US" smtClean="0"/>
+            <a:endParaRPr/>
+          </a:p>
+          <a:p>
+            <a:pPr lvl="4">
+              <a:defRPr/>
+            </a:pPr>
+            <a:r>
+              <a:rPr lang="en-US"/>
               <a:t>Fifth level</a:t>
             </a:r>
             <a:endParaRPr lang="en-US"/>
@@ -3588,7 +3823,7 @@
       </p:sp>
       <p:sp>
         <p:nvSpPr>
-          <p:cNvPr id="4" name="Text Placeholder 3"/>
+          <p:cNvPr id="784591626" name="Text Placeholder 3"/>
           <p:cNvSpPr>
             <a:spLocks noGrp="1"/>
           </p:cNvSpPr>
@@ -3596,7 +3831,7 @@
             <p:ph type="body" sz="half" idx="2"/>
           </p:nvPr>
         </p:nvSpPr>
-        <p:spPr>
+        <p:spPr bwMode="auto">
           <a:xfrm>
             <a:off x="457200" y="1435100"/>
             <a:ext cx="3008313" cy="4691063"/>
@@ -3643,17 +3878,20 @@
             </a:lvl9pPr>
           </a:lstStyle>
           <a:p>
-            <a:pPr lvl="0"/>
-            <a:r>
-              <a:rPr lang="en-US" smtClean="0"/>
+            <a:pPr lvl="0">
+              <a:defRPr/>
+            </a:pPr>
+            <a:r>
+              <a:rPr lang="en-US"/>
               <a:t>Click to edit Master text styles</a:t>
             </a:r>
-          </a:p>
-        </p:txBody>
-      </p:sp>
-      <p:sp>
-        <p:nvSpPr>
-          <p:cNvPr id="5" name="Date Placeholder 4"/>
+            <a:endParaRPr/>
+          </a:p>
+        </p:txBody>
+      </p:sp>
+      <p:sp>
+        <p:nvSpPr>
+          <p:cNvPr id="170726016" name="Date Placeholder 4"/>
           <p:cNvSpPr>
             <a:spLocks noGrp="1"/>
           </p:cNvSpPr>
@@ -3661,13 +3899,16 @@
             <p:ph type="dt" sz="half" idx="10"/>
           </p:nvPr>
         </p:nvSpPr>
-        <p:spPr/>
+        <p:spPr bwMode="auto"/>
         <p:txBody>
           <a:bodyPr/>
           <a:lstStyle/>
           <a:p>
+            <a:pPr>
+              <a:defRPr/>
+            </a:pPr>
             <a:fld id="{5BCAD085-E8A6-8845-BD4E-CB4CCA059FC4}" type="datetimeFigureOut">
-              <a:rPr lang="en-US" smtClean="0"/>
+              <a:rPr lang="en-US"/>
               <a:t>1/27/13</a:t>
             </a:fld>
             <a:endParaRPr lang="en-US"/>
@@ -3676,7 +3917,7 @@
       </p:sp>
       <p:sp>
         <p:nvSpPr>
-          <p:cNvPr id="6" name="Footer Placeholder 5"/>
+          <p:cNvPr id="147925754" name="Footer Placeholder 5"/>
           <p:cNvSpPr>
             <a:spLocks noGrp="1"/>
           </p:cNvSpPr>
@@ -3684,18 +3925,21 @@
             <p:ph type="ftr" sz="quarter" idx="11"/>
           </p:nvPr>
         </p:nvSpPr>
-        <p:spPr/>
+        <p:spPr bwMode="auto"/>
         <p:txBody>
           <a:bodyPr/>
           <a:lstStyle/>
           <a:p>
+            <a:pPr>
+              <a:defRPr/>
+            </a:pPr>
             <a:endParaRPr lang="en-US"/>
           </a:p>
         </p:txBody>
       </p:sp>
       <p:sp>
         <p:nvSpPr>
-          <p:cNvPr id="7" name="Slide Number Placeholder 6"/>
+          <p:cNvPr id="1437195206" name="Slide Number Placeholder 6"/>
           <p:cNvSpPr>
             <a:spLocks noGrp="1"/>
           </p:cNvSpPr>
@@ -3703,13 +3947,16 @@
             <p:ph type="sldNum" sz="quarter" idx="12"/>
           </p:nvPr>
         </p:nvSpPr>
-        <p:spPr/>
+        <p:spPr bwMode="auto"/>
         <p:txBody>
           <a:bodyPr/>
           <a:lstStyle/>
           <a:p>
+            <a:pPr>
+              <a:defRPr/>
+            </a:pPr>
             <a:fld id="{C1FF6DA9-008F-8B48-92A6-B652298478BF}" type="slidenum">
-              <a:rPr lang="en-US" smtClean="0"/>
+              <a:rPr lang="en-US"/>
               <a:t>‹#›</a:t>
             </a:fld>
             <a:endParaRPr lang="en-US"/>
@@ -3717,11 +3964,6 @@
         </p:txBody>
       </p:sp>
     </p:spTree>
-    <p:extLst>
-      <p:ext uri="{BB962C8B-B14F-4D97-AF65-F5344CB8AC3E}">
-        <p14:creationId xmlns:p14="http://schemas.microsoft.com/office/powerpoint/2010/main" val="1840726560"/>
-      </p:ext>
-    </p:extLst>
   </p:cSld>
   <p:clrMapOvr>
     <a:masterClrMapping/>
@@ -3730,7 +3972,7 @@
 </file>
 
 <file path=ppt/slideLayouts/slideLayout9.xml><?xml version="1.0" encoding="utf-8"?>
-<p:sldLayout xmlns:a="http://schemas.openxmlformats.org/drawingml/2006/main" xmlns:r="http://schemas.openxmlformats.org/officeDocument/2006/relationships" xmlns:p="http://schemas.openxmlformats.org/presentationml/2006/main" type="picTx" preserve="1">
+<p:sldLayout xmlns:a="http://schemas.openxmlformats.org/drawingml/2006/main" xmlns:r="http://schemas.openxmlformats.org/officeDocument/2006/relationships" xmlns:p="http://schemas.openxmlformats.org/presentationml/2006/main" xmlns:m="http://schemas.openxmlformats.org/officeDocument/2006/math" xmlns:w="http://schemas.openxmlformats.org/wordprocessingml/2006/main" matchingName="" preserve="1" showMasterPhAnim="0" showMasterSp="1" type="picTx" userDrawn="1">
   <p:cSld name="Picture with Caption">
     <p:spTree>
       <p:nvGrpSpPr>
@@ -3738,7 +3980,7 @@
         <p:cNvGrpSpPr/>
         <p:nvPr/>
       </p:nvGrpSpPr>
-      <p:grpSpPr>
+      <p:grpSpPr bwMode="auto">
         <a:xfrm>
           <a:off x="0" y="0"/>
           <a:ext cx="0" cy="0"/>
@@ -3748,7 +3990,7 @@
       </p:grpSpPr>
       <p:sp>
         <p:nvSpPr>
-          <p:cNvPr id="2" name="Title 1"/>
+          <p:cNvPr id="832851058" name="Title 1"/>
           <p:cNvSpPr>
             <a:spLocks noGrp="1"/>
           </p:cNvSpPr>
@@ -3756,7 +3998,7 @@
             <p:ph type="title"/>
           </p:nvPr>
         </p:nvSpPr>
-        <p:spPr>
+        <p:spPr bwMode="auto">
           <a:xfrm>
             <a:off x="1792288" y="4800600"/>
             <a:ext cx="5486400" cy="566738"/>
@@ -3770,8 +4012,11 @@
             </a:lvl1pPr>
           </a:lstStyle>
           <a:p>
-            <a:r>
-              <a:rPr lang="en-US" smtClean="0"/>
+            <a:pPr>
+              <a:defRPr/>
+            </a:pPr>
+            <a:r>
+              <a:rPr lang="en-US"/>
               <a:t>Click to edit Master title style</a:t>
             </a:r>
             <a:endParaRPr lang="en-US"/>
@@ -3780,7 +4025,7 @@
       </p:sp>
       <p:sp>
         <p:nvSpPr>
-          <p:cNvPr id="3" name="Picture Placeholder 2"/>
+          <p:cNvPr id="2035499080" name="Picture Placeholder 2"/>
           <p:cNvSpPr>
             <a:spLocks noGrp="1"/>
           </p:cNvSpPr>
@@ -3788,7 +4033,7 @@
             <p:ph type="pic" idx="1"/>
           </p:nvPr>
         </p:nvSpPr>
-        <p:spPr>
+        <p:spPr bwMode="auto">
           <a:xfrm>
             <a:off x="1792288" y="612775"/>
             <a:ext cx="5486400" cy="4114800"/>
@@ -3835,13 +4080,16 @@
             </a:lvl9pPr>
           </a:lstStyle>
           <a:p>
+            <a:pPr>
+              <a:defRPr/>
+            </a:pPr>
             <a:endParaRPr lang="en-US"/>
           </a:p>
         </p:txBody>
       </p:sp>
       <p:sp>
         <p:nvSpPr>
-          <p:cNvPr id="4" name="Text Placeholder 3"/>
+          <p:cNvPr id="1234600352" name="Text Placeholder 3"/>
           <p:cNvSpPr>
             <a:spLocks noGrp="1"/>
           </p:cNvSpPr>
@@ -3849,7 +4097,7 @@
             <p:ph type="body" sz="half" idx="2"/>
           </p:nvPr>
         </p:nvSpPr>
-        <p:spPr>
+        <p:spPr bwMode="auto">
           <a:xfrm>
             <a:off x="1792288" y="5367338"/>
             <a:ext cx="5486400" cy="804862"/>
@@ -3896,17 +4144,20 @@
             </a:lvl9pPr>
           </a:lstStyle>
           <a:p>
-            <a:pPr lvl="0"/>
-            <a:r>
-              <a:rPr lang="en-US" smtClean="0"/>
+            <a:pPr lvl="0">
+              <a:defRPr/>
+            </a:pPr>
+            <a:r>
+              <a:rPr lang="en-US"/>
               <a:t>Click to edit Master text styles</a:t>
             </a:r>
-          </a:p>
-        </p:txBody>
-      </p:sp>
-      <p:sp>
-        <p:nvSpPr>
-          <p:cNvPr id="5" name="Date Placeholder 4"/>
+            <a:endParaRPr/>
+          </a:p>
+        </p:txBody>
+      </p:sp>
+      <p:sp>
+        <p:nvSpPr>
+          <p:cNvPr id="1468066557" name="Date Placeholder 4"/>
           <p:cNvSpPr>
             <a:spLocks noGrp="1"/>
           </p:cNvSpPr>
@@ -3914,13 +4165,16 @@
             <p:ph type="dt" sz="half" idx="10"/>
           </p:nvPr>
         </p:nvSpPr>
-        <p:spPr/>
+        <p:spPr bwMode="auto"/>
         <p:txBody>
           <a:bodyPr/>
           <a:lstStyle/>
           <a:p>
+            <a:pPr>
+              <a:defRPr/>
+            </a:pPr>
             <a:fld id="{5BCAD085-E8A6-8845-BD4E-CB4CCA059FC4}" type="datetimeFigureOut">
-              <a:rPr lang="en-US" smtClean="0"/>
+              <a:rPr lang="en-US"/>
               <a:t>1/27/13</a:t>
             </a:fld>
             <a:endParaRPr lang="en-US"/>
@@ -3929,7 +4183,7 @@
       </p:sp>
       <p:sp>
         <p:nvSpPr>
-          <p:cNvPr id="6" name="Footer Placeholder 5"/>
+          <p:cNvPr id="467840998" name="Footer Placeholder 5"/>
           <p:cNvSpPr>
             <a:spLocks noGrp="1"/>
           </p:cNvSpPr>
@@ -3937,18 +4191,21 @@
             <p:ph type="ftr" sz="quarter" idx="11"/>
           </p:nvPr>
         </p:nvSpPr>
-        <p:spPr/>
+        <p:spPr bwMode="auto"/>
         <p:txBody>
           <a:bodyPr/>
           <a:lstStyle/>
           <a:p>
+            <a:pPr>
+              <a:defRPr/>
+            </a:pPr>
             <a:endParaRPr lang="en-US"/>
           </a:p>
         </p:txBody>
       </p:sp>
       <p:sp>
         <p:nvSpPr>
-          <p:cNvPr id="7" name="Slide Number Placeholder 6"/>
+          <p:cNvPr id="2101727804" name="Slide Number Placeholder 6"/>
           <p:cNvSpPr>
             <a:spLocks noGrp="1"/>
           </p:cNvSpPr>
@@ -3956,13 +4213,16 @@
             <p:ph type="sldNum" sz="quarter" idx="12"/>
           </p:nvPr>
         </p:nvSpPr>
-        <p:spPr/>
+        <p:spPr bwMode="auto"/>
         <p:txBody>
           <a:bodyPr/>
           <a:lstStyle/>
           <a:p>
+            <a:pPr>
+              <a:defRPr/>
+            </a:pPr>
             <a:fld id="{C1FF6DA9-008F-8B48-92A6-B652298478BF}" type="slidenum">
-              <a:rPr lang="en-US" smtClean="0"/>
+              <a:rPr lang="en-US"/>
               <a:t>‹#›</a:t>
             </a:fld>
             <a:endParaRPr lang="en-US"/>
@@ -3970,11 +4230,6 @@
         </p:txBody>
       </p:sp>
     </p:spTree>
-    <p:extLst>
-      <p:ext uri="{BB962C8B-B14F-4D97-AF65-F5344CB8AC3E}">
-        <p14:creationId xmlns:p14="http://schemas.microsoft.com/office/powerpoint/2010/main" val="3889236939"/>
-      </p:ext>
-    </p:extLst>
   </p:cSld>
   <p:clrMapOvr>
     <a:masterClrMapping/>
@@ -3983,8 +4238,8 @@
 </file>
 
 <file path=ppt/slideMasters/slideMaster1.xml><?xml version="1.0" encoding="utf-8"?>
-<p:sldMaster xmlns:a="http://schemas.openxmlformats.org/drawingml/2006/main" xmlns:r="http://schemas.openxmlformats.org/officeDocument/2006/relationships" xmlns:p="http://schemas.openxmlformats.org/presentationml/2006/main">
-  <p:cSld>
+<p:sldMaster xmlns:a="http://schemas.openxmlformats.org/drawingml/2006/main" xmlns:r="http://schemas.openxmlformats.org/officeDocument/2006/relationships" xmlns:p="http://schemas.openxmlformats.org/presentationml/2006/main" xmlns:m="http://schemas.openxmlformats.org/officeDocument/2006/math" xmlns:w="http://schemas.openxmlformats.org/wordprocessingml/2006/main" preserve="0">
+  <p:cSld name="">
     <p:bg>
       <p:bgRef idx="1001">
         <a:schemeClr val="bg1"/>
@@ -3996,7 +4251,7 @@
         <p:cNvGrpSpPr/>
         <p:nvPr/>
       </p:nvGrpSpPr>
-      <p:grpSpPr>
+      <p:grpSpPr bwMode="auto">
         <a:xfrm>
           <a:off x="0" y="0"/>
           <a:ext cx="0" cy="0"/>
@@ -4006,7 +4261,7 @@
       </p:grpSpPr>
       <p:sp>
         <p:nvSpPr>
-          <p:cNvPr id="2" name="Title Placeholder 1"/>
+          <p:cNvPr id="1741471048" name="Title Placeholder 1"/>
           <p:cNvSpPr>
             <a:spLocks noGrp="1"/>
           </p:cNvSpPr>
@@ -4014,7 +4269,7 @@
             <p:ph type="title"/>
           </p:nvPr>
         </p:nvSpPr>
-        <p:spPr>
+        <p:spPr bwMode="auto">
           <a:xfrm>
             <a:off x="457200" y="274638"/>
             <a:ext cx="8229600" cy="1143000"/>
@@ -4029,8 +4284,11 @@
           </a:bodyPr>
           <a:lstStyle/>
           <a:p>
-            <a:r>
-              <a:rPr lang="en-US" smtClean="0"/>
+            <a:pPr>
+              <a:defRPr/>
+            </a:pPr>
+            <a:r>
+              <a:rPr lang="en-US"/>
               <a:t>Click to edit Master title style</a:t>
             </a:r>
             <a:endParaRPr lang="en-US"/>
@@ -4039,7 +4297,7 @@
       </p:sp>
       <p:sp>
         <p:nvSpPr>
-          <p:cNvPr id="3" name="Text Placeholder 2"/>
+          <p:cNvPr id="714725463" name="Text Placeholder 2"/>
           <p:cNvSpPr>
             <a:spLocks noGrp="1"/>
           </p:cNvSpPr>
@@ -4047,7 +4305,7 @@
             <p:ph type="body" idx="1"/>
           </p:nvPr>
         </p:nvSpPr>
-        <p:spPr>
+        <p:spPr bwMode="auto">
           <a:xfrm>
             <a:off x="457200" y="1600200"/>
             <a:ext cx="8229600" cy="4525963"/>
@@ -4062,37 +4320,51 @@
           </a:bodyPr>
           <a:lstStyle/>
           <a:p>
-            <a:pPr lvl="0"/>
-            <a:r>
-              <a:rPr lang="en-US" smtClean="0"/>
+            <a:pPr lvl="0">
+              <a:defRPr/>
+            </a:pPr>
+            <a:r>
+              <a:rPr lang="en-US"/>
               <a:t>Click to edit Master text styles</a:t>
             </a:r>
-          </a:p>
-          <a:p>
-            <a:pPr lvl="1"/>
-            <a:r>
-              <a:rPr lang="en-US" smtClean="0"/>
+            <a:endParaRPr/>
+          </a:p>
+          <a:p>
+            <a:pPr lvl="1">
+              <a:defRPr/>
+            </a:pPr>
+            <a:r>
+              <a:rPr lang="en-US"/>
               <a:t>Second level</a:t>
             </a:r>
-          </a:p>
-          <a:p>
-            <a:pPr lvl="2"/>
-            <a:r>
-              <a:rPr lang="en-US" smtClean="0"/>
+            <a:endParaRPr/>
+          </a:p>
+          <a:p>
+            <a:pPr lvl="2">
+              <a:defRPr/>
+            </a:pPr>
+            <a:r>
+              <a:rPr lang="en-US"/>
               <a:t>Third level</a:t>
             </a:r>
-          </a:p>
-          <a:p>
-            <a:pPr lvl="3"/>
-            <a:r>
-              <a:rPr lang="en-US" smtClean="0"/>
+            <a:endParaRPr/>
+          </a:p>
+          <a:p>
+            <a:pPr lvl="3">
+              <a:defRPr/>
+            </a:pPr>
+            <a:r>
+              <a:rPr lang="en-US"/>
               <a:t>Fourth level</a:t>
             </a:r>
-          </a:p>
-          <a:p>
-            <a:pPr lvl="4"/>
-            <a:r>
-              <a:rPr lang="en-US" smtClean="0"/>
+            <a:endParaRPr/>
+          </a:p>
+          <a:p>
+            <a:pPr lvl="4">
+              <a:defRPr/>
+            </a:pPr>
+            <a:r>
+              <a:rPr lang="en-US"/>
               <a:t>Fifth level</a:t>
             </a:r>
             <a:endParaRPr lang="en-US"/>
@@ -4101,7 +4373,7 @@
       </p:sp>
       <p:sp>
         <p:nvSpPr>
-          <p:cNvPr id="4" name="Date Placeholder 3"/>
+          <p:cNvPr id="1655992133" name="Date Placeholder 3"/>
           <p:cNvSpPr>
             <a:spLocks noGrp="1"/>
           </p:cNvSpPr>
@@ -4109,7 +4381,7 @@
             <p:ph type="dt" sz="half" idx="2"/>
           </p:nvPr>
         </p:nvSpPr>
-        <p:spPr>
+        <p:spPr bwMode="auto">
           <a:xfrm>
             <a:off x="457200" y="6356350"/>
             <a:ext cx="2133600" cy="365125"/>
@@ -4132,8 +4404,11 @@
             </a:lvl1pPr>
           </a:lstStyle>
           <a:p>
+            <a:pPr>
+              <a:defRPr/>
+            </a:pPr>
             <a:fld id="{5BCAD085-E8A6-8845-BD4E-CB4CCA059FC4}" type="datetimeFigureOut">
-              <a:rPr lang="en-US" smtClean="0"/>
+              <a:rPr lang="en-US"/>
               <a:t>1/27/13</a:t>
             </a:fld>
             <a:endParaRPr lang="en-US"/>
@@ -4142,7 +4417,7 @@
       </p:sp>
       <p:sp>
         <p:nvSpPr>
-          <p:cNvPr id="5" name="Footer Placeholder 4"/>
+          <p:cNvPr id="1565671498" name="Footer Placeholder 4"/>
           <p:cNvSpPr>
             <a:spLocks noGrp="1"/>
           </p:cNvSpPr>
@@ -4150,7 +4425,7 @@
             <p:ph type="ftr" sz="quarter" idx="3"/>
           </p:nvPr>
         </p:nvSpPr>
-        <p:spPr>
+        <p:spPr bwMode="auto">
           <a:xfrm>
             <a:off x="3124200" y="6356350"/>
             <a:ext cx="2895600" cy="365125"/>
@@ -4173,13 +4448,16 @@
             </a:lvl1pPr>
           </a:lstStyle>
           <a:p>
+            <a:pPr>
+              <a:defRPr/>
+            </a:pPr>
             <a:endParaRPr lang="en-US"/>
           </a:p>
         </p:txBody>
       </p:sp>
       <p:sp>
         <p:nvSpPr>
-          <p:cNvPr id="6" name="Slide Number Placeholder 5"/>
+          <p:cNvPr id="1517187588" name="Slide Number Placeholder 5"/>
           <p:cNvSpPr>
             <a:spLocks noGrp="1"/>
           </p:cNvSpPr>
@@ -4187,7 +4465,7 @@
             <p:ph type="sldNum" sz="quarter" idx="4"/>
           </p:nvPr>
         </p:nvSpPr>
-        <p:spPr>
+        <p:spPr bwMode="auto">
           <a:xfrm>
             <a:off x="6553200" y="6356350"/>
             <a:ext cx="2133600" cy="365125"/>
@@ -4210,8 +4488,11 @@
             </a:lvl1pPr>
           </a:lstStyle>
           <a:p>
+            <a:pPr>
+              <a:defRPr/>
+            </a:pPr>
             <a:fld id="{C1FF6DA9-008F-8B48-92A6-B652298478BF}" type="slidenum">
-              <a:rPr lang="en-US" smtClean="0"/>
+              <a:rPr lang="en-US"/>
               <a:t>‹#›</a:t>
             </a:fld>
             <a:endParaRPr lang="en-US"/>
@@ -4219,11 +4500,6 @@
         </p:txBody>
       </p:sp>
     </p:spTree>
-    <p:extLst>
-      <p:ext uri="{BB962C8B-B14F-4D97-AF65-F5344CB8AC3E}">
-        <p14:creationId xmlns:p14="http://schemas.microsoft.com/office/powerpoint/2010/main" val="2209977519"/>
-      </p:ext>
-    </p:extLst>
   </p:cSld>
   <p:clrMap bg1="lt1" tx1="dk1" bg2="lt2" tx2="dk2" accent1="accent1" accent2="accent2" accent3="accent3" accent4="accent4" accent5="accent5" accent6="accent6" hlink="hlink" folHlink="folHlink"/>
   <p:sldLayoutIdLst>
@@ -4241,12 +4517,12 @@
   </p:sldLayoutIdLst>
   <p:txStyles>
     <p:titleStyle>
-      <a:lvl1pPr algn="ctr" defTabSz="457200" rtl="0" eaLnBrk="1" latinLnBrk="0" hangingPunct="1">
+      <a:lvl1pPr algn="ctr" defTabSz="457200" rtl="0">
         <a:spcBef>
-          <a:spcPct val="0"/>
+          <a:spcPts val="0"/>
         </a:spcBef>
         <a:buNone/>
-        <a:defRPr sz="4400" kern="1200">
+        <a:defRPr sz="4400">
           <a:solidFill>
             <a:schemeClr val="tx1"/>
           </a:solidFill>
@@ -4257,13 +4533,13 @@
       </a:lvl1pPr>
     </p:titleStyle>
     <p:bodyStyle>
-      <a:lvl1pPr marL="342900" indent="-342900" algn="l" defTabSz="457200" rtl="0" eaLnBrk="1" latinLnBrk="0" hangingPunct="1">
+      <a:lvl1pPr marL="342900" indent="-342900" algn="l" defTabSz="457200" rtl="0">
         <a:spcBef>
-          <a:spcPct val="20000"/>
+          <a:spcPts val="0"/>
         </a:spcBef>
         <a:buFont typeface="Arial"/>
         <a:buChar char="•"/>
-        <a:defRPr sz="3200" kern="1200">
+        <a:defRPr sz="3200">
           <a:solidFill>
             <a:schemeClr val="tx1"/>
           </a:solidFill>
@@ -4272,13 +4548,13 @@
           <a:cs typeface="+mn-cs"/>
         </a:defRPr>
       </a:lvl1pPr>
-      <a:lvl2pPr marL="742950" indent="-285750" algn="l" defTabSz="457200" rtl="0" eaLnBrk="1" latinLnBrk="0" hangingPunct="1">
+      <a:lvl2pPr marL="742950" indent="-285750" algn="l" defTabSz="457200" rtl="0">
         <a:spcBef>
-          <a:spcPct val="20000"/>
+          <a:spcPts val="0"/>
         </a:spcBef>
         <a:buFont typeface="Arial"/>
         <a:buChar char="–"/>
-        <a:defRPr sz="2800" kern="1200">
+        <a:defRPr sz="2800">
           <a:solidFill>
             <a:schemeClr val="tx1"/>
           </a:solidFill>
@@ -4287,13 +4563,13 @@
           <a:cs typeface="+mn-cs"/>
         </a:defRPr>
       </a:lvl2pPr>
-      <a:lvl3pPr marL="1143000" indent="-228600" algn="l" defTabSz="457200" rtl="0" eaLnBrk="1" latinLnBrk="0" hangingPunct="1">
+      <a:lvl3pPr marL="1143000" indent="-228600" algn="l" defTabSz="457200" rtl="0">
         <a:spcBef>
-          <a:spcPct val="20000"/>
+          <a:spcPts val="0"/>
         </a:spcBef>
         <a:buFont typeface="Arial"/>
         <a:buChar char="•"/>
-        <a:defRPr sz="2400" kern="1200">
+        <a:defRPr sz="2400">
           <a:solidFill>
             <a:schemeClr val="tx1"/>
           </a:solidFill>
@@ -4302,13 +4578,13 @@
           <a:cs typeface="+mn-cs"/>
         </a:defRPr>
       </a:lvl3pPr>
-      <a:lvl4pPr marL="1600200" indent="-228600" algn="l" defTabSz="457200" rtl="0" eaLnBrk="1" latinLnBrk="0" hangingPunct="1">
+      <a:lvl4pPr marL="1600200" indent="-228600" algn="l" defTabSz="457200" rtl="0">
         <a:spcBef>
-          <a:spcPct val="20000"/>
+          <a:spcPts val="0"/>
         </a:spcBef>
         <a:buFont typeface="Arial"/>
         <a:buChar char="–"/>
-        <a:defRPr sz="2000" kern="1200">
+        <a:defRPr sz="2000">
           <a:solidFill>
             <a:schemeClr val="tx1"/>
           </a:solidFill>
@@ -4317,13 +4593,13 @@
           <a:cs typeface="+mn-cs"/>
         </a:defRPr>
       </a:lvl4pPr>
-      <a:lvl5pPr marL="2057400" indent="-228600" algn="l" defTabSz="457200" rtl="0" eaLnBrk="1" latinLnBrk="0" hangingPunct="1">
+      <a:lvl5pPr marL="2057400" indent="-228600" algn="l" defTabSz="457200" rtl="0">
         <a:spcBef>
-          <a:spcPct val="20000"/>
+          <a:spcPts val="0"/>
         </a:spcBef>
         <a:buFont typeface="Arial"/>
         <a:buChar char="»"/>
-        <a:defRPr sz="2000" kern="1200">
+        <a:defRPr sz="2000">
           <a:solidFill>
             <a:schemeClr val="tx1"/>
           </a:solidFill>
@@ -4332,13 +4608,13 @@
           <a:cs typeface="+mn-cs"/>
         </a:defRPr>
       </a:lvl5pPr>
-      <a:lvl6pPr marL="2514600" indent="-228600" algn="l" defTabSz="457200" rtl="0" eaLnBrk="1" latinLnBrk="0" hangingPunct="1">
+      <a:lvl6pPr marL="2514600" indent="-228600" algn="l" defTabSz="457200" rtl="0">
         <a:spcBef>
-          <a:spcPct val="20000"/>
+          <a:spcPts val="0"/>
         </a:spcBef>
         <a:buFont typeface="Arial"/>
         <a:buChar char="•"/>
-        <a:defRPr sz="2000" kern="1200">
+        <a:defRPr sz="2000">
           <a:solidFill>
             <a:schemeClr val="tx1"/>
           </a:solidFill>
@@ -4347,13 +4623,13 @@
           <a:cs typeface="+mn-cs"/>
         </a:defRPr>
       </a:lvl6pPr>
-      <a:lvl7pPr marL="2971800" indent="-228600" algn="l" defTabSz="457200" rtl="0" eaLnBrk="1" latinLnBrk="0" hangingPunct="1">
+      <a:lvl7pPr marL="2971800" indent="-228600" algn="l" defTabSz="457200" rtl="0">
         <a:spcBef>
-          <a:spcPct val="20000"/>
+          <a:spcPts val="0"/>
         </a:spcBef>
         <a:buFont typeface="Arial"/>
         <a:buChar char="•"/>
-        <a:defRPr sz="2000" kern="1200">
+        <a:defRPr sz="2000">
           <a:solidFill>
             <a:schemeClr val="tx1"/>
           </a:solidFill>
@@ -4362,13 +4638,13 @@
           <a:cs typeface="+mn-cs"/>
         </a:defRPr>
       </a:lvl7pPr>
-      <a:lvl8pPr marL="3429000" indent="-228600" algn="l" defTabSz="457200" rtl="0" eaLnBrk="1" latinLnBrk="0" hangingPunct="1">
+      <a:lvl8pPr marL="3429000" indent="-228600" algn="l" defTabSz="457200" rtl="0">
         <a:spcBef>
-          <a:spcPct val="20000"/>
+          <a:spcPts val="0"/>
         </a:spcBef>
         <a:buFont typeface="Arial"/>
         <a:buChar char="•"/>
-        <a:defRPr sz="2000" kern="1200">
+        <a:defRPr sz="2000">
           <a:solidFill>
             <a:schemeClr val="tx1"/>
           </a:solidFill>
@@ -4377,13 +4653,13 @@
           <a:cs typeface="+mn-cs"/>
         </a:defRPr>
       </a:lvl8pPr>
-      <a:lvl9pPr marL="3886200" indent="-228600" algn="l" defTabSz="457200" rtl="0" eaLnBrk="1" latinLnBrk="0" hangingPunct="1">
+      <a:lvl9pPr marL="3886200" indent="-228600" algn="l" defTabSz="457200" rtl="0">
         <a:spcBef>
-          <a:spcPct val="20000"/>
+          <a:spcPts val="0"/>
         </a:spcBef>
         <a:buFont typeface="Arial"/>
         <a:buChar char="•"/>
-        <a:defRPr sz="2000" kern="1200">
+        <a:defRPr sz="2000">
           <a:solidFill>
             <a:schemeClr val="tx1"/>
           </a:solidFill>
@@ -4397,8 +4673,8 @@
       <a:defPPr>
         <a:defRPr lang="en-US"/>
       </a:defPPr>
-      <a:lvl1pPr marL="0" algn="l" defTabSz="457200" rtl="0" eaLnBrk="1" latinLnBrk="0" hangingPunct="1">
-        <a:defRPr sz="1800" kern="1200">
+      <a:lvl1pPr marL="0" algn="l" defTabSz="457200" rtl="0">
+        <a:defRPr sz="1800">
           <a:solidFill>
             <a:schemeClr val="tx1"/>
           </a:solidFill>
@@ -4407,8 +4683,8 @@
           <a:cs typeface="+mn-cs"/>
         </a:defRPr>
       </a:lvl1pPr>
-      <a:lvl2pPr marL="457200" algn="l" defTabSz="457200" rtl="0" eaLnBrk="1" latinLnBrk="0" hangingPunct="1">
-        <a:defRPr sz="1800" kern="1200">
+      <a:lvl2pPr marL="457200" algn="l" defTabSz="457200" rtl="0">
+        <a:defRPr sz="1800">
           <a:solidFill>
             <a:schemeClr val="tx1"/>
           </a:solidFill>
@@ -4417,8 +4693,8 @@
           <a:cs typeface="+mn-cs"/>
         </a:defRPr>
       </a:lvl2pPr>
-      <a:lvl3pPr marL="914400" algn="l" defTabSz="457200" rtl="0" eaLnBrk="1" latinLnBrk="0" hangingPunct="1">
-        <a:defRPr sz="1800" kern="1200">
+      <a:lvl3pPr marL="914400" algn="l" defTabSz="457200" rtl="0">
+        <a:defRPr sz="1800">
           <a:solidFill>
             <a:schemeClr val="tx1"/>
           </a:solidFill>
@@ -4427,8 +4703,8 @@
           <a:cs typeface="+mn-cs"/>
         </a:defRPr>
       </a:lvl3pPr>
-      <a:lvl4pPr marL="1371600" algn="l" defTabSz="457200" rtl="0" eaLnBrk="1" latinLnBrk="0" hangingPunct="1">
-        <a:defRPr sz="1800" kern="1200">
+      <a:lvl4pPr marL="1371600" algn="l" defTabSz="457200" rtl="0">
+        <a:defRPr sz="1800">
           <a:solidFill>
             <a:schemeClr val="tx1"/>
           </a:solidFill>
@@ -4437,8 +4713,8 @@
           <a:cs typeface="+mn-cs"/>
         </a:defRPr>
       </a:lvl4pPr>
-      <a:lvl5pPr marL="1828800" algn="l" defTabSz="457200" rtl="0" eaLnBrk="1" latinLnBrk="0" hangingPunct="1">
-        <a:defRPr sz="1800" kern="1200">
+      <a:lvl5pPr marL="1828800" algn="l" defTabSz="457200" rtl="0">
+        <a:defRPr sz="1800">
           <a:solidFill>
             <a:schemeClr val="tx1"/>
           </a:solidFill>
@@ -4447,8 +4723,8 @@
           <a:cs typeface="+mn-cs"/>
         </a:defRPr>
       </a:lvl5pPr>
-      <a:lvl6pPr marL="2286000" algn="l" defTabSz="457200" rtl="0" eaLnBrk="1" latinLnBrk="0" hangingPunct="1">
-        <a:defRPr sz="1800" kern="1200">
+      <a:lvl6pPr marL="2286000" algn="l" defTabSz="457200" rtl="0">
+        <a:defRPr sz="1800">
           <a:solidFill>
             <a:schemeClr val="tx1"/>
           </a:solidFill>
@@ -4457,8 +4733,8 @@
           <a:cs typeface="+mn-cs"/>
         </a:defRPr>
       </a:lvl6pPr>
-      <a:lvl7pPr marL="2743200" algn="l" defTabSz="457200" rtl="0" eaLnBrk="1" latinLnBrk="0" hangingPunct="1">
-        <a:defRPr sz="1800" kern="1200">
+      <a:lvl7pPr marL="2743200" algn="l" defTabSz="457200" rtl="0">
+        <a:defRPr sz="1800">
           <a:solidFill>
             <a:schemeClr val="tx1"/>
           </a:solidFill>
@@ -4467,8 +4743,8 @@
           <a:cs typeface="+mn-cs"/>
         </a:defRPr>
       </a:lvl7pPr>
-      <a:lvl8pPr marL="3200400" algn="l" defTabSz="457200" rtl="0" eaLnBrk="1" latinLnBrk="0" hangingPunct="1">
-        <a:defRPr sz="1800" kern="1200">
+      <a:lvl8pPr marL="3200400" algn="l" defTabSz="457200" rtl="0">
+        <a:defRPr sz="1800">
           <a:solidFill>
             <a:schemeClr val="tx1"/>
           </a:solidFill>
@@ -4477,8 +4753,8 @@
           <a:cs typeface="+mn-cs"/>
         </a:defRPr>
       </a:lvl8pPr>
-      <a:lvl9pPr marL="3657600" algn="l" defTabSz="457200" rtl="0" eaLnBrk="1" latinLnBrk="0" hangingPunct="1">
-        <a:defRPr sz="1800" kern="1200">
+      <a:lvl9pPr marL="3657600" algn="l" defTabSz="457200" rtl="0">
+        <a:defRPr sz="1800">
           <a:solidFill>
             <a:schemeClr val="tx1"/>
           </a:solidFill>
@@ -4493,22 +4769,29 @@
 </file>
 
 <file path=ppt/slides/slide1.xml><?xml version="1.0" encoding="utf-8"?>
-<p:sld xmlns:a="http://schemas.openxmlformats.org/drawingml/2006/main" xmlns:p="http://schemas.openxmlformats.org/presentationml/2006/main" xmlns:r="http://schemas.openxmlformats.org/officeDocument/2006/relationships">
-  <p:cSld>
+<p:sld xmlns:a="http://schemas.openxmlformats.org/drawingml/2006/main" xmlns:r="http://schemas.openxmlformats.org/officeDocument/2006/relationships" xmlns:p="http://schemas.openxmlformats.org/presentationml/2006/main" xmlns:m="http://schemas.openxmlformats.org/officeDocument/2006/math" xmlns:w="http://schemas.openxmlformats.org/wordprocessingml/2006/main" xmlns:mc="http://schemas.openxmlformats.org/markup-compatibility/2006" showMasterPhAnim="0" showMasterSp="1" show="1">
+  <p:cSld name="">
     <p:spTree>
       <p:nvGrpSpPr>
         <p:cNvPr id="1" name=""/>
         <p:cNvGrpSpPr/>
         <p:nvPr/>
       </p:nvGrpSpPr>
-      <p:grpSpPr/>
-      <p:sp>
-        <p:nvSpPr>
-          <p:cNvPr id="2" name="Rectangle 1"/>
+      <p:grpSpPr bwMode="auto">
+        <a:xfrm>
+          <a:off x="0" y="0"/>
+          <a:ext cx="0" cy="0"/>
+          <a:chOff x="0" y="0"/>
+          <a:chExt cx="0" cy="0"/>
+        </a:xfrm>
+      </p:grpSpPr>
+      <p:sp>
+        <p:nvSpPr>
+          <p:cNvPr id="1685451284" name="Rectangle 1"/>
           <p:cNvSpPr/>
           <p:nvPr/>
         </p:nvSpPr>
-        <p:spPr>
+        <p:spPr bwMode="auto">
           <a:xfrm>
             <a:off x="0" y="0"/>
             <a:ext cx="12191695" cy="6858000"/>
@@ -4542,17 +4825,20 @@
           <a:bodyPr rtlCol="0" anchor="ctr"/>
           <a:lstStyle/>
           <a:p>
-            <a:pPr algn="ctr"/>
-          </a:p>
-        </p:txBody>
-      </p:sp>
-      <p:sp>
-        <p:nvSpPr>
-          <p:cNvPr id="3" name="TextBox 2"/>
+            <a:pPr algn="ctr">
+              <a:defRPr/>
+            </a:pPr>
+            <a:endParaRPr/>
+          </a:p>
+        </p:txBody>
+      </p:sp>
+      <p:sp>
+        <p:nvSpPr>
+          <p:cNvPr id="643502746" name="TextBox 2"/>
           <p:cNvSpPr txBox="1"/>
           <p:nvPr/>
         </p:nvSpPr>
-        <p:spPr>
+        <p:spPr bwMode="auto">
           <a:xfrm>
             <a:off x="10789920" y="6053328"/>
             <a:ext cx="1097280" cy="457200"/>
@@ -4577,21 +4863,23 @@
               </a:defRPr>
             </a:pPr>
             <a:r>
+              <a:rPr/>
               <a:t>1</a:t>
             </a:r>
-          </a:p>
-        </p:txBody>
-      </p:sp>
-      <p:sp>
-        <p:nvSpPr>
-          <p:cNvPr id="4" name="TextBox 3"/>
+            <a:endParaRPr/>
+          </a:p>
+        </p:txBody>
+      </p:sp>
+      <p:sp>
+        <p:nvSpPr>
+          <p:cNvPr id="993943487" name="TextBox 3"/>
           <p:cNvSpPr txBox="1"/>
           <p:nvPr/>
         </p:nvSpPr>
-        <p:spPr>
+        <p:spPr bwMode="auto">
           <a:xfrm>
             <a:off x="914400" y="1554480"/>
-            <a:ext cx="10332720" cy="3840480"/>
+            <a:ext cx="10351439" cy="1473559"/>
           </a:xfrm>
           <a:prstGeom prst="rect">
             <a:avLst/>
@@ -4616,8 +4904,10 @@
               </a:defRPr>
             </a:pPr>
             <a:r>
+              <a:rPr/>
               <a:t>Feature Selection Techniques</a:t>
             </a:r>
+            <a:endParaRPr/>
           </a:p>
           <a:p>
             <a:pPr>
@@ -4632,72 +4922,17 @@
               </a:defRPr>
             </a:pPr>
             <a:r>
-              <a:t>اختيار الميزات — Data Mining (CS602)</a:t>
-            </a:r>
-          </a:p>
-          <a:p>
-            <a:pPr>
-              <a:spcAft>
-                <a:spcPts val="1000"/>
-              </a:spcAft>
-              <a:defRPr sz="1800">
-                <a:solidFill>
-                  <a:srgbClr val="475569"/>
-                </a:solidFill>
-                <a:latin typeface="Segoe UI"/>
-              </a:defRPr>
-            </a:pPr>
-            <a:r>
-              <a:t>Candidate: Master of Computer Science Student</a:t>
-            </a:r>
-          </a:p>
-          <a:p>
-            <a:pPr>
-              <a:spcAft>
-                <a:spcPts val="1000"/>
-              </a:spcAft>
-              <a:defRPr sz="1800">
-                <a:solidFill>
-                  <a:srgbClr val="475569"/>
-                </a:solidFill>
-                <a:latin typeface="Segoe UI"/>
-              </a:defRPr>
-            </a:pPr>
-            <a:r>
-              <a:t>Instructor: Asst. Prof. Dr. Ahmed Shakir Abd Al-Rida</a:t>
-            </a:r>
-          </a:p>
-          <a:p>
-            <a:pPr>
-              <a:spcAft>
-                <a:spcPts val="1000"/>
-              </a:spcAft>
-              <a:defRPr sz="1800">
-                <a:solidFill>
-                  <a:srgbClr val="475569"/>
-                </a:solidFill>
-                <a:latin typeface="Segoe UI"/>
-              </a:defRPr>
-            </a:pPr>
-            <a:r>
-              <a:t>Institution: College of Computer Science &amp; IT — University of Wasit</a:t>
-            </a:r>
-          </a:p>
-          <a:p>
-            <a:pPr>
-              <a:spcAft>
-                <a:spcPts val="1000"/>
-              </a:spcAft>
-              <a:defRPr sz="1800">
-                <a:solidFill>
-                  <a:srgbClr val="475569"/>
-                </a:solidFill>
-                <a:latin typeface="Segoe UI"/>
-              </a:defRPr>
-            </a:pPr>
-            <a:r>
-              <a:t>Date: September 2026</a:t>
-            </a:r>
+              <a:rPr/>
+              <a:t>Aboalhasan Abbas </a:t>
+            </a:r>
+            <a:br>
+              <a:rPr/>
+            </a:br>
+            <a:r>
+              <a:rPr/>
+              <a:t>College of Computer Science &amp; IT — University of Wasit</a:t>
+            </a:r>
+            <a:endParaRPr/>
           </a:p>
         </p:txBody>
       </p:sp>
@@ -4706,26 +4941,41 @@
   <p:clrMapOvr>
     <a:masterClrMapping/>
   </p:clrMapOvr>
+  <mc:AlternateContent xmlns:mc="http://schemas.openxmlformats.org/markup-compatibility/2006">
+    <mc:Choice xmlns:p159="http://schemas.microsoft.com/office/powerpoint/2015/09/main" xmlns:p14="http://schemas.microsoft.com/office/powerpoint/2010/main" Requires="p159">
+      <p:transition p14:dur="500" advClick="1"/>
+    </mc:Choice>
+    <mc:Fallback>
+      <p:transition advClick="1"/>
+    </mc:Fallback>
+  </mc:AlternateContent>
 </p:sld>
 </file>
 
 <file path=ppt/slides/slide10.xml><?xml version="1.0" encoding="utf-8"?>
-<p:sld xmlns:a="http://schemas.openxmlformats.org/drawingml/2006/main" xmlns:p="http://schemas.openxmlformats.org/presentationml/2006/main" xmlns:r="http://schemas.openxmlformats.org/officeDocument/2006/relationships">
-  <p:cSld>
+<p:sld xmlns:a="http://schemas.openxmlformats.org/drawingml/2006/main" xmlns:r="http://schemas.openxmlformats.org/officeDocument/2006/relationships" xmlns:p="http://schemas.openxmlformats.org/presentationml/2006/main" xmlns:m="http://schemas.openxmlformats.org/officeDocument/2006/math" xmlns:w="http://schemas.openxmlformats.org/wordprocessingml/2006/main" xmlns:mc="http://schemas.openxmlformats.org/markup-compatibility/2006" showMasterPhAnim="0" showMasterSp="1" show="1">
+  <p:cSld name="">
     <p:spTree>
       <p:nvGrpSpPr>
         <p:cNvPr id="1" name=""/>
         <p:cNvGrpSpPr/>
         <p:nvPr/>
       </p:nvGrpSpPr>
-      <p:grpSpPr/>
-      <p:sp>
-        <p:nvSpPr>
-          <p:cNvPr id="2" name="Rectangle 1"/>
+      <p:grpSpPr bwMode="auto">
+        <a:xfrm>
+          <a:off x="0" y="0"/>
+          <a:ext cx="0" cy="0"/>
+          <a:chOff x="0" y="0"/>
+          <a:chExt cx="0" cy="0"/>
+        </a:xfrm>
+      </p:grpSpPr>
+      <p:sp>
+        <p:nvSpPr>
+          <p:cNvPr id="755719573" name="Rectangle 1"/>
           <p:cNvSpPr/>
           <p:nvPr/>
         </p:nvSpPr>
-        <p:spPr>
+        <p:spPr bwMode="auto">
           <a:xfrm>
             <a:off x="0" y="0"/>
             <a:ext cx="12191695" cy="6858000"/>
@@ -4759,17 +5009,20 @@
           <a:bodyPr rtlCol="0" anchor="ctr"/>
           <a:lstStyle/>
           <a:p>
-            <a:pPr algn="ctr"/>
-          </a:p>
-        </p:txBody>
-      </p:sp>
-      <p:sp>
-        <p:nvSpPr>
-          <p:cNvPr id="3" name="TextBox 2"/>
+            <a:pPr algn="ctr">
+              <a:defRPr/>
+            </a:pPr>
+            <a:endParaRPr/>
+          </a:p>
+        </p:txBody>
+      </p:sp>
+      <p:sp>
+        <p:nvSpPr>
+          <p:cNvPr id="489489992" name="TextBox 2"/>
           <p:cNvSpPr txBox="1"/>
           <p:nvPr/>
         </p:nvSpPr>
-        <p:spPr>
+        <p:spPr bwMode="auto">
           <a:xfrm>
             <a:off x="10789920" y="6053328"/>
             <a:ext cx="1097280" cy="457200"/>
@@ -4794,18 +5047,20 @@
               </a:defRPr>
             </a:pPr>
             <a:r>
+              <a:rPr/>
               <a:t>10</a:t>
             </a:r>
-          </a:p>
-        </p:txBody>
-      </p:sp>
-      <p:sp>
-        <p:nvSpPr>
-          <p:cNvPr id="4" name="TextBox 3"/>
+            <a:endParaRPr/>
+          </a:p>
+        </p:txBody>
+      </p:sp>
+      <p:sp>
+        <p:nvSpPr>
+          <p:cNvPr id="1386629337" name="TextBox 3"/>
           <p:cNvSpPr txBox="1"/>
           <p:nvPr/>
         </p:nvSpPr>
-        <p:spPr>
+        <p:spPr bwMode="auto">
           <a:xfrm>
             <a:off x="731520" y="457200"/>
             <a:ext cx="10698480" cy="960120"/>
@@ -4830,20 +5085,22 @@
               </a:defRPr>
             </a:pPr>
             <a:r>
+              <a:rPr/>
               <a:t>Who computes the score? That single question defines three families.</a:t>
             </a:r>
-          </a:p>
-        </p:txBody>
-      </p:sp>
-      <p:sp>
-        <p:nvSpPr>
-          <p:cNvPr id="5" name="TextBox 4"/>
+            <a:endParaRPr/>
+          </a:p>
+        </p:txBody>
+      </p:sp>
+      <p:sp>
+        <p:nvSpPr>
+          <p:cNvPr id="137061520" name="TextBox 4"/>
           <p:cNvSpPr txBox="1"/>
           <p:nvPr/>
         </p:nvSpPr>
-        <p:spPr>
-          <a:xfrm>
-            <a:off x="731520" y="1508760"/>
+        <p:spPr bwMode="auto">
+          <a:xfrm>
+            <a:off x="731520" y="1508759"/>
             <a:ext cx="5394960" cy="4526280"/>
           </a:xfrm>
           <a:prstGeom prst="rect">
@@ -4869,8 +5126,10 @@
               </a:defRPr>
             </a:pPr>
             <a:r>
+              <a:rPr/>
               <a:t>•  Filter: a fixed mathematical criterion — no classifier, cheap, model-agnostic.</a:t>
             </a:r>
+            <a:endParaRPr/>
           </a:p>
           <a:p>
             <a:pPr>
@@ -4885,8 +5144,10 @@
               </a:defRPr>
             </a:pPr>
             <a:r>
+              <a:rPr/>
               <a:t>•  Wrapper: the classifier's own accuracy judges each subset — expensive, model-tied.</a:t>
             </a:r>
+            <a:endParaRPr/>
           </a:p>
           <a:p>
             <a:pPr>
@@ -4901,26 +5162,26 @@
               </a:defRPr>
             </a:pPr>
             <a:r>
+              <a:rPr/>
               <a:t>•  Embedded: the model reveals the features while training — e.g. small weights, Lasso, RFE.</a:t>
             </a:r>
+            <a:endParaRPr/>
           </a:p>
         </p:txBody>
       </p:sp>
       <p:pic>
         <p:nvPicPr>
-          <p:cNvPr id="6" name="Picture 5" descr="web_fs_three_models.png"/>
+          <p:cNvPr id="1038760518" name="Picture 5" descr="web_fs_three_models.png"/>
           <p:cNvPicPr>
             <a:picLocks noChangeAspect="1"/>
           </p:cNvPicPr>
           <p:nvPr/>
         </p:nvPicPr>
-        <p:blipFill>
+        <p:blipFill rotWithShape="1">
           <a:blip r:embed="rId3"/>
-          <a:stretch>
-            <a:fillRect/>
-          </a:stretch>
+          <a:stretch/>
         </p:blipFill>
-        <p:spPr>
+        <p:spPr bwMode="auto">
           <a:xfrm>
             <a:off x="6400800" y="1748550"/>
             <a:ext cx="5029200" cy="4046699"/>
@@ -4932,11 +5193,11 @@
       </p:pic>
       <p:sp>
         <p:nvSpPr>
-          <p:cNvPr id="7" name="TextBox 6"/>
+          <p:cNvPr id="766942841" name="TextBox 6"/>
           <p:cNvSpPr txBox="1"/>
           <p:nvPr/>
         </p:nvSpPr>
-        <p:spPr>
+        <p:spPr bwMode="auto">
           <a:xfrm>
             <a:off x="6400800" y="5724144"/>
             <a:ext cx="5029200" cy="310896"/>
@@ -4961,8 +5222,10 @@
               </a:defRPr>
             </a:pPr>
             <a:r>
+              <a:rPr/>
               <a:t>Filter, wrapper and embedded selection models</a:t>
             </a:r>
+            <a:endParaRPr/>
           </a:p>
         </p:txBody>
       </p:sp>
@@ -4971,26 +5234,41 @@
   <p:clrMapOvr>
     <a:masterClrMapping/>
   </p:clrMapOvr>
+  <mc:AlternateContent xmlns:mc="http://schemas.openxmlformats.org/markup-compatibility/2006">
+    <mc:Choice xmlns:p159="http://schemas.microsoft.com/office/powerpoint/2015/09/main" xmlns:p14="http://schemas.microsoft.com/office/powerpoint/2010/main" Requires="p159">
+      <p:transition p14:dur="500" advClick="1"/>
+    </mc:Choice>
+    <mc:Fallback>
+      <p:transition advClick="1"/>
+    </mc:Fallback>
+  </mc:AlternateContent>
 </p:sld>
 </file>
 
 <file path=ppt/slides/slide11.xml><?xml version="1.0" encoding="utf-8"?>
-<p:sld xmlns:a="http://schemas.openxmlformats.org/drawingml/2006/main" xmlns:p="http://schemas.openxmlformats.org/presentationml/2006/main" xmlns:r="http://schemas.openxmlformats.org/officeDocument/2006/relationships">
-  <p:cSld>
+<p:sld xmlns:a="http://schemas.openxmlformats.org/drawingml/2006/main" xmlns:r="http://schemas.openxmlformats.org/officeDocument/2006/relationships" xmlns:p="http://schemas.openxmlformats.org/presentationml/2006/main" xmlns:m="http://schemas.openxmlformats.org/officeDocument/2006/math" xmlns:w="http://schemas.openxmlformats.org/wordprocessingml/2006/main" xmlns:mc="http://schemas.openxmlformats.org/markup-compatibility/2006" showMasterPhAnim="0" showMasterSp="1" show="1">
+  <p:cSld name="">
     <p:spTree>
       <p:nvGrpSpPr>
         <p:cNvPr id="1" name=""/>
         <p:cNvGrpSpPr/>
         <p:nvPr/>
       </p:nvGrpSpPr>
-      <p:grpSpPr/>
-      <p:sp>
-        <p:nvSpPr>
-          <p:cNvPr id="2" name="Rectangle 1"/>
+      <p:grpSpPr bwMode="auto">
+        <a:xfrm>
+          <a:off x="0" y="0"/>
+          <a:ext cx="0" cy="0"/>
+          <a:chOff x="0" y="0"/>
+          <a:chExt cx="0" cy="0"/>
+        </a:xfrm>
+      </p:grpSpPr>
+      <p:sp>
+        <p:nvSpPr>
+          <p:cNvPr id="1823415420" name="Rectangle 1"/>
           <p:cNvSpPr/>
           <p:nvPr/>
         </p:nvSpPr>
-        <p:spPr>
+        <p:spPr bwMode="auto">
           <a:xfrm>
             <a:off x="0" y="0"/>
             <a:ext cx="12191695" cy="6858000"/>
@@ -5024,17 +5302,20 @@
           <a:bodyPr rtlCol="0" anchor="ctr"/>
           <a:lstStyle/>
           <a:p>
-            <a:pPr algn="ctr"/>
-          </a:p>
-        </p:txBody>
-      </p:sp>
-      <p:sp>
-        <p:nvSpPr>
-          <p:cNvPr id="3" name="TextBox 2"/>
+            <a:pPr algn="ctr">
+              <a:defRPr/>
+            </a:pPr>
+            <a:endParaRPr/>
+          </a:p>
+        </p:txBody>
+      </p:sp>
+      <p:sp>
+        <p:nvSpPr>
+          <p:cNvPr id="2021241971" name="TextBox 2"/>
           <p:cNvSpPr txBox="1"/>
           <p:nvPr/>
         </p:nvSpPr>
-        <p:spPr>
+        <p:spPr bwMode="auto">
           <a:xfrm>
             <a:off x="10789920" y="6053328"/>
             <a:ext cx="1097280" cy="457200"/>
@@ -5059,18 +5340,20 @@
               </a:defRPr>
             </a:pPr>
             <a:r>
+              <a:rPr/>
               <a:t>11</a:t>
             </a:r>
-          </a:p>
-        </p:txBody>
-      </p:sp>
-      <p:sp>
-        <p:nvSpPr>
-          <p:cNvPr id="4" name="TextBox 3"/>
+            <a:endParaRPr/>
+          </a:p>
+        </p:txBody>
+      </p:sp>
+      <p:sp>
+        <p:nvSpPr>
+          <p:cNvPr id="1479645081" name="TextBox 3"/>
           <p:cNvSpPr txBox="1"/>
           <p:nvPr/>
         </p:nvSpPr>
-        <p:spPr>
+        <p:spPr bwMode="auto">
           <a:xfrm>
             <a:off x="731520" y="457200"/>
             <a:ext cx="10698480" cy="960120"/>
@@ -5095,20 +5378,22 @@
               </a:defRPr>
             </a:pPr>
             <a:r>
+              <a:rPr/>
               <a:t>Without labels, the score must measure clustering tendency instead.</a:t>
             </a:r>
-          </a:p>
-        </p:txBody>
-      </p:sp>
-      <p:sp>
-        <p:nvSpPr>
-          <p:cNvPr id="5" name="TextBox 4"/>
+            <a:endParaRPr/>
+          </a:p>
+        </p:txBody>
+      </p:sp>
+      <p:sp>
+        <p:nvSpPr>
+          <p:cNvPr id="544630342" name="TextBox 4"/>
           <p:cNvSpPr txBox="1"/>
           <p:nvPr/>
         </p:nvSpPr>
-        <p:spPr>
-          <a:xfrm>
-            <a:off x="731520" y="1508760"/>
+        <p:spPr bwMode="auto">
+          <a:xfrm>
+            <a:off x="731520" y="1508759"/>
             <a:ext cx="5394960" cy="4526280"/>
           </a:xfrm>
           <a:prstGeom prst="rect">
@@ -5134,8 +5419,10 @@
               </a:defRPr>
             </a:pPr>
             <a:r>
+              <a:rPr/>
               <a:t>•  Uniform data: one bell-shaped distance distribution. Clustered data: two peaks.</a:t>
             </a:r>
+            <a:endParaRPr/>
           </a:p>
           <a:p>
             <a:pPr>
@@ -5150,8 +5437,10 @@
               </a:defRPr>
             </a:pPr>
             <a:r>
+              <a:rPr/>
               <a:t>•  Pick the subset that minimises the distance-distribution entropy.</a:t>
             </a:r>
+            <a:endParaRPr/>
           </a:p>
           <a:p>
             <a:pPr>
@@ -5166,26 +5455,26 @@
               </a:defRPr>
             </a:pPr>
             <a:r>
+              <a:rPr/>
               <a:t>•  Named measures: term strength, classification-based relevance, Hopkins statistic.</a:t>
             </a:r>
+            <a:endParaRPr/>
           </a:p>
         </p:txBody>
       </p:sp>
       <p:pic>
         <p:nvPicPr>
-          <p:cNvPr id="6" name="Picture 5" descr="fig_AG_6-1_distance_entropy.png"/>
+          <p:cNvPr id="1058906241" name="Picture 5" descr="fig_AG_6-1_distance_entropy.png"/>
           <p:cNvPicPr>
             <a:picLocks noChangeAspect="1"/>
           </p:cNvPicPr>
           <p:nvPr/>
         </p:nvPicPr>
-        <p:blipFill>
+        <p:blipFill rotWithShape="1">
           <a:blip r:embed="rId3"/>
-          <a:stretch>
-            <a:fillRect/>
-          </a:stretch>
+          <a:stretch/>
         </p:blipFill>
-        <p:spPr>
+        <p:spPr bwMode="auto">
           <a:xfrm>
             <a:off x="6400800" y="1648262"/>
             <a:ext cx="5029200" cy="4247274"/>
@@ -5197,11 +5486,11 @@
       </p:pic>
       <p:sp>
         <p:nvSpPr>
-          <p:cNvPr id="7" name="TextBox 6"/>
+          <p:cNvPr id="1257727312" name="TextBox 6"/>
           <p:cNvSpPr txBox="1"/>
           <p:nvPr/>
         </p:nvSpPr>
-        <p:spPr>
+        <p:spPr bwMode="auto">
           <a:xfrm>
             <a:off x="6400800" y="5724144"/>
             <a:ext cx="5029200" cy="310896"/>
@@ -5226,8 +5515,10 @@
               </a:defRPr>
             </a:pPr>
             <a:r>
+              <a:rPr/>
               <a:t>Uniform vs clustered data and their distance distributions (Aggarwal, p.156)</a:t>
             </a:r>
+            <a:endParaRPr/>
           </a:p>
         </p:txBody>
       </p:sp>
@@ -5236,26 +5527,41 @@
   <p:clrMapOvr>
     <a:masterClrMapping/>
   </p:clrMapOvr>
+  <mc:AlternateContent xmlns:mc="http://schemas.openxmlformats.org/markup-compatibility/2006">
+    <mc:Choice xmlns:p159="http://schemas.microsoft.com/office/powerpoint/2015/09/main" xmlns:p14="http://schemas.microsoft.com/office/powerpoint/2010/main" Requires="p159">
+      <p:transition p14:dur="500" advClick="1"/>
+    </mc:Choice>
+    <mc:Fallback>
+      <p:transition advClick="1"/>
+    </mc:Fallback>
+  </mc:AlternateContent>
 </p:sld>
 </file>
 
 <file path=ppt/slides/slide12.xml><?xml version="1.0" encoding="utf-8"?>
-<p:sld xmlns:a="http://schemas.openxmlformats.org/drawingml/2006/main" xmlns:p="http://schemas.openxmlformats.org/presentationml/2006/main" xmlns:r="http://schemas.openxmlformats.org/officeDocument/2006/relationships">
-  <p:cSld>
+<p:sld xmlns:a="http://schemas.openxmlformats.org/drawingml/2006/main" xmlns:r="http://schemas.openxmlformats.org/officeDocument/2006/relationships" xmlns:p="http://schemas.openxmlformats.org/presentationml/2006/main" xmlns:m="http://schemas.openxmlformats.org/officeDocument/2006/math" xmlns:w="http://schemas.openxmlformats.org/wordprocessingml/2006/main" xmlns:mc="http://schemas.openxmlformats.org/markup-compatibility/2006" showMasterPhAnim="0" showMasterSp="1" show="1">
+  <p:cSld name="">
     <p:spTree>
       <p:nvGrpSpPr>
         <p:cNvPr id="1" name=""/>
         <p:cNvGrpSpPr/>
         <p:nvPr/>
       </p:nvGrpSpPr>
-      <p:grpSpPr/>
-      <p:sp>
-        <p:nvSpPr>
-          <p:cNvPr id="2" name="Rectangle 1"/>
+      <p:grpSpPr bwMode="auto">
+        <a:xfrm>
+          <a:off x="0" y="0"/>
+          <a:ext cx="0" cy="0"/>
+          <a:chOff x="0" y="0"/>
+          <a:chExt cx="0" cy="0"/>
+        </a:xfrm>
+      </p:grpSpPr>
+      <p:sp>
+        <p:nvSpPr>
+          <p:cNvPr id="804712687" name="Rectangle 1"/>
           <p:cNvSpPr/>
           <p:nvPr/>
         </p:nvSpPr>
-        <p:spPr>
+        <p:spPr bwMode="auto">
           <a:xfrm>
             <a:off x="0" y="0"/>
             <a:ext cx="12191695" cy="6858000"/>
@@ -5289,17 +5595,20 @@
           <a:bodyPr rtlCol="0" anchor="ctr"/>
           <a:lstStyle/>
           <a:p>
-            <a:pPr algn="ctr"/>
-          </a:p>
-        </p:txBody>
-      </p:sp>
-      <p:sp>
-        <p:nvSpPr>
-          <p:cNvPr id="3" name="TextBox 2"/>
+            <a:pPr algn="ctr">
+              <a:defRPr/>
+            </a:pPr>
+            <a:endParaRPr/>
+          </a:p>
+        </p:txBody>
+      </p:sp>
+      <p:sp>
+        <p:nvSpPr>
+          <p:cNvPr id="945752626" name="TextBox 2"/>
           <p:cNvSpPr txBox="1"/>
           <p:nvPr/>
         </p:nvSpPr>
-        <p:spPr>
+        <p:spPr bwMode="auto">
           <a:xfrm>
             <a:off x="10789920" y="6053328"/>
             <a:ext cx="1097280" cy="457200"/>
@@ -5324,18 +5633,20 @@
               </a:defRPr>
             </a:pPr>
             <a:r>
+              <a:rPr/>
               <a:t>12</a:t>
             </a:r>
-          </a:p>
-        </p:txBody>
-      </p:sp>
-      <p:sp>
-        <p:nvSpPr>
-          <p:cNvPr id="4" name="TextBox 3"/>
+            <a:endParaRPr/>
+          </a:p>
+        </p:txBody>
+      </p:sp>
+      <p:sp>
+        <p:nvSpPr>
+          <p:cNvPr id="422025365" name="TextBox 3"/>
           <p:cNvSpPr txBox="1"/>
           <p:nvPr/>
         </p:nvSpPr>
-        <p:spPr>
+        <p:spPr bwMode="auto">
           <a:xfrm>
             <a:off x="731520" y="457200"/>
             <a:ext cx="10698480" cy="960120"/>
@@ -5360,18 +5671,20 @@
               </a:defRPr>
             </a:pPr>
             <a:r>
+              <a:rPr/>
               <a:t>Sometimes the right feature does not exist yet — so build it.</a:t>
             </a:r>
-          </a:p>
-        </p:txBody>
-      </p:sp>
-      <p:sp>
-        <p:nvSpPr>
-          <p:cNvPr id="5" name="TextBox 4"/>
+            <a:endParaRPr/>
+          </a:p>
+        </p:txBody>
+      </p:sp>
+      <p:sp>
+        <p:nvSpPr>
+          <p:cNvPr id="999785601" name="TextBox 4"/>
           <p:cNvSpPr txBox="1"/>
           <p:nvPr/>
         </p:nvSpPr>
-        <p:spPr>
+        <p:spPr bwMode="auto">
           <a:xfrm>
             <a:off x="731520" y="1463040"/>
             <a:ext cx="10698480" cy="4572000"/>
@@ -5399,8 +5712,10 @@
               </a:defRPr>
             </a:pPr>
             <a:r>
+              <a:rPr/>
               <a:t>“ "In some cases, we may want to create new attributes based on others. Such attribute construction can help improve accuracy and understanding of structure in high-dimensional data." — Han, Kamber &amp; Pei, p.105 ”</a:t>
             </a:r>
+            <a:endParaRPr/>
           </a:p>
           <a:p>
             <a:pPr>
@@ -5415,8 +5730,10 @@
               </a:defRPr>
             </a:pPr>
             <a:r>
+              <a:rPr/>
               <a:t>•  Example: area = height x width — a new column on the same axes.</a:t>
             </a:r>
+            <a:endParaRPr/>
           </a:p>
           <a:p>
             <a:pPr>
@@ -5431,8 +5748,10 @@
               </a:defRPr>
             </a:pPr>
             <a:r>
+              <a:rPr/>
               <a:t>•  Selection removes; construction adds a column; extraction changes the axes.</a:t>
             </a:r>
+            <a:endParaRPr/>
           </a:p>
         </p:txBody>
       </p:sp>
@@ -5441,26 +5760,41 @@
   <p:clrMapOvr>
     <a:masterClrMapping/>
   </p:clrMapOvr>
+  <mc:AlternateContent xmlns:mc="http://schemas.openxmlformats.org/markup-compatibility/2006">
+    <mc:Choice xmlns:p159="http://schemas.microsoft.com/office/powerpoint/2015/09/main" xmlns:p14="http://schemas.microsoft.com/office/powerpoint/2010/main" Requires="p159">
+      <p:transition p14:dur="500" advClick="1"/>
+    </mc:Choice>
+    <mc:Fallback>
+      <p:transition advClick="1"/>
+    </mc:Fallback>
+  </mc:AlternateContent>
 </p:sld>
 </file>
 
 <file path=ppt/slides/slide13.xml><?xml version="1.0" encoding="utf-8"?>
-<p:sld xmlns:a="http://schemas.openxmlformats.org/drawingml/2006/main" xmlns:p="http://schemas.openxmlformats.org/presentationml/2006/main" xmlns:r="http://schemas.openxmlformats.org/officeDocument/2006/relationships">
-  <p:cSld>
+<p:sld xmlns:a="http://schemas.openxmlformats.org/drawingml/2006/main" xmlns:r="http://schemas.openxmlformats.org/officeDocument/2006/relationships" xmlns:p="http://schemas.openxmlformats.org/presentationml/2006/main" xmlns:m="http://schemas.openxmlformats.org/officeDocument/2006/math" xmlns:w="http://schemas.openxmlformats.org/wordprocessingml/2006/main" xmlns:mc="http://schemas.openxmlformats.org/markup-compatibility/2006" showMasterPhAnim="0" showMasterSp="1" show="1">
+  <p:cSld name="">
     <p:spTree>
       <p:nvGrpSpPr>
         <p:cNvPr id="1" name=""/>
         <p:cNvGrpSpPr/>
         <p:nvPr/>
       </p:nvGrpSpPr>
-      <p:grpSpPr/>
-      <p:sp>
-        <p:nvSpPr>
-          <p:cNvPr id="2" name="Rectangle 1"/>
+      <p:grpSpPr bwMode="auto">
+        <a:xfrm>
+          <a:off x="0" y="0"/>
+          <a:ext cx="0" cy="0"/>
+          <a:chOff x="0" y="0"/>
+          <a:chExt cx="0" cy="0"/>
+        </a:xfrm>
+      </p:grpSpPr>
+      <p:sp>
+        <p:nvSpPr>
+          <p:cNvPr id="2036186646" name="Rectangle 1"/>
           <p:cNvSpPr/>
           <p:nvPr/>
         </p:nvSpPr>
-        <p:spPr>
+        <p:spPr bwMode="auto">
           <a:xfrm>
             <a:off x="0" y="0"/>
             <a:ext cx="12191695" cy="6858000"/>
@@ -5494,17 +5828,20 @@
           <a:bodyPr rtlCol="0" anchor="ctr"/>
           <a:lstStyle/>
           <a:p>
-            <a:pPr algn="ctr"/>
-          </a:p>
-        </p:txBody>
-      </p:sp>
-      <p:sp>
-        <p:nvSpPr>
-          <p:cNvPr id="3" name="TextBox 2"/>
+            <a:pPr algn="ctr">
+              <a:defRPr/>
+            </a:pPr>
+            <a:endParaRPr/>
+          </a:p>
+        </p:txBody>
+      </p:sp>
+      <p:sp>
+        <p:nvSpPr>
+          <p:cNvPr id="73288798" name="TextBox 2"/>
           <p:cNvSpPr txBox="1"/>
           <p:nvPr/>
         </p:nvSpPr>
-        <p:spPr>
+        <p:spPr bwMode="auto">
           <a:xfrm>
             <a:off x="10789920" y="6053328"/>
             <a:ext cx="1097280" cy="457200"/>
@@ -5529,18 +5866,20 @@
               </a:defRPr>
             </a:pPr>
             <a:r>
+              <a:rPr/>
               <a:t>13</a:t>
             </a:r>
-          </a:p>
-        </p:txBody>
-      </p:sp>
-      <p:sp>
-        <p:nvSpPr>
-          <p:cNvPr id="4" name="TextBox 3"/>
+            <a:endParaRPr/>
+          </a:p>
+        </p:txBody>
+      </p:sp>
+      <p:sp>
+        <p:nvSpPr>
+          <p:cNvPr id="147945358" name="TextBox 3"/>
           <p:cNvSpPr txBox="1"/>
           <p:nvPr/>
         </p:nvSpPr>
-        <p:spPr>
+        <p:spPr bwMode="auto">
           <a:xfrm>
             <a:off x="731520" y="457200"/>
             <a:ext cx="10698480" cy="960120"/>
@@ -5565,18 +5904,20 @@
               </a:defRPr>
             </a:pPr>
             <a:r>
+              <a:rPr/>
               <a:t>Five traps decide this topic in the exam.</a:t>
             </a:r>
-          </a:p>
-        </p:txBody>
-      </p:sp>
-      <p:sp>
-        <p:nvSpPr>
-          <p:cNvPr id="5" name="TextBox 4"/>
+            <a:endParaRPr/>
+          </a:p>
+        </p:txBody>
+      </p:sp>
+      <p:sp>
+        <p:nvSpPr>
+          <p:cNvPr id="680434348" name="TextBox 4"/>
           <p:cNvSpPr txBox="1"/>
           <p:nvPr/>
         </p:nvSpPr>
-        <p:spPr>
+        <p:spPr bwMode="auto">
           <a:xfrm>
             <a:off x="731520" y="1463040"/>
             <a:ext cx="10698480" cy="4572000"/>
@@ -5604,8 +5945,10 @@
               </a:defRPr>
             </a:pPr>
             <a:r>
+              <a:rPr/>
               <a:t>•  Selection chooses existing; extraction and construction create.</a:t>
             </a:r>
+            <a:endParaRPr/>
           </a:p>
           <a:p>
             <a:pPr>
@@ -5620,8 +5963,10 @@
               </a:defRPr>
             </a:pPr>
             <a:r>
+              <a:rPr/>
               <a:t>•  Gini and entropy: lower is better. Fisher score: higher is better.</a:t>
             </a:r>
+            <a:endParaRPr/>
           </a:p>
           <a:p>
             <a:pPr>
@@ -5636,8 +5981,10 @@
               </a:defRPr>
             </a:pPr>
             <a:r>
+              <a:rPr/>
               <a:t>•  Filter is model-free; wrapper is model-tied.</a:t>
             </a:r>
+            <a:endParaRPr/>
           </a:p>
           <a:p>
             <a:pPr>
@@ -5652,8 +5999,10 @@
               </a:defRPr>
             </a:pPr>
             <a:r>
+              <a:rPr/>
               <a:t>•  Fisher score selects a feature; Fisher's discriminant builds a direction.</a:t>
             </a:r>
+            <a:endParaRPr/>
           </a:p>
           <a:p>
             <a:pPr>
@@ -5668,8 +6017,10 @@
               </a:defRPr>
             </a:pPr>
             <a:r>
+              <a:rPr/>
               <a:t>•  Hopkins near 1 means clustered; 0.5 means uniform.</a:t>
             </a:r>
+            <a:endParaRPr/>
           </a:p>
         </p:txBody>
       </p:sp>
@@ -5678,26 +6029,41 @@
   <p:clrMapOvr>
     <a:masterClrMapping/>
   </p:clrMapOvr>
+  <mc:AlternateContent xmlns:mc="http://schemas.openxmlformats.org/markup-compatibility/2006">
+    <mc:Choice xmlns:p159="http://schemas.microsoft.com/office/powerpoint/2015/09/main" xmlns:p14="http://schemas.microsoft.com/office/powerpoint/2010/main" Requires="p159">
+      <p:transition p14:dur="500" advClick="1"/>
+    </mc:Choice>
+    <mc:Fallback>
+      <p:transition advClick="1"/>
+    </mc:Fallback>
+  </mc:AlternateContent>
 </p:sld>
 </file>
 
 <file path=ppt/slides/slide14.xml><?xml version="1.0" encoding="utf-8"?>
-<p:sld xmlns:a="http://schemas.openxmlformats.org/drawingml/2006/main" xmlns:p="http://schemas.openxmlformats.org/presentationml/2006/main" xmlns:r="http://schemas.openxmlformats.org/officeDocument/2006/relationships">
-  <p:cSld>
+<p:sld xmlns:a="http://schemas.openxmlformats.org/drawingml/2006/main" xmlns:r="http://schemas.openxmlformats.org/officeDocument/2006/relationships" xmlns:p="http://schemas.openxmlformats.org/presentationml/2006/main" xmlns:m="http://schemas.openxmlformats.org/officeDocument/2006/math" xmlns:w="http://schemas.openxmlformats.org/wordprocessingml/2006/main" xmlns:mc="http://schemas.openxmlformats.org/markup-compatibility/2006" showMasterPhAnim="0" showMasterSp="1" show="1">
+  <p:cSld name="">
     <p:spTree>
       <p:nvGrpSpPr>
         <p:cNvPr id="1" name=""/>
         <p:cNvGrpSpPr/>
         <p:nvPr/>
       </p:nvGrpSpPr>
-      <p:grpSpPr/>
-      <p:sp>
-        <p:nvSpPr>
-          <p:cNvPr id="2" name="Rectangle 1"/>
+      <p:grpSpPr bwMode="auto">
+        <a:xfrm>
+          <a:off x="0" y="0"/>
+          <a:ext cx="0" cy="0"/>
+          <a:chOff x="0" y="0"/>
+          <a:chExt cx="0" cy="0"/>
+        </a:xfrm>
+      </p:grpSpPr>
+      <p:sp>
+        <p:nvSpPr>
+          <p:cNvPr id="1264636363" name="Rectangle 1"/>
           <p:cNvSpPr/>
           <p:nvPr/>
         </p:nvSpPr>
-        <p:spPr>
+        <p:spPr bwMode="auto">
           <a:xfrm>
             <a:off x="0" y="0"/>
             <a:ext cx="12191695" cy="6858000"/>
@@ -5731,17 +6097,20 @@
           <a:bodyPr rtlCol="0" anchor="ctr"/>
           <a:lstStyle/>
           <a:p>
-            <a:pPr algn="ctr"/>
-          </a:p>
-        </p:txBody>
-      </p:sp>
-      <p:sp>
-        <p:nvSpPr>
-          <p:cNvPr id="3" name="TextBox 2"/>
+            <a:pPr algn="ctr">
+              <a:defRPr/>
+            </a:pPr>
+            <a:endParaRPr/>
+          </a:p>
+        </p:txBody>
+      </p:sp>
+      <p:sp>
+        <p:nvSpPr>
+          <p:cNvPr id="1782180195" name="TextBox 2"/>
           <p:cNvSpPr txBox="1"/>
           <p:nvPr/>
         </p:nvSpPr>
-        <p:spPr>
+        <p:spPr bwMode="auto">
           <a:xfrm>
             <a:off x="10789920" y="6053328"/>
             <a:ext cx="1097280" cy="457200"/>
@@ -5766,18 +6135,20 @@
               </a:defRPr>
             </a:pPr>
             <a:r>
+              <a:rPr/>
               <a:t>14</a:t>
             </a:r>
-          </a:p>
-        </p:txBody>
-      </p:sp>
-      <p:sp>
-        <p:nvSpPr>
-          <p:cNvPr id="4" name="TextBox 3"/>
+            <a:endParaRPr/>
+          </a:p>
+        </p:txBody>
+      </p:sp>
+      <p:sp>
+        <p:nvSpPr>
+          <p:cNvPr id="45232189" name="TextBox 3"/>
           <p:cNvSpPr txBox="1"/>
           <p:nvPr/>
         </p:nvSpPr>
-        <p:spPr>
+        <p:spPr bwMode="auto">
           <a:xfrm>
             <a:off x="731520" y="457200"/>
             <a:ext cx="10698480" cy="960120"/>
@@ -5802,18 +6173,20 @@
               </a:defRPr>
             </a:pPr>
             <a:r>
+              <a:rPr/>
               <a:t>The whole topic in five lines.</a:t>
             </a:r>
-          </a:p>
-        </p:txBody>
-      </p:sp>
-      <p:sp>
-        <p:nvSpPr>
-          <p:cNvPr id="5" name="TextBox 4"/>
+            <a:endParaRPr/>
+          </a:p>
+        </p:txBody>
+      </p:sp>
+      <p:sp>
+        <p:nvSpPr>
+          <p:cNvPr id="1910458649" name="TextBox 4"/>
           <p:cNvSpPr txBox="1"/>
           <p:nvPr/>
         </p:nvSpPr>
-        <p:spPr>
+        <p:spPr bwMode="auto">
           <a:xfrm>
             <a:off x="731520" y="1463040"/>
             <a:ext cx="10698480" cy="4572000"/>
@@ -5841,8 +6214,10 @@
               </a:defRPr>
             </a:pPr>
             <a:r>
+              <a:rPr/>
               <a:t>•  Too many features hurt — noise and redundancy.</a:t>
             </a:r>
+            <a:endParaRPr/>
           </a:p>
           <a:p>
             <a:pPr>
@@ -5857,8 +6232,10 @@
               </a:defRPr>
             </a:pPr>
             <a:r>
+              <a:rPr/>
               <a:t>•  We want the smallest subset that preserves class information.</a:t>
             </a:r>
+            <a:endParaRPr/>
           </a:p>
           <a:p>
             <a:pPr>
@@ -5873,8 +6250,10 @@
               </a:defRPr>
             </a:pPr>
             <a:r>
+              <a:rPr/>
               <a:t>•  There are 2-to-the-n subsets, so we score and search greedily.</a:t>
             </a:r>
+            <a:endParaRPr/>
           </a:p>
           <a:p>
             <a:pPr>
@@ -5889,8 +6268,10 @@
               </a:defRPr>
             </a:pPr>
             <a:r>
+              <a:rPr/>
               <a:t>•  The score is a filter, or model-tied (wrapper or embedded).</a:t>
             </a:r>
+            <a:endParaRPr/>
           </a:p>
           <a:p>
             <a:pPr>
@@ -5905,8 +6286,10 @@
               </a:defRPr>
             </a:pPr>
             <a:r>
+              <a:rPr/>
               <a:t>•  Selection chooses; construction and extraction create.</a:t>
             </a:r>
+            <a:endParaRPr/>
           </a:p>
         </p:txBody>
       </p:sp>
@@ -5915,26 +6298,41 @@
   <p:clrMapOvr>
     <a:masterClrMapping/>
   </p:clrMapOvr>
+  <mc:AlternateContent xmlns:mc="http://schemas.openxmlformats.org/markup-compatibility/2006">
+    <mc:Choice xmlns:p159="http://schemas.microsoft.com/office/powerpoint/2015/09/main" xmlns:p14="http://schemas.microsoft.com/office/powerpoint/2010/main" Requires="p159">
+      <p:transition p14:dur="500" advClick="1"/>
+    </mc:Choice>
+    <mc:Fallback>
+      <p:transition advClick="1"/>
+    </mc:Fallback>
+  </mc:AlternateContent>
 </p:sld>
 </file>
 
 <file path=ppt/slides/slide15.xml><?xml version="1.0" encoding="utf-8"?>
-<p:sld xmlns:a="http://schemas.openxmlformats.org/drawingml/2006/main" xmlns:p="http://schemas.openxmlformats.org/presentationml/2006/main" xmlns:r="http://schemas.openxmlformats.org/officeDocument/2006/relationships">
-  <p:cSld>
+<p:sld xmlns:a="http://schemas.openxmlformats.org/drawingml/2006/main" xmlns:r="http://schemas.openxmlformats.org/officeDocument/2006/relationships" xmlns:p="http://schemas.openxmlformats.org/presentationml/2006/main" xmlns:m="http://schemas.openxmlformats.org/officeDocument/2006/math" xmlns:w="http://schemas.openxmlformats.org/wordprocessingml/2006/main" xmlns:mc="http://schemas.openxmlformats.org/markup-compatibility/2006" showMasterPhAnim="0" showMasterSp="1" show="1">
+  <p:cSld name="">
     <p:spTree>
       <p:nvGrpSpPr>
         <p:cNvPr id="1" name=""/>
         <p:cNvGrpSpPr/>
         <p:nvPr/>
       </p:nvGrpSpPr>
-      <p:grpSpPr/>
-      <p:sp>
-        <p:nvSpPr>
-          <p:cNvPr id="2" name="Rectangle 1"/>
+      <p:grpSpPr bwMode="auto">
+        <a:xfrm>
+          <a:off x="0" y="0"/>
+          <a:ext cx="0" cy="0"/>
+          <a:chOff x="0" y="0"/>
+          <a:chExt cx="0" cy="0"/>
+        </a:xfrm>
+      </p:grpSpPr>
+      <p:sp>
+        <p:nvSpPr>
+          <p:cNvPr id="1520099333" name="Rectangle 1"/>
           <p:cNvSpPr/>
           <p:nvPr/>
         </p:nvSpPr>
-        <p:spPr>
+        <p:spPr bwMode="auto">
           <a:xfrm>
             <a:off x="0" y="0"/>
             <a:ext cx="12191695" cy="6858000"/>
@@ -5968,17 +6366,20 @@
           <a:bodyPr rtlCol="0" anchor="ctr"/>
           <a:lstStyle/>
           <a:p>
-            <a:pPr algn="ctr"/>
-          </a:p>
-        </p:txBody>
-      </p:sp>
-      <p:sp>
-        <p:nvSpPr>
-          <p:cNvPr id="3" name="TextBox 2"/>
+            <a:pPr algn="ctr">
+              <a:defRPr/>
+            </a:pPr>
+            <a:endParaRPr/>
+          </a:p>
+        </p:txBody>
+      </p:sp>
+      <p:sp>
+        <p:nvSpPr>
+          <p:cNvPr id="487051156" name="TextBox 2"/>
           <p:cNvSpPr txBox="1"/>
           <p:nvPr/>
         </p:nvSpPr>
-        <p:spPr>
+        <p:spPr bwMode="auto">
           <a:xfrm>
             <a:off x="10789920" y="6053328"/>
             <a:ext cx="1097280" cy="457200"/>
@@ -6003,18 +6404,20 @@
               </a:defRPr>
             </a:pPr>
             <a:r>
+              <a:rPr/>
               <a:t>15</a:t>
             </a:r>
-          </a:p>
-        </p:txBody>
-      </p:sp>
-      <p:sp>
-        <p:nvSpPr>
-          <p:cNvPr id="4" name="TextBox 3"/>
+            <a:endParaRPr/>
+          </a:p>
+        </p:txBody>
+      </p:sp>
+      <p:sp>
+        <p:nvSpPr>
+          <p:cNvPr id="2043331967" name="TextBox 3"/>
           <p:cNvSpPr txBox="1"/>
           <p:nvPr/>
         </p:nvSpPr>
-        <p:spPr>
+        <p:spPr bwMode="auto">
           <a:xfrm>
             <a:off x="731520" y="457200"/>
             <a:ext cx="10698480" cy="960120"/>
@@ -6039,18 +6442,20 @@
               </a:defRPr>
             </a:pPr>
             <a:r>
+              <a:rPr/>
               <a:t>References and image credits</a:t>
             </a:r>
-          </a:p>
-        </p:txBody>
-      </p:sp>
-      <p:sp>
-        <p:nvSpPr>
-          <p:cNvPr id="5" name="TextBox 4"/>
+            <a:endParaRPr/>
+          </a:p>
+        </p:txBody>
+      </p:sp>
+      <p:sp>
+        <p:nvSpPr>
+          <p:cNvPr id="957946503" name="TextBox 4"/>
           <p:cNvSpPr txBox="1"/>
           <p:nvPr/>
         </p:nvSpPr>
-        <p:spPr>
+        <p:spPr bwMode="auto">
           <a:xfrm>
             <a:off x="731520" y="1463040"/>
             <a:ext cx="10698480" cy="4572000"/>
@@ -6078,8 +6483,10 @@
               </a:defRPr>
             </a:pPr>
             <a:r>
+              <a:rPr/>
               <a:t>•  Han, Jiawei; Kamber, Micheline; Pei, Jian. Data Mining: Concepts and Techniques, 3rd ed. Morgan Kaufmann, 2011 — Section 3.4.4 (pp. 103-105).</a:t>
             </a:r>
+            <a:endParaRPr/>
           </a:p>
           <a:p>
             <a:pPr>
@@ -6094,8 +6501,10 @@
               </a:defRPr>
             </a:pPr>
             <a:r>
+              <a:rPr/>
               <a:t>•  Aggarwal, Charu C. Data Mining: The Textbook. Springer, 2015 — Section 10.2 (pp. 287-293); Section 6.2 (pp. 155-158).</a:t>
             </a:r>
+            <a:endParaRPr/>
           </a:p>
           <a:p>
             <a:pPr>
@@ -6110,8 +6519,10 @@
               </a:defRPr>
             </a:pPr>
             <a:r>
+              <a:rPr/>
               <a:t>•  Figures 3.6, 10.1, 10.2, 6.1, 2.2 reproduced from the two textbooks above, for study use, with page anchors.</a:t>
             </a:r>
+            <a:endParaRPr/>
           </a:p>
           <a:p>
             <a:pPr>
@@ -6126,8 +6537,10 @@
               </a:defRPr>
             </a:pPr>
             <a:r>
+              <a:rPr/>
               <a:t>•  Decision-tree diagram: CollaborativeGeneticist, CC BY-SA 4.0, via Wikimedia Commons.</a:t>
             </a:r>
+            <a:endParaRPr/>
           </a:p>
           <a:p>
             <a:pPr>
@@ -6142,8 +6555,10 @@
               </a:defRPr>
             </a:pPr>
             <a:r>
+              <a:rPr/>
               <a:t>•  Filter / wrapper / embedded diagrams: Lucien Mousin and Lastdreamer7591, CC BY-SA 4.0, via Wikimedia Commons.</a:t>
             </a:r>
+            <a:endParaRPr/>
           </a:p>
         </p:txBody>
       </p:sp>
@@ -6152,26 +6567,41 @@
   <p:clrMapOvr>
     <a:masterClrMapping/>
   </p:clrMapOvr>
+  <mc:AlternateContent xmlns:mc="http://schemas.openxmlformats.org/markup-compatibility/2006">
+    <mc:Choice xmlns:p159="http://schemas.microsoft.com/office/powerpoint/2015/09/main" xmlns:p14="http://schemas.microsoft.com/office/powerpoint/2010/main" Requires="p159">
+      <p:transition p14:dur="500" advClick="1"/>
+    </mc:Choice>
+    <mc:Fallback>
+      <p:transition advClick="1"/>
+    </mc:Fallback>
+  </mc:AlternateContent>
 </p:sld>
 </file>
 
 <file path=ppt/slides/slide2.xml><?xml version="1.0" encoding="utf-8"?>
-<p:sld xmlns:a="http://schemas.openxmlformats.org/drawingml/2006/main" xmlns:p="http://schemas.openxmlformats.org/presentationml/2006/main" xmlns:r="http://schemas.openxmlformats.org/officeDocument/2006/relationships">
-  <p:cSld>
+<p:sld xmlns:a="http://schemas.openxmlformats.org/drawingml/2006/main" xmlns:r="http://schemas.openxmlformats.org/officeDocument/2006/relationships" xmlns:p="http://schemas.openxmlformats.org/presentationml/2006/main" xmlns:m="http://schemas.openxmlformats.org/officeDocument/2006/math" xmlns:w="http://schemas.openxmlformats.org/wordprocessingml/2006/main" xmlns:mc="http://schemas.openxmlformats.org/markup-compatibility/2006" showMasterPhAnim="0" showMasterSp="1" show="1">
+  <p:cSld name="">
     <p:spTree>
       <p:nvGrpSpPr>
         <p:cNvPr id="1" name=""/>
         <p:cNvGrpSpPr/>
         <p:nvPr/>
       </p:nvGrpSpPr>
-      <p:grpSpPr/>
-      <p:sp>
-        <p:nvSpPr>
-          <p:cNvPr id="2" name="Rectangle 1"/>
+      <p:grpSpPr bwMode="auto">
+        <a:xfrm>
+          <a:off x="0" y="0"/>
+          <a:ext cx="0" cy="0"/>
+          <a:chOff x="0" y="0"/>
+          <a:chExt cx="0" cy="0"/>
+        </a:xfrm>
+      </p:grpSpPr>
+      <p:sp>
+        <p:nvSpPr>
+          <p:cNvPr id="1862452945" name="Rectangle 1"/>
           <p:cNvSpPr/>
           <p:nvPr/>
         </p:nvSpPr>
-        <p:spPr>
+        <p:spPr bwMode="auto">
           <a:xfrm>
             <a:off x="0" y="0"/>
             <a:ext cx="12191695" cy="6858000"/>
@@ -6205,17 +6635,20 @@
           <a:bodyPr rtlCol="0" anchor="ctr"/>
           <a:lstStyle/>
           <a:p>
-            <a:pPr algn="ctr"/>
-          </a:p>
-        </p:txBody>
-      </p:sp>
-      <p:sp>
-        <p:nvSpPr>
-          <p:cNvPr id="3" name="TextBox 2"/>
+            <a:pPr algn="ctr">
+              <a:defRPr/>
+            </a:pPr>
+            <a:endParaRPr/>
+          </a:p>
+        </p:txBody>
+      </p:sp>
+      <p:sp>
+        <p:nvSpPr>
+          <p:cNvPr id="479756625" name="TextBox 2"/>
           <p:cNvSpPr txBox="1"/>
           <p:nvPr/>
         </p:nvSpPr>
-        <p:spPr>
+        <p:spPr bwMode="auto">
           <a:xfrm>
             <a:off x="10789920" y="6053328"/>
             <a:ext cx="1097280" cy="457200"/>
@@ -6240,18 +6673,20 @@
               </a:defRPr>
             </a:pPr>
             <a:r>
+              <a:rPr/>
               <a:t>2</a:t>
             </a:r>
-          </a:p>
-        </p:txBody>
-      </p:sp>
-      <p:sp>
-        <p:nvSpPr>
-          <p:cNvPr id="4" name="TextBox 3"/>
+            <a:endParaRPr/>
+          </a:p>
+        </p:txBody>
+      </p:sp>
+      <p:sp>
+        <p:nvSpPr>
+          <p:cNvPr id="714050737" name="TextBox 3"/>
           <p:cNvSpPr txBox="1"/>
           <p:nvPr/>
         </p:nvSpPr>
-        <p:spPr>
+        <p:spPr bwMode="auto">
           <a:xfrm>
             <a:off x="731520" y="457200"/>
             <a:ext cx="10698480" cy="960120"/>
@@ -6276,21 +6711,23 @@
               </a:defRPr>
             </a:pPr>
             <a:r>
+              <a:rPr/>
               <a:t>Most columns in a real dataset do not earn their place.</a:t>
             </a:r>
-          </a:p>
-        </p:txBody>
-      </p:sp>
-      <p:sp>
-        <p:nvSpPr>
-          <p:cNvPr id="5" name="TextBox 4"/>
+            <a:endParaRPr/>
+          </a:p>
+        </p:txBody>
+      </p:sp>
+      <p:sp>
+        <p:nvSpPr>
+          <p:cNvPr id="692180760" name="TextBox 4"/>
           <p:cNvSpPr txBox="1"/>
           <p:nvPr/>
         </p:nvSpPr>
-        <p:spPr>
-          <a:xfrm>
-            <a:off x="731520" y="1508760"/>
-            <a:ext cx="5394960" cy="4526280"/>
+        <p:spPr bwMode="auto">
+          <a:xfrm flipH="0" flipV="0">
+            <a:off x="731520" y="1508759"/>
+            <a:ext cx="7281866" cy="1996799"/>
           </a:xfrm>
           <a:prstGeom prst="rect">
             <a:avLst/>
@@ -6315,8 +6752,10 @@
               </a:defRPr>
             </a:pPr>
             <a:r>
+              <a:rPr/>
               <a:t>•  Irrelevant: no relationship to the target — a customer's telephone number.</a:t>
             </a:r>
+            <a:endParaRPr/>
           </a:p>
           <a:p>
             <a:pPr>
@@ -6331,8 +6770,10 @@
               </a:defRPr>
             </a:pPr>
             <a:r>
+              <a:rPr/>
               <a:t>•  Redundant: duplicates information already present — age versus date of birth.</a:t>
             </a:r>
+            <a:endParaRPr/>
           </a:p>
           <a:p>
             <a:pPr>
@@ -6347,68 +6788,10 @@
               </a:defRPr>
             </a:pPr>
             <a:r>
+              <a:rPr/>
               <a:t>•  Cost: poor-quality patterns, and a slower mining process.</a:t>
             </a:r>
-          </a:p>
-        </p:txBody>
-      </p:sp>
-      <p:pic>
-        <p:nvPicPr>
-          <p:cNvPr id="6" name="Picture 5" descr="fig_AG_2-2_correlated_axis.png"/>
-          <p:cNvPicPr>
-            <a:picLocks noChangeAspect="1"/>
-          </p:cNvPicPr>
-          <p:nvPr/>
-        </p:nvPicPr>
-        <p:blipFill>
-          <a:blip r:embed="rId3"/>
-          <a:stretch>
-            <a:fillRect/>
-          </a:stretch>
-        </p:blipFill>
-        <p:spPr>
-          <a:xfrm>
-            <a:off x="6400800" y="2507374"/>
-            <a:ext cx="5029200" cy="2529051"/>
-          </a:xfrm>
-          <a:prstGeom prst="rect">
-            <a:avLst/>
-          </a:prstGeom>
-        </p:spPr>
-      </p:pic>
-      <p:sp>
-        <p:nvSpPr>
-          <p:cNvPr id="7" name="TextBox 6"/>
-          <p:cNvSpPr txBox="1"/>
-          <p:nvPr/>
-        </p:nvSpPr>
-        <p:spPr>
-          <a:xfrm>
-            <a:off x="6400800" y="5724144"/>
-            <a:ext cx="5029200" cy="310896"/>
-          </a:xfrm>
-          <a:prstGeom prst="rect">
-            <a:avLst/>
-          </a:prstGeom>
-          <a:noFill/>
-        </p:spPr>
-        <p:txBody>
-          <a:bodyPr wrap="none">
-            <a:spAutoFit/>
-          </a:bodyPr>
-          <a:lstStyle/>
-          <a:p>
-            <a:pPr algn="ctr">
-              <a:defRPr sz="1150" i="1">
-                <a:solidFill>
-                  <a:srgbClr val="64748B"/>
-                </a:solidFill>
-                <a:latin typeface="Segoe UI"/>
-              </a:defRPr>
-            </a:pPr>
-            <a:r>
-              <a:t>Highly correlated (redundant) data — the redundancy problem (Aggarwal, p.41)</a:t>
-            </a:r>
+            <a:endParaRPr/>
           </a:p>
         </p:txBody>
       </p:sp>
@@ -6417,26 +6800,41 @@
   <p:clrMapOvr>
     <a:masterClrMapping/>
   </p:clrMapOvr>
+  <mc:AlternateContent xmlns:mc="http://schemas.openxmlformats.org/markup-compatibility/2006">
+    <mc:Choice xmlns:p159="http://schemas.microsoft.com/office/powerpoint/2015/09/main" xmlns:p14="http://schemas.microsoft.com/office/powerpoint/2010/main" Requires="p159">
+      <p:transition p14:dur="500" advClick="1"/>
+    </mc:Choice>
+    <mc:Fallback>
+      <p:transition advClick="1"/>
+    </mc:Fallback>
+  </mc:AlternateContent>
 </p:sld>
 </file>
 
 <file path=ppt/slides/slide3.xml><?xml version="1.0" encoding="utf-8"?>
-<p:sld xmlns:a="http://schemas.openxmlformats.org/drawingml/2006/main" xmlns:p="http://schemas.openxmlformats.org/presentationml/2006/main" xmlns:r="http://schemas.openxmlformats.org/officeDocument/2006/relationships">
-  <p:cSld>
+<p:sld xmlns:a="http://schemas.openxmlformats.org/drawingml/2006/main" xmlns:r="http://schemas.openxmlformats.org/officeDocument/2006/relationships" xmlns:p="http://schemas.openxmlformats.org/presentationml/2006/main" xmlns:m="http://schemas.openxmlformats.org/officeDocument/2006/math" xmlns:w="http://schemas.openxmlformats.org/wordprocessingml/2006/main" xmlns:mc="http://schemas.openxmlformats.org/markup-compatibility/2006" showMasterPhAnim="0" showMasterSp="1" show="1">
+  <p:cSld name="">
     <p:spTree>
       <p:nvGrpSpPr>
         <p:cNvPr id="1" name=""/>
         <p:cNvGrpSpPr/>
         <p:nvPr/>
       </p:nvGrpSpPr>
-      <p:grpSpPr/>
-      <p:sp>
-        <p:nvSpPr>
-          <p:cNvPr id="2" name="Rectangle 1"/>
+      <p:grpSpPr bwMode="auto">
+        <a:xfrm>
+          <a:off x="0" y="0"/>
+          <a:ext cx="0" cy="0"/>
+          <a:chOff x="0" y="0"/>
+          <a:chExt cx="0" cy="0"/>
+        </a:xfrm>
+      </p:grpSpPr>
+      <p:sp>
+        <p:nvSpPr>
+          <p:cNvPr id="1411494491" name="Rectangle 1"/>
           <p:cNvSpPr/>
           <p:nvPr/>
         </p:nvSpPr>
-        <p:spPr>
+        <p:spPr bwMode="auto">
           <a:xfrm>
             <a:off x="0" y="0"/>
             <a:ext cx="12191695" cy="6858000"/>
@@ -6470,17 +6868,20 @@
           <a:bodyPr rtlCol="0" anchor="ctr"/>
           <a:lstStyle/>
           <a:p>
-            <a:pPr algn="ctr"/>
-          </a:p>
-        </p:txBody>
-      </p:sp>
-      <p:sp>
-        <p:nvSpPr>
-          <p:cNvPr id="3" name="TextBox 2"/>
+            <a:pPr algn="ctr">
+              <a:defRPr/>
+            </a:pPr>
+            <a:endParaRPr/>
+          </a:p>
+        </p:txBody>
+      </p:sp>
+      <p:sp>
+        <p:nvSpPr>
+          <p:cNvPr id="620475001" name="TextBox 2"/>
           <p:cNvSpPr txBox="1"/>
           <p:nvPr/>
         </p:nvSpPr>
-        <p:spPr>
+        <p:spPr bwMode="auto">
           <a:xfrm>
             <a:off x="10789920" y="6053328"/>
             <a:ext cx="1097280" cy="457200"/>
@@ -6505,18 +6906,20 @@
               </a:defRPr>
             </a:pPr>
             <a:r>
+              <a:rPr/>
               <a:t>3</a:t>
             </a:r>
-          </a:p>
-        </p:txBody>
-      </p:sp>
-      <p:sp>
-        <p:nvSpPr>
-          <p:cNvPr id="4" name="TextBox 3"/>
+            <a:endParaRPr/>
+          </a:p>
+        </p:txBody>
+      </p:sp>
+      <p:sp>
+        <p:nvSpPr>
+          <p:cNvPr id="147793329" name="TextBox 3"/>
           <p:cNvSpPr txBox="1"/>
           <p:nvPr/>
         </p:nvSpPr>
-        <p:spPr>
+        <p:spPr bwMode="auto">
           <a:xfrm>
             <a:off x="731520" y="457200"/>
             <a:ext cx="10698480" cy="960120"/>
@@ -6541,18 +6944,20 @@
               </a:defRPr>
             </a:pPr>
             <a:r>
+              <a:rPr/>
               <a:t>Feature selection chooses existing columns; it never creates new ones.</a:t>
             </a:r>
-          </a:p>
-        </p:txBody>
-      </p:sp>
-      <p:sp>
-        <p:nvSpPr>
-          <p:cNvPr id="5" name="TextBox 4"/>
+            <a:endParaRPr/>
+          </a:p>
+        </p:txBody>
+      </p:sp>
+      <p:sp>
+        <p:nvSpPr>
+          <p:cNvPr id="1594068762" name="TextBox 4"/>
           <p:cNvSpPr txBox="1"/>
           <p:nvPr/>
         </p:nvSpPr>
-        <p:spPr>
+        <p:spPr bwMode="auto">
           <a:xfrm>
             <a:off x="731520" y="1463040"/>
             <a:ext cx="10698480" cy="4572000"/>
@@ -6580,8 +6985,10 @@
               </a:defRPr>
             </a:pPr>
             <a:r>
+              <a:rPr/>
               <a:t>•  Select: keep a subset of the existing attributes (drop Phone).</a:t>
             </a:r>
+            <a:endParaRPr/>
           </a:p>
           <a:p>
             <a:pPr>
@@ -6596,8 +7003,10 @@
               </a:defRPr>
             </a:pPr>
             <a:r>
+              <a:rPr/>
               <a:t>•  Construct: add a new column from existing ones (area = height x width).</a:t>
             </a:r>
+            <a:endParaRPr/>
           </a:p>
           <a:p>
             <a:pPr>
@@ -6612,8 +7021,10 @@
               </a:defRPr>
             </a:pPr>
             <a:r>
+              <a:rPr/>
               <a:t>•  Extract: build a new representation with new axes (PCA components).</a:t>
             </a:r>
+            <a:endParaRPr/>
           </a:p>
           <a:p>
             <a:pPr>
@@ -6628,8 +7039,10 @@
               </a:defRPr>
             </a:pPr>
             <a:r>
+              <a:rPr/>
               <a:t>•  All three sit under the umbrella of data reduction.</a:t>
             </a:r>
+            <a:endParaRPr/>
           </a:p>
         </p:txBody>
       </p:sp>
@@ -6638,26 +7051,41 @@
   <p:clrMapOvr>
     <a:masterClrMapping/>
   </p:clrMapOvr>
+  <mc:AlternateContent xmlns:mc="http://schemas.openxmlformats.org/markup-compatibility/2006">
+    <mc:Choice xmlns:p159="http://schemas.microsoft.com/office/powerpoint/2015/09/main" xmlns:p14="http://schemas.microsoft.com/office/powerpoint/2010/main" Requires="p159">
+      <p:transition p14:dur="500" advClick="1"/>
+    </mc:Choice>
+    <mc:Fallback>
+      <p:transition advClick="1"/>
+    </mc:Fallback>
+  </mc:AlternateContent>
 </p:sld>
 </file>
 
 <file path=ppt/slides/slide4.xml><?xml version="1.0" encoding="utf-8"?>
-<p:sld xmlns:a="http://schemas.openxmlformats.org/drawingml/2006/main" xmlns:p="http://schemas.openxmlformats.org/presentationml/2006/main" xmlns:r="http://schemas.openxmlformats.org/officeDocument/2006/relationships">
-  <p:cSld>
+<p:sld xmlns:a="http://schemas.openxmlformats.org/drawingml/2006/main" xmlns:r="http://schemas.openxmlformats.org/officeDocument/2006/relationships" xmlns:p="http://schemas.openxmlformats.org/presentationml/2006/main" xmlns:m="http://schemas.openxmlformats.org/officeDocument/2006/math" xmlns:w="http://schemas.openxmlformats.org/wordprocessingml/2006/main" xmlns:mc="http://schemas.openxmlformats.org/markup-compatibility/2006" showMasterPhAnim="0" showMasterSp="1" show="1">
+  <p:cSld name="">
     <p:spTree>
       <p:nvGrpSpPr>
         <p:cNvPr id="1" name=""/>
         <p:cNvGrpSpPr/>
         <p:nvPr/>
       </p:nvGrpSpPr>
-      <p:grpSpPr/>
-      <p:sp>
-        <p:nvSpPr>
-          <p:cNvPr id="2" name="Rectangle 1"/>
+      <p:grpSpPr bwMode="auto">
+        <a:xfrm>
+          <a:off x="0" y="0"/>
+          <a:ext cx="0" cy="0"/>
+          <a:chOff x="0" y="0"/>
+          <a:chExt cx="0" cy="0"/>
+        </a:xfrm>
+      </p:grpSpPr>
+      <p:sp>
+        <p:nvSpPr>
+          <p:cNvPr id="865433912" name="Rectangle 1"/>
           <p:cNvSpPr/>
           <p:nvPr/>
         </p:nvSpPr>
-        <p:spPr>
+        <p:spPr bwMode="auto">
           <a:xfrm>
             <a:off x="0" y="0"/>
             <a:ext cx="12191695" cy="6858000"/>
@@ -6691,17 +7119,20 @@
           <a:bodyPr rtlCol="0" anchor="ctr"/>
           <a:lstStyle/>
           <a:p>
-            <a:pPr algn="ctr"/>
-          </a:p>
-        </p:txBody>
-      </p:sp>
-      <p:sp>
-        <p:nvSpPr>
-          <p:cNvPr id="3" name="TextBox 2"/>
+            <a:pPr algn="ctr">
+              <a:defRPr/>
+            </a:pPr>
+            <a:endParaRPr/>
+          </a:p>
+        </p:txBody>
+      </p:sp>
+      <p:sp>
+        <p:nvSpPr>
+          <p:cNvPr id="1641986163" name="TextBox 2"/>
           <p:cNvSpPr txBox="1"/>
           <p:nvPr/>
         </p:nvSpPr>
-        <p:spPr>
+        <p:spPr bwMode="auto">
           <a:xfrm>
             <a:off x="10789920" y="6053328"/>
             <a:ext cx="1097280" cy="457200"/>
@@ -6726,18 +7157,20 @@
               </a:defRPr>
             </a:pPr>
             <a:r>
+              <a:rPr/>
               <a:t>4</a:t>
             </a:r>
-          </a:p>
-        </p:txBody>
-      </p:sp>
-      <p:sp>
-        <p:nvSpPr>
-          <p:cNvPr id="4" name="TextBox 3"/>
+            <a:endParaRPr/>
+          </a:p>
+        </p:txBody>
+      </p:sp>
+      <p:sp>
+        <p:nvSpPr>
+          <p:cNvPr id="1346894149" name="TextBox 3"/>
           <p:cNvSpPr txBox="1"/>
           <p:nvPr/>
         </p:nvSpPr>
-        <p:spPr>
+        <p:spPr bwMode="auto">
           <a:xfrm>
             <a:off x="731520" y="457200"/>
             <a:ext cx="10698480" cy="960120"/>
@@ -6762,21 +7195,23 @@
               </a:defRPr>
             </a:pPr>
             <a:r>
+              <a:rPr/>
               <a:t>The goal is the smallest subset that still preserves the class distribution.</a:t>
             </a:r>
-          </a:p>
-        </p:txBody>
-      </p:sp>
-      <p:sp>
-        <p:nvSpPr>
-          <p:cNvPr id="5" name="TextBox 4"/>
+            <a:endParaRPr/>
+          </a:p>
+        </p:txBody>
+      </p:sp>
+      <p:sp>
+        <p:nvSpPr>
+          <p:cNvPr id="591402201" name="TextBox 4"/>
           <p:cNvSpPr txBox="1"/>
           <p:nvPr/>
         </p:nvSpPr>
-        <p:spPr>
-          <a:xfrm>
-            <a:off x="731520" y="1463040"/>
-            <a:ext cx="10698480" cy="4572000"/>
+        <p:spPr bwMode="auto">
+          <a:xfrm>
+            <a:off x="731520" y="1748790"/>
+            <a:ext cx="10698840" cy="2357479"/>
           </a:xfrm>
           <a:prstGeom prst="rect">
             <a:avLst/>
@@ -6801,8 +7236,10 @@
               </a:defRPr>
             </a:pPr>
             <a:r>
-              <a:t>“ "The goal of attribute subset selection is to find a minimum set of attributes such that the resulting probability distribution of the data classes is as close as possible to the original distribution obtained using all attributes." — Han, Kamber &amp; Pei, p.104 ”</a:t>
-            </a:r>
+              <a:rPr/>
+              <a:t>“ The goal of attribute subset selection is to find a minimum set of attributes such that the resulting probability distribution of the data classes is as close as possible to the original distribution obtained using all attributes." — Han, Kamber &amp; Pei, p.104 ”</a:t>
+            </a:r>
+            <a:endParaRPr/>
           </a:p>
           <a:p>
             <a:pPr>
@@ -6817,8 +7254,10 @@
               </a:defRPr>
             </a:pPr>
             <a:r>
+              <a:rPr/>
               <a:t>•  Minimum set: we are minimising.</a:t>
             </a:r>
+            <a:endParaRPr/>
           </a:p>
           <a:p>
             <a:pPr>
@@ -6833,8 +7272,10 @@
               </a:defRPr>
             </a:pPr>
             <a:r>
+              <a:rPr/>
               <a:t>•  Class distribution preserved: we are constrained.</a:t>
             </a:r>
+            <a:endParaRPr/>
           </a:p>
           <a:p>
             <a:pPr>
@@ -6849,8 +7290,10 @@
               </a:defRPr>
             </a:pPr>
             <a:r>
+              <a:rPr/>
               <a:t>•  Together: a trade-off, not a one-sided goal.</a:t>
             </a:r>
+            <a:endParaRPr/>
           </a:p>
         </p:txBody>
       </p:sp>
@@ -6859,26 +7302,41 @@
   <p:clrMapOvr>
     <a:masterClrMapping/>
   </p:clrMapOvr>
+  <mc:AlternateContent xmlns:mc="http://schemas.openxmlformats.org/markup-compatibility/2006">
+    <mc:Choice xmlns:p159="http://schemas.microsoft.com/office/powerpoint/2015/09/main" xmlns:p14="http://schemas.microsoft.com/office/powerpoint/2010/main" Requires="p159">
+      <p:transition p14:dur="500" advClick="1"/>
+    </mc:Choice>
+    <mc:Fallback>
+      <p:transition advClick="1"/>
+    </mc:Fallback>
+  </mc:AlternateContent>
 </p:sld>
 </file>
 
 <file path=ppt/slides/slide5.xml><?xml version="1.0" encoding="utf-8"?>
-<p:sld xmlns:a="http://schemas.openxmlformats.org/drawingml/2006/main" xmlns:p="http://schemas.openxmlformats.org/presentationml/2006/main" xmlns:r="http://schemas.openxmlformats.org/officeDocument/2006/relationships">
-  <p:cSld>
+<p:sld xmlns:a="http://schemas.openxmlformats.org/drawingml/2006/main" xmlns:r="http://schemas.openxmlformats.org/officeDocument/2006/relationships" xmlns:p="http://schemas.openxmlformats.org/presentationml/2006/main" xmlns:m="http://schemas.openxmlformats.org/officeDocument/2006/math" xmlns:w="http://schemas.openxmlformats.org/wordprocessingml/2006/main" xmlns:mc="http://schemas.openxmlformats.org/markup-compatibility/2006" showMasterPhAnim="0" showMasterSp="1" show="1">
+  <p:cSld name="">
     <p:spTree>
       <p:nvGrpSpPr>
         <p:cNvPr id="1" name=""/>
         <p:cNvGrpSpPr/>
         <p:nvPr/>
       </p:nvGrpSpPr>
-      <p:grpSpPr/>
-      <p:sp>
-        <p:nvSpPr>
-          <p:cNvPr id="2" name="Rectangle 1"/>
+      <p:grpSpPr bwMode="auto">
+        <a:xfrm>
+          <a:off x="0" y="0"/>
+          <a:ext cx="0" cy="0"/>
+          <a:chOff x="0" y="0"/>
+          <a:chExt cx="0" cy="0"/>
+        </a:xfrm>
+      </p:grpSpPr>
+      <p:sp>
+        <p:nvSpPr>
+          <p:cNvPr id="949576148" name="Rectangle 1"/>
           <p:cNvSpPr/>
           <p:nvPr/>
         </p:nvSpPr>
-        <p:spPr>
+        <p:spPr bwMode="auto">
           <a:xfrm>
             <a:off x="0" y="0"/>
             <a:ext cx="12191695" cy="6858000"/>
@@ -6912,17 +7370,20 @@
           <a:bodyPr rtlCol="0" anchor="ctr"/>
           <a:lstStyle/>
           <a:p>
-            <a:pPr algn="ctr"/>
-          </a:p>
-        </p:txBody>
-      </p:sp>
-      <p:sp>
-        <p:nvSpPr>
-          <p:cNvPr id="3" name="TextBox 2"/>
+            <a:pPr algn="ctr">
+              <a:defRPr/>
+            </a:pPr>
+            <a:endParaRPr/>
+          </a:p>
+        </p:txBody>
+      </p:sp>
+      <p:sp>
+        <p:nvSpPr>
+          <p:cNvPr id="1937717340" name="TextBox 2"/>
           <p:cNvSpPr txBox="1"/>
           <p:nvPr/>
         </p:nvSpPr>
-        <p:spPr>
+        <p:spPr bwMode="auto">
           <a:xfrm>
             <a:off x="10789920" y="6053328"/>
             <a:ext cx="1097280" cy="457200"/>
@@ -6947,18 +7408,20 @@
               </a:defRPr>
             </a:pPr>
             <a:r>
+              <a:rPr/>
               <a:t>5</a:t>
             </a:r>
-          </a:p>
-        </p:txBody>
-      </p:sp>
-      <p:sp>
-        <p:nvSpPr>
-          <p:cNvPr id="4" name="TextBox 3"/>
+            <a:endParaRPr/>
+          </a:p>
+        </p:txBody>
+      </p:sp>
+      <p:sp>
+        <p:nvSpPr>
+          <p:cNvPr id="830360788" name="TextBox 3"/>
           <p:cNvSpPr txBox="1"/>
           <p:nvPr/>
         </p:nvSpPr>
-        <p:spPr>
+        <p:spPr bwMode="auto">
           <a:xfrm>
             <a:off x="731520" y="457200"/>
             <a:ext cx="10698480" cy="960120"/>
@@ -6983,18 +7446,20 @@
               </a:defRPr>
             </a:pPr>
             <a:r>
+              <a:rPr/>
               <a:t>There are 2-to-the-n possible subsets, so exhaustive search is impossible.</a:t>
             </a:r>
-          </a:p>
-        </p:txBody>
-      </p:sp>
-      <p:sp>
-        <p:nvSpPr>
-          <p:cNvPr id="5" name="TextBox 4"/>
+            <a:endParaRPr/>
+          </a:p>
+        </p:txBody>
+      </p:sp>
+      <p:sp>
+        <p:nvSpPr>
+          <p:cNvPr id="1225764426" name="TextBox 4"/>
           <p:cNvSpPr txBox="1"/>
           <p:nvPr/>
         </p:nvSpPr>
-        <p:spPr>
+        <p:spPr bwMode="auto">
           <a:xfrm>
             <a:off x="731520" y="1463040"/>
             <a:ext cx="10698480" cy="4572000"/>
@@ -7022,8 +7487,10 @@
               </a:defRPr>
             </a:pPr>
             <a:r>
+              <a:rPr/>
               <a:t>•  20 features: 1,048,576 subsets. 30 features: over a billion. 50 features: over a quadrillion.</a:t>
             </a:r>
+            <a:endParaRPr/>
           </a:p>
           <a:p>
             <a:pPr>
@@ -7038,8 +7505,10 @@
               </a:defRPr>
             </a:pPr>
             <a:r>
+              <a:rPr/>
               <a:t>•  H&amp;K: an exhaustive search "can be prohibitively expensive".</a:t>
             </a:r>
+            <a:endParaRPr/>
           </a:p>
           <a:p>
             <a:pPr>
@@ -7054,8 +7523,10 @@
               </a:defRPr>
             </a:pPr>
             <a:r>
+              <a:rPr/>
               <a:t>•  So we search heuristically — greedy: a locally optimal choice, hoping for a near-global optimum.</a:t>
             </a:r>
+            <a:endParaRPr/>
           </a:p>
         </p:txBody>
       </p:sp>
@@ -7064,26 +7535,41 @@
   <p:clrMapOvr>
     <a:masterClrMapping/>
   </p:clrMapOvr>
+  <mc:AlternateContent xmlns:mc="http://schemas.openxmlformats.org/markup-compatibility/2006">
+    <mc:Choice xmlns:p159="http://schemas.microsoft.com/office/powerpoint/2015/09/main" xmlns:p14="http://schemas.microsoft.com/office/powerpoint/2010/main" Requires="p159">
+      <p:transition p14:dur="500" advClick="1"/>
+    </mc:Choice>
+    <mc:Fallback>
+      <p:transition advClick="1"/>
+    </mc:Fallback>
+  </mc:AlternateContent>
 </p:sld>
 </file>
 
 <file path=ppt/slides/slide6.xml><?xml version="1.0" encoding="utf-8"?>
-<p:sld xmlns:a="http://schemas.openxmlformats.org/drawingml/2006/main" xmlns:p="http://schemas.openxmlformats.org/presentationml/2006/main" xmlns:r="http://schemas.openxmlformats.org/officeDocument/2006/relationships">
-  <p:cSld>
+<p:sld xmlns:a="http://schemas.openxmlformats.org/drawingml/2006/main" xmlns:r="http://schemas.openxmlformats.org/officeDocument/2006/relationships" xmlns:p="http://schemas.openxmlformats.org/presentationml/2006/main" xmlns:m="http://schemas.openxmlformats.org/officeDocument/2006/math" xmlns:w="http://schemas.openxmlformats.org/wordprocessingml/2006/main" xmlns:mc="http://schemas.openxmlformats.org/markup-compatibility/2006" showMasterPhAnim="0" showMasterSp="1" show="1">
+  <p:cSld name="">
     <p:spTree>
       <p:nvGrpSpPr>
         <p:cNvPr id="1" name=""/>
         <p:cNvGrpSpPr/>
         <p:nvPr/>
       </p:nvGrpSpPr>
-      <p:grpSpPr/>
-      <p:sp>
-        <p:nvSpPr>
-          <p:cNvPr id="2" name="Rectangle 1"/>
+      <p:grpSpPr bwMode="auto">
+        <a:xfrm>
+          <a:off x="0" y="0"/>
+          <a:ext cx="0" cy="0"/>
+          <a:chOff x="0" y="0"/>
+          <a:chExt cx="0" cy="0"/>
+        </a:xfrm>
+      </p:grpSpPr>
+      <p:sp>
+        <p:nvSpPr>
+          <p:cNvPr id="476572738" name="Rectangle 1"/>
           <p:cNvSpPr/>
           <p:nvPr/>
         </p:nvSpPr>
-        <p:spPr>
+        <p:spPr bwMode="auto">
           <a:xfrm>
             <a:off x="0" y="0"/>
             <a:ext cx="12191695" cy="6858000"/>
@@ -7117,17 +7603,20 @@
           <a:bodyPr rtlCol="0" anchor="ctr"/>
           <a:lstStyle/>
           <a:p>
-            <a:pPr algn="ctr"/>
-          </a:p>
-        </p:txBody>
-      </p:sp>
-      <p:sp>
-        <p:nvSpPr>
-          <p:cNvPr id="3" name="TextBox 2"/>
+            <a:pPr algn="ctr">
+              <a:defRPr/>
+            </a:pPr>
+            <a:endParaRPr/>
+          </a:p>
+        </p:txBody>
+      </p:sp>
+      <p:sp>
+        <p:nvSpPr>
+          <p:cNvPr id="425062339" name="TextBox 2"/>
           <p:cNvSpPr txBox="1"/>
           <p:nvPr/>
         </p:nvSpPr>
-        <p:spPr>
+        <p:spPr bwMode="auto">
           <a:xfrm>
             <a:off x="10789920" y="6053328"/>
             <a:ext cx="1097280" cy="457200"/>
@@ -7152,18 +7641,20 @@
               </a:defRPr>
             </a:pPr>
             <a:r>
+              <a:rPr/>
               <a:t>6</a:t>
             </a:r>
-          </a:p>
-        </p:txBody>
-      </p:sp>
-      <p:sp>
-        <p:nvSpPr>
-          <p:cNvPr id="4" name="TextBox 3"/>
+            <a:endParaRPr/>
+          </a:p>
+        </p:txBody>
+      </p:sp>
+      <p:sp>
+        <p:nvSpPr>
+          <p:cNvPr id="2132278330" name="TextBox 3"/>
           <p:cNvSpPr txBox="1"/>
           <p:nvPr/>
         </p:nvSpPr>
-        <p:spPr>
+        <p:spPr bwMode="auto">
           <a:xfrm>
             <a:off x="731520" y="457200"/>
             <a:ext cx="10698480" cy="960120"/>
@@ -7188,20 +7679,22 @@
               </a:defRPr>
             </a:pPr>
             <a:r>
+              <a:rPr/>
               <a:t>Both Gini and entropy ask one question: how mixed are the classes?</a:t>
             </a:r>
-          </a:p>
-        </p:txBody>
-      </p:sp>
-      <p:sp>
-        <p:nvSpPr>
-          <p:cNvPr id="5" name="TextBox 4"/>
+            <a:endParaRPr/>
+          </a:p>
+        </p:txBody>
+      </p:sp>
+      <p:sp>
+        <p:nvSpPr>
+          <p:cNvPr id="1413015538" name="TextBox 4"/>
           <p:cNvSpPr txBox="1"/>
           <p:nvPr/>
         </p:nvSpPr>
-        <p:spPr>
-          <a:xfrm>
-            <a:off x="731520" y="1508760"/>
+        <p:spPr bwMode="auto">
+          <a:xfrm>
+            <a:off x="731520" y="1508759"/>
             <a:ext cx="5394960" cy="4526280"/>
           </a:xfrm>
           <a:prstGeom prst="rect">
@@ -7227,8 +7720,10 @@
               </a:defRPr>
             </a:pPr>
             <a:r>
+              <a:rPr/>
               <a:t>•  Gini (Eq. 10.1): 1 minus the sum of squared class fractions.</a:t>
             </a:r>
+            <a:endParaRPr/>
           </a:p>
           <a:p>
             <a:pPr>
@@ -7243,8 +7738,10 @@
               </a:defRPr>
             </a:pPr>
             <a:r>
+              <a:rPr/>
               <a:t>•  Entropy (Eq. 10.3): minus the sum of p log2 p.</a:t>
             </a:r>
+            <a:endParaRPr/>
           </a:p>
           <a:p>
             <a:pPr>
@@ -7259,26 +7756,26 @@
               </a:defRPr>
             </a:pPr>
             <a:r>
+              <a:rPr/>
               <a:t>•  Both: 0 = perfect separation; higher = more mixing. Lower is better.</a:t>
             </a:r>
+            <a:endParaRPr/>
           </a:p>
         </p:txBody>
       </p:sp>
       <p:pic>
         <p:nvPicPr>
-          <p:cNvPr id="6" name="Picture 5" descr="fig_AG_10-1_gini_entropy.png"/>
+          <p:cNvPr id="1980444580" name="Picture 5" descr="fig_AG_10-1_gini_entropy.png"/>
           <p:cNvPicPr>
             <a:picLocks noChangeAspect="1"/>
           </p:cNvPicPr>
           <p:nvPr/>
         </p:nvPicPr>
-        <p:blipFill>
+        <p:blipFill rotWithShape="1">
           <a:blip r:embed="rId3"/>
-          <a:stretch>
-            <a:fillRect/>
-          </a:stretch>
+          <a:stretch/>
         </p:blipFill>
-        <p:spPr>
+        <p:spPr bwMode="auto">
           <a:xfrm>
             <a:off x="6400800" y="2060432"/>
             <a:ext cx="5029200" cy="3422935"/>
@@ -7290,11 +7787,11 @@
       </p:pic>
       <p:sp>
         <p:nvSpPr>
-          <p:cNvPr id="7" name="TextBox 6"/>
+          <p:cNvPr id="1982550206" name="TextBox 6"/>
           <p:cNvSpPr txBox="1"/>
           <p:nvPr/>
         </p:nvSpPr>
-        <p:spPr>
+        <p:spPr bwMode="auto">
           <a:xfrm>
             <a:off x="6400800" y="5724144"/>
             <a:ext cx="5029200" cy="310896"/>
@@ -7319,8 +7816,10 @@
               </a:defRPr>
             </a:pPr>
             <a:r>
+              <a:rPr/>
               <a:t>Gini and entropy against class-distribution skew (Aggarwal, p.289)</a:t>
             </a:r>
+            <a:endParaRPr/>
           </a:p>
         </p:txBody>
       </p:sp>
@@ -7329,26 +7828,41 @@
   <p:clrMapOvr>
     <a:masterClrMapping/>
   </p:clrMapOvr>
+  <mc:AlternateContent xmlns:mc="http://schemas.openxmlformats.org/markup-compatibility/2006">
+    <mc:Choice xmlns:p159="http://schemas.microsoft.com/office/powerpoint/2015/09/main" xmlns:p14="http://schemas.microsoft.com/office/powerpoint/2010/main" Requires="p159">
+      <p:transition p14:dur="500" advClick="1"/>
+    </mc:Choice>
+    <mc:Fallback>
+      <p:transition advClick="1"/>
+    </mc:Fallback>
+  </mc:AlternateContent>
 </p:sld>
 </file>
 
 <file path=ppt/slides/slide7.xml><?xml version="1.0" encoding="utf-8"?>
-<p:sld xmlns:a="http://schemas.openxmlformats.org/drawingml/2006/main" xmlns:p="http://schemas.openxmlformats.org/presentationml/2006/main" xmlns:r="http://schemas.openxmlformats.org/officeDocument/2006/relationships">
-  <p:cSld>
+<p:sld xmlns:a="http://schemas.openxmlformats.org/drawingml/2006/main" xmlns:r="http://schemas.openxmlformats.org/officeDocument/2006/relationships" xmlns:p="http://schemas.openxmlformats.org/presentationml/2006/main" xmlns:m="http://schemas.openxmlformats.org/officeDocument/2006/math" xmlns:w="http://schemas.openxmlformats.org/wordprocessingml/2006/main" xmlns:mc="http://schemas.openxmlformats.org/markup-compatibility/2006" showMasterPhAnim="0" showMasterSp="1" show="1">
+  <p:cSld name="">
     <p:spTree>
       <p:nvGrpSpPr>
         <p:cNvPr id="1" name=""/>
         <p:cNvGrpSpPr/>
         <p:nvPr/>
       </p:nvGrpSpPr>
-      <p:grpSpPr/>
-      <p:sp>
-        <p:nvSpPr>
-          <p:cNvPr id="2" name="Rectangle 1"/>
+      <p:grpSpPr bwMode="auto">
+        <a:xfrm>
+          <a:off x="0" y="0"/>
+          <a:ext cx="0" cy="0"/>
+          <a:chOff x="0" y="0"/>
+          <a:chExt cx="0" cy="0"/>
+        </a:xfrm>
+      </p:grpSpPr>
+      <p:sp>
+        <p:nvSpPr>
+          <p:cNvPr id="1724111126" name="Rectangle 1"/>
           <p:cNvSpPr/>
           <p:nvPr/>
         </p:nvSpPr>
-        <p:spPr>
+        <p:spPr bwMode="auto">
           <a:xfrm>
             <a:off x="0" y="0"/>
             <a:ext cx="12191695" cy="6858000"/>
@@ -7382,17 +7896,20 @@
           <a:bodyPr rtlCol="0" anchor="ctr"/>
           <a:lstStyle/>
           <a:p>
-            <a:pPr algn="ctr"/>
-          </a:p>
-        </p:txBody>
-      </p:sp>
-      <p:sp>
-        <p:nvSpPr>
-          <p:cNvPr id="3" name="TextBox 2"/>
+            <a:pPr algn="ctr">
+              <a:defRPr/>
+            </a:pPr>
+            <a:endParaRPr/>
+          </a:p>
+        </p:txBody>
+      </p:sp>
+      <p:sp>
+        <p:nvSpPr>
+          <p:cNvPr id="508149146" name="TextBox 2"/>
           <p:cNvSpPr txBox="1"/>
           <p:nvPr/>
         </p:nvSpPr>
-        <p:spPr>
+        <p:spPr bwMode="auto">
           <a:xfrm>
             <a:off x="10789920" y="6053328"/>
             <a:ext cx="1097280" cy="457200"/>
@@ -7417,18 +7934,20 @@
               </a:defRPr>
             </a:pPr>
             <a:r>
+              <a:rPr/>
               <a:t>7</a:t>
             </a:r>
-          </a:p>
-        </p:txBody>
-      </p:sp>
-      <p:sp>
-        <p:nvSpPr>
-          <p:cNvPr id="4" name="TextBox 3"/>
+            <a:endParaRPr/>
+          </a:p>
+        </p:txBody>
+      </p:sp>
+      <p:sp>
+        <p:nvSpPr>
+          <p:cNvPr id="1789088198" name="TextBox 3"/>
           <p:cNvSpPr txBox="1"/>
           <p:nvPr/>
         </p:nvSpPr>
-        <p:spPr>
+        <p:spPr bwMode="auto">
           <a:xfrm>
             <a:off x="731520" y="457200"/>
             <a:ext cx="10698480" cy="960120"/>
@@ -7453,20 +7972,22 @@
               </a:defRPr>
             </a:pPr>
             <a:r>
+              <a:rPr/>
               <a:t>The Fisher score rewards classes that are far apart and tight within.</a:t>
             </a:r>
-          </a:p>
-        </p:txBody>
-      </p:sp>
-      <p:sp>
-        <p:nvSpPr>
-          <p:cNvPr id="5" name="TextBox 4"/>
+            <a:endParaRPr/>
+          </a:p>
+        </p:txBody>
+      </p:sp>
+      <p:sp>
+        <p:nvSpPr>
+          <p:cNvPr id="611786379" name="TextBox 4"/>
           <p:cNvSpPr txBox="1"/>
           <p:nvPr/>
         </p:nvSpPr>
-        <p:spPr>
-          <a:xfrm>
-            <a:off x="731520" y="1508760"/>
+        <p:spPr bwMode="auto">
+          <a:xfrm>
+            <a:off x="731520" y="1508759"/>
             <a:ext cx="5394960" cy="4526280"/>
           </a:xfrm>
           <a:prstGeom prst="rect">
@@ -7492,8 +8013,10 @@
               </a:defRPr>
             </a:pPr>
             <a:r>
+              <a:rPr/>
               <a:t>•  Eq. 10.5: interclass separation divided by intraclass spread.</a:t>
             </a:r>
+            <a:endParaRPr/>
           </a:p>
           <a:p>
             <a:pPr>
@@ -7508,8 +8031,10 @@
               </a:defRPr>
             </a:pPr>
             <a:r>
+              <a:rPr/>
               <a:t>•  Numerator: how far each class mean sits from the global mean.</a:t>
             </a:r>
+            <a:endParaRPr/>
           </a:p>
           <a:p>
             <a:pPr>
@@ -7524,26 +8049,26 @@
               </a:defRPr>
             </a:pPr>
             <a:r>
+              <a:rPr/>
               <a:t>•  Denominator: how wide each class is. Higher is better.</a:t>
             </a:r>
+            <a:endParaRPr/>
           </a:p>
         </p:txBody>
       </p:sp>
       <p:pic>
         <p:nvPicPr>
-          <p:cNvPr id="6" name="Picture 5" descr="fig_AG_10-2_fisher_direction.png"/>
+          <p:cNvPr id="978293855" name="Picture 5" descr="fig_AG_10-2_fisher_direction.png"/>
           <p:cNvPicPr>
             <a:picLocks noChangeAspect="1"/>
           </p:cNvPicPr>
           <p:nvPr/>
         </p:nvPicPr>
-        <p:blipFill>
+        <p:blipFill rotWithShape="1">
           <a:blip r:embed="rId3"/>
-          <a:stretch>
-            <a:fillRect/>
-          </a:stretch>
+          <a:stretch/>
         </p:blipFill>
-        <p:spPr>
+        <p:spPr bwMode="auto">
           <a:xfrm>
             <a:off x="6400800" y="2890837"/>
             <a:ext cx="5029200" cy="1762125"/>
@@ -7555,11 +8080,11 @@
       </p:pic>
       <p:sp>
         <p:nvSpPr>
-          <p:cNvPr id="7" name="TextBox 6"/>
+          <p:cNvPr id="1149392064" name="TextBox 6"/>
           <p:cNvSpPr txBox="1"/>
           <p:nvPr/>
         </p:nvSpPr>
-        <p:spPr>
+        <p:spPr bwMode="auto">
           <a:xfrm>
             <a:off x="6400800" y="5724144"/>
             <a:ext cx="5029200" cy="310896"/>
@@ -7584,8 +8109,10 @@
               </a:defRPr>
             </a:pPr>
             <a:r>
+              <a:rPr/>
               <a:t>Fisher's discriminating direction vs class distribution (Aggarwal, p.291)</a:t>
             </a:r>
+            <a:endParaRPr/>
           </a:p>
         </p:txBody>
       </p:sp>
@@ -7594,26 +8121,41 @@
   <p:clrMapOvr>
     <a:masterClrMapping/>
   </p:clrMapOvr>
+  <mc:AlternateContent xmlns:mc="http://schemas.openxmlformats.org/markup-compatibility/2006">
+    <mc:Choice xmlns:p159="http://schemas.microsoft.com/office/powerpoint/2015/09/main" xmlns:p14="http://schemas.microsoft.com/office/powerpoint/2010/main" Requires="p159">
+      <p:transition p14:dur="500" advClick="1"/>
+    </mc:Choice>
+    <mc:Fallback>
+      <p:transition advClick="1"/>
+    </mc:Fallback>
+  </mc:AlternateContent>
 </p:sld>
 </file>
 
 <file path=ppt/slides/slide8.xml><?xml version="1.0" encoding="utf-8"?>
-<p:sld xmlns:a="http://schemas.openxmlformats.org/drawingml/2006/main" xmlns:p="http://schemas.openxmlformats.org/presentationml/2006/main" xmlns:r="http://schemas.openxmlformats.org/officeDocument/2006/relationships">
-  <p:cSld>
+<p:sld xmlns:a="http://schemas.openxmlformats.org/drawingml/2006/main" xmlns:r="http://schemas.openxmlformats.org/officeDocument/2006/relationships" xmlns:p="http://schemas.openxmlformats.org/presentationml/2006/main" xmlns:m="http://schemas.openxmlformats.org/officeDocument/2006/math" xmlns:w="http://schemas.openxmlformats.org/wordprocessingml/2006/main" xmlns:mc="http://schemas.openxmlformats.org/markup-compatibility/2006" showMasterPhAnim="0" showMasterSp="1" show="1">
+  <p:cSld name="">
     <p:spTree>
       <p:nvGrpSpPr>
         <p:cNvPr id="1" name=""/>
         <p:cNvGrpSpPr/>
         <p:nvPr/>
       </p:nvGrpSpPr>
-      <p:grpSpPr/>
-      <p:sp>
-        <p:nvSpPr>
-          <p:cNvPr id="2" name="Rectangle 1"/>
+      <p:grpSpPr bwMode="auto">
+        <a:xfrm>
+          <a:off x="0" y="0"/>
+          <a:ext cx="0" cy="0"/>
+          <a:chOff x="0" y="0"/>
+          <a:chExt cx="0" cy="0"/>
+        </a:xfrm>
+      </p:grpSpPr>
+      <p:sp>
+        <p:nvSpPr>
+          <p:cNvPr id="79753247" name="Rectangle 1"/>
           <p:cNvSpPr/>
           <p:nvPr/>
         </p:nvSpPr>
-        <p:spPr>
+        <p:spPr bwMode="auto">
           <a:xfrm>
             <a:off x="0" y="0"/>
             <a:ext cx="12191695" cy="6858000"/>
@@ -7647,17 +8189,20 @@
           <a:bodyPr rtlCol="0" anchor="ctr"/>
           <a:lstStyle/>
           <a:p>
-            <a:pPr algn="ctr"/>
-          </a:p>
-        </p:txBody>
-      </p:sp>
-      <p:sp>
-        <p:nvSpPr>
-          <p:cNvPr id="3" name="TextBox 2"/>
+            <a:pPr algn="ctr">
+              <a:defRPr/>
+            </a:pPr>
+            <a:endParaRPr/>
+          </a:p>
+        </p:txBody>
+      </p:sp>
+      <p:sp>
+        <p:nvSpPr>
+          <p:cNvPr id="169800194" name="TextBox 2"/>
           <p:cNvSpPr txBox="1"/>
           <p:nvPr/>
         </p:nvSpPr>
-        <p:spPr>
+        <p:spPr bwMode="auto">
           <a:xfrm>
             <a:off x="10789920" y="6053328"/>
             <a:ext cx="1097280" cy="457200"/>
@@ -7682,18 +8227,20 @@
               </a:defRPr>
             </a:pPr>
             <a:r>
+              <a:rPr/>
               <a:t>8</a:t>
             </a:r>
-          </a:p>
-        </p:txBody>
-      </p:sp>
-      <p:sp>
-        <p:nvSpPr>
-          <p:cNvPr id="4" name="TextBox 3"/>
+            <a:endParaRPr/>
+          </a:p>
+        </p:txBody>
+      </p:sp>
+      <p:sp>
+        <p:nvSpPr>
+          <p:cNvPr id="1121263577" name="TextBox 3"/>
           <p:cNvSpPr txBox="1"/>
           <p:nvPr/>
         </p:nvSpPr>
-        <p:spPr>
+        <p:spPr bwMode="auto">
           <a:xfrm>
             <a:off x="731520" y="457200"/>
             <a:ext cx="10698480" cy="960120"/>
@@ -7718,20 +8265,22 @@
               </a:defRPr>
             </a:pPr>
             <a:r>
+              <a:rPr/>
               <a:t>Four greedy searches all converge on the same reduced subset.</a:t>
             </a:r>
-          </a:p>
-        </p:txBody>
-      </p:sp>
-      <p:sp>
-        <p:nvSpPr>
-          <p:cNvPr id="5" name="TextBox 4"/>
+            <a:endParaRPr/>
+          </a:p>
+        </p:txBody>
+      </p:sp>
+      <p:sp>
+        <p:nvSpPr>
+          <p:cNvPr id="1674380159" name="TextBox 4"/>
           <p:cNvSpPr txBox="1"/>
           <p:nvPr/>
         </p:nvSpPr>
-        <p:spPr>
-          <a:xfrm>
-            <a:off x="731520" y="1508760"/>
+        <p:spPr bwMode="auto">
+          <a:xfrm>
+            <a:off x="731520" y="1508759"/>
             <a:ext cx="5394960" cy="4526280"/>
           </a:xfrm>
           <a:prstGeom prst="rect">
@@ -7757,8 +8306,10 @@
               </a:defRPr>
             </a:pPr>
             <a:r>
+              <a:rPr/>
               <a:t>•  Forward selection: start empty, add the best each step.</a:t>
             </a:r>
+            <a:endParaRPr/>
           </a:p>
           <a:p>
             <a:pPr>
@@ -7773,8 +8324,10 @@
               </a:defRPr>
             </a:pPr>
             <a:r>
+              <a:rPr/>
               <a:t>•  Backward elimination: start full, remove the worst each step.</a:t>
             </a:r>
+            <a:endParaRPr/>
           </a:p>
           <a:p>
             <a:pPr>
@@ -7789,28 +8342,28 @@
               </a:defRPr>
             </a:pPr>
             <a:r>
+              <a:rPr/>
               <a:t>•  Combination: add the best and remove the worst. Decision tree: keep the attributes it splits on.</a:t>
             </a:r>
+            <a:endParaRPr/>
           </a:p>
         </p:txBody>
       </p:sp>
       <p:pic>
         <p:nvPicPr>
-          <p:cNvPr id="6" name="Picture 5" descr="fig_HK_3-6_greedy_methods.png"/>
+          <p:cNvPr id="156024047" name="Picture 5" descr="fig_HK_3-6_greedy_methods.png"/>
           <p:cNvPicPr>
             <a:picLocks noChangeAspect="1"/>
           </p:cNvPicPr>
           <p:nvPr/>
         </p:nvPicPr>
-        <p:blipFill>
+        <p:blipFill rotWithShape="1">
           <a:blip r:embed="rId3"/>
-          <a:stretch>
-            <a:fillRect/>
-          </a:stretch>
+          <a:stretch/>
         </p:blipFill>
-        <p:spPr>
-          <a:xfrm>
-            <a:off x="6400800" y="2390474"/>
+        <p:spPr bwMode="auto">
+          <a:xfrm>
+            <a:off x="6400800" y="2390473"/>
             <a:ext cx="5029200" cy="2762851"/>
           </a:xfrm>
           <a:prstGeom prst="rect">
@@ -7820,11 +8373,11 @@
       </p:pic>
       <p:sp>
         <p:nvSpPr>
-          <p:cNvPr id="7" name="TextBox 6"/>
+          <p:cNvPr id="796075245" name="TextBox 6"/>
           <p:cNvSpPr txBox="1"/>
           <p:nvPr/>
         </p:nvSpPr>
-        <p:spPr>
+        <p:spPr bwMode="auto">
           <a:xfrm>
             <a:off x="6400800" y="5724144"/>
             <a:ext cx="5029200" cy="310896"/>
@@ -7849,8 +8402,10 @@
               </a:defRPr>
             </a:pPr>
             <a:r>
+              <a:rPr/>
               <a:t>Greedy methods for attribute subset selection (Han, Kamber &amp; Pei, p.104)</a:t>
             </a:r>
+            <a:endParaRPr/>
           </a:p>
         </p:txBody>
       </p:sp>
@@ -7859,26 +8414,41 @@
   <p:clrMapOvr>
     <a:masterClrMapping/>
   </p:clrMapOvr>
+  <mc:AlternateContent xmlns:mc="http://schemas.openxmlformats.org/markup-compatibility/2006">
+    <mc:Choice xmlns:p159="http://schemas.microsoft.com/office/powerpoint/2015/09/main" xmlns:p14="http://schemas.microsoft.com/office/powerpoint/2010/main" Requires="p159">
+      <p:transition p14:dur="500" advClick="1"/>
+    </mc:Choice>
+    <mc:Fallback>
+      <p:transition advClick="1"/>
+    </mc:Fallback>
+  </mc:AlternateContent>
 </p:sld>
 </file>
 
 <file path=ppt/slides/slide9.xml><?xml version="1.0" encoding="utf-8"?>
-<p:sld xmlns:a="http://schemas.openxmlformats.org/drawingml/2006/main" xmlns:p="http://schemas.openxmlformats.org/presentationml/2006/main" xmlns:r="http://schemas.openxmlformats.org/officeDocument/2006/relationships">
-  <p:cSld>
+<p:sld xmlns:a="http://schemas.openxmlformats.org/drawingml/2006/main" xmlns:r="http://schemas.openxmlformats.org/officeDocument/2006/relationships" xmlns:p="http://schemas.openxmlformats.org/presentationml/2006/main" xmlns:m="http://schemas.openxmlformats.org/officeDocument/2006/math" xmlns:w="http://schemas.openxmlformats.org/wordprocessingml/2006/main" xmlns:mc="http://schemas.openxmlformats.org/markup-compatibility/2006" showMasterPhAnim="0" showMasterSp="1" show="1">
+  <p:cSld name="">
     <p:spTree>
       <p:nvGrpSpPr>
         <p:cNvPr id="1" name=""/>
         <p:cNvGrpSpPr/>
         <p:nvPr/>
       </p:nvGrpSpPr>
-      <p:grpSpPr/>
-      <p:sp>
-        <p:nvSpPr>
-          <p:cNvPr id="2" name="Rectangle 1"/>
+      <p:grpSpPr bwMode="auto">
+        <a:xfrm>
+          <a:off x="0" y="0"/>
+          <a:ext cx="0" cy="0"/>
+          <a:chOff x="0" y="0"/>
+          <a:chExt cx="0" cy="0"/>
+        </a:xfrm>
+      </p:grpSpPr>
+      <p:sp>
+        <p:nvSpPr>
+          <p:cNvPr id="1321510977" name="Rectangle 1"/>
           <p:cNvSpPr/>
           <p:nvPr/>
         </p:nvSpPr>
-        <p:spPr>
+        <p:spPr bwMode="auto">
           <a:xfrm>
             <a:off x="0" y="0"/>
             <a:ext cx="12191695" cy="6858000"/>
@@ -7912,17 +8482,20 @@
           <a:bodyPr rtlCol="0" anchor="ctr"/>
           <a:lstStyle/>
           <a:p>
-            <a:pPr algn="ctr"/>
-          </a:p>
-        </p:txBody>
-      </p:sp>
-      <p:sp>
-        <p:nvSpPr>
-          <p:cNvPr id="3" name="TextBox 2"/>
+            <a:pPr algn="ctr">
+              <a:defRPr/>
+            </a:pPr>
+            <a:endParaRPr/>
+          </a:p>
+        </p:txBody>
+      </p:sp>
+      <p:sp>
+        <p:nvSpPr>
+          <p:cNvPr id="1243427235" name="TextBox 2"/>
           <p:cNvSpPr txBox="1"/>
           <p:nvPr/>
         </p:nvSpPr>
-        <p:spPr>
+        <p:spPr bwMode="auto">
           <a:xfrm>
             <a:off x="10789920" y="6053328"/>
             <a:ext cx="1097280" cy="457200"/>
@@ -7947,18 +8520,20 @@
               </a:defRPr>
             </a:pPr>
             <a:r>
+              <a:rPr/>
               <a:t>9</a:t>
             </a:r>
-          </a:p>
-        </p:txBody>
-      </p:sp>
-      <p:sp>
-        <p:nvSpPr>
-          <p:cNvPr id="4" name="TextBox 3"/>
+            <a:endParaRPr/>
+          </a:p>
+        </p:txBody>
+      </p:sp>
+      <p:sp>
+        <p:nvSpPr>
+          <p:cNvPr id="1681687521" name="TextBox 3"/>
           <p:cNvSpPr txBox="1"/>
           <p:nvPr/>
         </p:nvSpPr>
-        <p:spPr>
+        <p:spPr bwMode="auto">
           <a:xfrm>
             <a:off x="731520" y="457200"/>
             <a:ext cx="10698480" cy="960120"/>
@@ -7983,20 +8558,22 @@
               </a:defRPr>
             </a:pPr>
             <a:r>
+              <a:rPr/>
               <a:t>A decision tree keeps only the attributes it actually splits on.</a:t>
             </a:r>
-          </a:p>
-        </p:txBody>
-      </p:sp>
-      <p:sp>
-        <p:nvSpPr>
-          <p:cNvPr id="5" name="TextBox 4"/>
+            <a:endParaRPr/>
+          </a:p>
+        </p:txBody>
+      </p:sp>
+      <p:sp>
+        <p:nvSpPr>
+          <p:cNvPr id="542979095" name="TextBox 4"/>
           <p:cNvSpPr txBox="1"/>
           <p:nvPr/>
         </p:nvSpPr>
-        <p:spPr>
-          <a:xfrm>
-            <a:off x="731520" y="1508760"/>
+        <p:spPr bwMode="auto">
+          <a:xfrm>
+            <a:off x="731520" y="1508759"/>
             <a:ext cx="5394960" cy="4526280"/>
           </a:xfrm>
           <a:prstGeom prst="rect">
@@ -8022,8 +8599,10 @@
               </a:defRPr>
             </a:pPr>
             <a:r>
+              <a:rPr/>
               <a:t>•  Each internal node is a test on an attribute.</a:t>
             </a:r>
+            <a:endParaRPr/>
           </a:p>
           <a:p>
             <a:pPr>
@@ -8038,8 +8617,10 @@
               </a:defRPr>
             </a:pPr>
             <a:r>
+              <a:rPr/>
               <a:t>•  Each branch is an outcome; each leaf is a class prediction.</a:t>
             </a:r>
+            <a:endParaRPr/>
           </a:p>
           <a:p>
             <a:pPr>
@@ -8054,26 +8635,26 @@
               </a:defRPr>
             </a:pPr>
             <a:r>
+              <a:rPr/>
               <a:t>•  Attributes that never appear in the tree are assumed irrelevant.</a:t>
             </a:r>
+            <a:endParaRPr/>
           </a:p>
         </p:txBody>
       </p:sp>
       <p:pic>
         <p:nvPicPr>
-          <p:cNvPr id="6" name="Picture 5" descr="web_decision_tree_depth2.png"/>
+          <p:cNvPr id="1407946957" name="Picture 5" descr="web_decision_tree_depth2.png"/>
           <p:cNvPicPr>
             <a:picLocks noChangeAspect="1"/>
           </p:cNvPicPr>
           <p:nvPr/>
         </p:nvPicPr>
-        <p:blipFill>
+        <p:blipFill rotWithShape="1">
           <a:blip r:embed="rId3"/>
-          <a:stretch>
-            <a:fillRect/>
-          </a:stretch>
+          <a:stretch/>
         </p:blipFill>
-        <p:spPr>
+        <p:spPr bwMode="auto">
           <a:xfrm>
             <a:off x="6400800" y="2627343"/>
             <a:ext cx="5029200" cy="2289113"/>
@@ -8085,11 +8666,11 @@
       </p:pic>
       <p:sp>
         <p:nvSpPr>
-          <p:cNvPr id="7" name="TextBox 6"/>
+          <p:cNvPr id="225338728" name="TextBox 6"/>
           <p:cNvSpPr txBox="1"/>
           <p:nvPr/>
         </p:nvSpPr>
-        <p:spPr>
+        <p:spPr bwMode="auto">
           <a:xfrm>
             <a:off x="6400800" y="5724144"/>
             <a:ext cx="5029200" cy="310896"/>
@@ -8114,8 +8695,10 @@
               </a:defRPr>
             </a:pPr>
             <a:r>
+              <a:rPr/>
               <a:t>A decision tree: internal tests, branches, and class leaves</a:t>
             </a:r>
+            <a:endParaRPr/>
           </a:p>
         </p:txBody>
       </p:sp>
@@ -8124,11 +8707,19 @@
   <p:clrMapOvr>
     <a:masterClrMapping/>
   </p:clrMapOvr>
+  <mc:AlternateContent xmlns:mc="http://schemas.openxmlformats.org/markup-compatibility/2006">
+    <mc:Choice xmlns:p159="http://schemas.microsoft.com/office/powerpoint/2015/09/main" xmlns:p14="http://schemas.microsoft.com/office/powerpoint/2010/main" Requires="p159">
+      <p:transition p14:dur="500" advClick="1"/>
+    </mc:Choice>
+    <mc:Fallback>
+      <p:transition advClick="1"/>
+    </mc:Fallback>
+  </mc:AlternateContent>
 </p:sld>
 </file>
 
 <file path=ppt/theme/theme1.xml><?xml version="1.0" encoding="utf-8"?>
-<a:theme xmlns:a="http://schemas.openxmlformats.org/drawingml/2006/main" name="Office Theme">
+<a:theme xmlns:a="http://schemas.openxmlformats.org/drawingml/2006/main" xmlns:r="http://schemas.openxmlformats.org/officeDocument/2006/relationships" xmlns:p="http://schemas.openxmlformats.org/presentationml/2006/main" name="Office Theme">
   <a:themeElements>
     <a:clrScheme name="Office">
       <a:dk1>
@@ -8171,73 +8762,13 @@
     <a:fontScheme name="Office">
       <a:majorFont>
         <a:latin typeface="Calibri"/>
-        <a:ea typeface=""/>
-        <a:cs typeface=""/>
-        <a:font script="Jpan" typeface="ＭＳ Ｐゴシック"/>
-        <a:font script="Hang" typeface="맑은 고딕"/>
-        <a:font script="Hans" typeface="宋体"/>
-        <a:font script="Hant" typeface="新細明體"/>
-        <a:font script="Arab" typeface="Times New Roman"/>
-        <a:font script="Hebr" typeface="Times New Roman"/>
-        <a:font script="Thai" typeface="Angsana New"/>
-        <a:font script="Ethi" typeface="Nyala"/>
-        <a:font script="Beng" typeface="Vrinda"/>
-        <a:font script="Gujr" typeface="Shruti"/>
-        <a:font script="Khmr" typeface="MoolBoran"/>
-        <a:font script="Knda" typeface="Tunga"/>
-        <a:font script="Guru" typeface="Raavi"/>
-        <a:font script="Cans" typeface="Euphemia"/>
-        <a:font script="Cher" typeface="Plantagenet Cherokee"/>
-        <a:font script="Yiii" typeface="Microsoft Yi Baiti"/>
-        <a:font script="Tibt" typeface="Microsoft Himalaya"/>
-        <a:font script="Thaa" typeface="MV Boli"/>
-        <a:font script="Deva" typeface="Mangal"/>
-        <a:font script="Telu" typeface="Gautami"/>
-        <a:font script="Taml" typeface="Latha"/>
-        <a:font script="Syrc" typeface="Estrangelo Edessa"/>
-        <a:font script="Orya" typeface="Kalinga"/>
-        <a:font script="Mlym" typeface="Kartika"/>
-        <a:font script="Laoo" typeface="DokChampa"/>
-        <a:font script="Sinh" typeface="Iskoola Pota"/>
-        <a:font script="Mong" typeface="Mongolian Baiti"/>
-        <a:font script="Viet" typeface="Times New Roman"/>
-        <a:font script="Uigh" typeface="Microsoft Uighur"/>
-        <a:font script="Geor" typeface="Sylfaen"/>
+        <a:ea typeface="Arial"/>
+        <a:cs typeface="Arial"/>
       </a:majorFont>
       <a:minorFont>
         <a:latin typeface="Calibri"/>
-        <a:ea typeface=""/>
-        <a:cs typeface=""/>
-        <a:font script="Jpan" typeface="ＭＳ Ｐゴシック"/>
-        <a:font script="Hang" typeface="맑은 고딕"/>
-        <a:font script="Hans" typeface="宋体"/>
-        <a:font script="Hant" typeface="新細明體"/>
-        <a:font script="Arab" typeface="Arial"/>
-        <a:font script="Hebr" typeface="Arial"/>
-        <a:font script="Thai" typeface="Cordia New"/>
-        <a:font script="Ethi" typeface="Nyala"/>
-        <a:font script="Beng" typeface="Vrinda"/>
-        <a:font script="Gujr" typeface="Shruti"/>
-        <a:font script="Khmr" typeface="DaunPenh"/>
-        <a:font script="Knda" typeface="Tunga"/>
-        <a:font script="Guru" typeface="Raavi"/>
-        <a:font script="Cans" typeface="Euphemia"/>
-        <a:font script="Cher" typeface="Plantagenet Cherokee"/>
-        <a:font script="Yiii" typeface="Microsoft Yi Baiti"/>
-        <a:font script="Tibt" typeface="Microsoft Himalaya"/>
-        <a:font script="Thaa" typeface="MV Boli"/>
-        <a:font script="Deva" typeface="Mangal"/>
-        <a:font script="Telu" typeface="Gautami"/>
-        <a:font script="Taml" typeface="Latha"/>
-        <a:font script="Syrc" typeface="Estrangelo Edessa"/>
-        <a:font script="Orya" typeface="Kalinga"/>
-        <a:font script="Mlym" typeface="Kartika"/>
-        <a:font script="Laoo" typeface="DokChampa"/>
-        <a:font script="Sinh" typeface="Iskoola Pota"/>
-        <a:font script="Mong" typeface="Mongolian Baiti"/>
-        <a:font script="Viet" typeface="Arial"/>
-        <a:font script="Uigh" typeface="Microsoft Uighur"/>
-        <a:font script="Geor" typeface="Sylfaen"/>
+        <a:ea typeface="Arial"/>
+        <a:cs typeface="Arial"/>
       </a:minorFont>
     </a:fontScheme>
     <a:fmtScheme name="Office">
@@ -8245,7 +8776,7 @@
         <a:solidFill>
           <a:schemeClr val="phClr"/>
         </a:solidFill>
-        <a:gradFill rotWithShape="1">
+        <a:gradFill>
           <a:gsLst>
             <a:gs pos="0">
               <a:schemeClr val="phClr">
@@ -8268,7 +8799,7 @@
           </a:gsLst>
           <a:lin ang="16200000" scaled="1"/>
         </a:gradFill>
-        <a:gradFill rotWithShape="1">
+        <a:gradFill>
           <a:gsLst>
             <a:gs pos="0">
               <a:schemeClr val="phClr">
@@ -8355,7 +8886,7 @@
         <a:solidFill>
           <a:schemeClr val="phClr"/>
         </a:solidFill>
-        <a:gradFill rotWithShape="1">
+        <a:gradFill>
           <a:gsLst>
             <a:gs pos="0">
               <a:schemeClr val="phClr">
@@ -8377,11 +8908,9 @@
               </a:schemeClr>
             </a:gs>
           </a:gsLst>
-          <a:path path="circle">
-            <a:fillToRect l="50000" t="-80000" r="50000" b="180000"/>
-          </a:path>
+          <a:path path="circle"/>
         </a:gradFill>
-        <a:gradFill rotWithShape="1">
+        <a:gradFill>
           <a:gsLst>
             <a:gs pos="0">
               <a:schemeClr val="phClr">
@@ -8396,16 +8925,14 @@
               </a:schemeClr>
             </a:gs>
           </a:gsLst>
-          <a:path path="circle">
-            <a:fillToRect l="50000" t="50000" r="50000" b="50000"/>
-          </a:path>
+          <a:path path="circle"/>
         </a:gradFill>
       </a:bgFillStyleLst>
     </a:fmtScheme>
   </a:themeElements>
   <a:objectDefaults>
     <a:spDef>
-      <a:spPr/>
+      <a:spPr bwMode="auto"/>
       <a:bodyPr/>
       <a:lstStyle/>
       <a:style>
@@ -8424,7 +8951,7 @@
       </a:style>
     </a:spDef>
     <a:lnDef>
-      <a:spPr/>
+      <a:spPr bwMode="auto"/>
       <a:bodyPr/>
       <a:lstStyle/>
       <a:style>
@@ -8443,12 +8970,11 @@
       </a:style>
     </a:lnDef>
   </a:objectDefaults>
-  <a:extraClrSchemeLst/>
 </a:theme>
 </file>
 
 <file path=ppt/theme/theme2.xml><?xml version="1.0" encoding="utf-8"?>
-<a:theme xmlns:a="http://schemas.openxmlformats.org/drawingml/2006/main" name="Office Theme">
+<a:theme xmlns:a="http://schemas.openxmlformats.org/drawingml/2006/main" xmlns:r="http://schemas.openxmlformats.org/officeDocument/2006/relationships" xmlns:p="http://schemas.openxmlformats.org/presentationml/2006/main" name="Office Theme">
   <a:themeElements>
     <a:clrScheme name="Office">
       <a:dk1>
@@ -8488,76 +9014,16 @@
         <a:srgbClr val="800080"/>
       </a:folHlink>
     </a:clrScheme>
-    <a:fontScheme name="Office">
+    <a:fontScheme name="">
       <a:majorFont>
         <a:latin typeface="Calibri"/>
-        <a:ea typeface=""/>
-        <a:cs typeface=""/>
-        <a:font script="Jpan" typeface="ＭＳ Ｐゴシック"/>
-        <a:font script="Hang" typeface="맑은 고딕"/>
-        <a:font script="Hans" typeface="宋体"/>
-        <a:font script="Hant" typeface="新細明體"/>
-        <a:font script="Arab" typeface="Times New Roman"/>
-        <a:font script="Hebr" typeface="Times New Roman"/>
-        <a:font script="Thai" typeface="Angsana New"/>
-        <a:font script="Ethi" typeface="Nyala"/>
-        <a:font script="Beng" typeface="Vrinda"/>
-        <a:font script="Gujr" typeface="Shruti"/>
-        <a:font script="Khmr" typeface="MoolBoran"/>
-        <a:font script="Knda" typeface="Tunga"/>
-        <a:font script="Guru" typeface="Raavi"/>
-        <a:font script="Cans" typeface="Euphemia"/>
-        <a:font script="Cher" typeface="Plantagenet Cherokee"/>
-        <a:font script="Yiii" typeface="Microsoft Yi Baiti"/>
-        <a:font script="Tibt" typeface="Microsoft Himalaya"/>
-        <a:font script="Thaa" typeface="MV Boli"/>
-        <a:font script="Deva" typeface="Mangal"/>
-        <a:font script="Telu" typeface="Gautami"/>
-        <a:font script="Taml" typeface="Latha"/>
-        <a:font script="Syrc" typeface="Estrangelo Edessa"/>
-        <a:font script="Orya" typeface="Kalinga"/>
-        <a:font script="Mlym" typeface="Kartika"/>
-        <a:font script="Laoo" typeface="DokChampa"/>
-        <a:font script="Sinh" typeface="Iskoola Pota"/>
-        <a:font script="Mong" typeface="Mongolian Baiti"/>
-        <a:font script="Viet" typeface="Times New Roman"/>
-        <a:font script="Uigh" typeface="Microsoft Uighur"/>
-        <a:font script="Geor" typeface="Sylfaen"/>
+        <a:ea typeface="Arial"/>
+        <a:cs typeface="Arial"/>
       </a:majorFont>
       <a:minorFont>
         <a:latin typeface="Calibri"/>
-        <a:ea typeface=""/>
-        <a:cs typeface=""/>
-        <a:font script="Jpan" typeface="ＭＳ Ｐゴシック"/>
-        <a:font script="Hang" typeface="맑은 고딕"/>
-        <a:font script="Hans" typeface="宋体"/>
-        <a:font script="Hant" typeface="新細明體"/>
-        <a:font script="Arab" typeface="Arial"/>
-        <a:font script="Hebr" typeface="Arial"/>
-        <a:font script="Thai" typeface="Cordia New"/>
-        <a:font script="Ethi" typeface="Nyala"/>
-        <a:font script="Beng" typeface="Vrinda"/>
-        <a:font script="Gujr" typeface="Shruti"/>
-        <a:font script="Khmr" typeface="DaunPenh"/>
-        <a:font script="Knda" typeface="Tunga"/>
-        <a:font script="Guru" typeface="Raavi"/>
-        <a:font script="Cans" typeface="Euphemia"/>
-        <a:font script="Cher" typeface="Plantagenet Cherokee"/>
-        <a:font script="Yiii" typeface="Microsoft Yi Baiti"/>
-        <a:font script="Tibt" typeface="Microsoft Himalaya"/>
-        <a:font script="Thaa" typeface="MV Boli"/>
-        <a:font script="Deva" typeface="Mangal"/>
-        <a:font script="Telu" typeface="Gautami"/>
-        <a:font script="Taml" typeface="Latha"/>
-        <a:font script="Syrc" typeface="Estrangelo Edessa"/>
-        <a:font script="Orya" typeface="Kalinga"/>
-        <a:font script="Mlym" typeface="Kartika"/>
-        <a:font script="Laoo" typeface="DokChampa"/>
-        <a:font script="Sinh" typeface="Iskoola Pota"/>
-        <a:font script="Mong" typeface="Mongolian Baiti"/>
-        <a:font script="Viet" typeface="Arial"/>
-        <a:font script="Uigh" typeface="Microsoft Uighur"/>
-        <a:font script="Geor" typeface="Sylfaen"/>
+        <a:ea typeface="Arial"/>
+        <a:cs typeface="Arial"/>
       </a:minorFont>
     </a:fontScheme>
     <a:fmtScheme name="Office">
@@ -8565,7 +9031,7 @@
         <a:solidFill>
           <a:schemeClr val="phClr"/>
         </a:solidFill>
-        <a:gradFill rotWithShape="1">
+        <a:gradFill>
           <a:gsLst>
             <a:gs pos="0">
               <a:schemeClr val="phClr">
@@ -8588,7 +9054,7 @@
           </a:gsLst>
           <a:lin ang="16200000" scaled="1"/>
         </a:gradFill>
-        <a:gradFill rotWithShape="1">
+        <a:gradFill>
           <a:gsLst>
             <a:gs pos="0">
               <a:schemeClr val="phClr">
@@ -8675,7 +9141,7 @@
         <a:solidFill>
           <a:schemeClr val="phClr"/>
         </a:solidFill>
-        <a:gradFill rotWithShape="1">
+        <a:gradFill>
           <a:gsLst>
             <a:gs pos="0">
               <a:schemeClr val="phClr">
@@ -8697,11 +9163,9 @@
               </a:schemeClr>
             </a:gs>
           </a:gsLst>
-          <a:path path="circle">
-            <a:fillToRect l="50000" t="-80000" r="50000" b="180000"/>
-          </a:path>
+          <a:path path="circle"/>
         </a:gradFill>
-        <a:gradFill rotWithShape="1">
+        <a:gradFill>
           <a:gsLst>
             <a:gs pos="0">
               <a:schemeClr val="phClr">
@@ -8716,16 +9180,14 @@
               </a:schemeClr>
             </a:gs>
           </a:gsLst>
-          <a:path path="circle">
-            <a:fillToRect l="50000" t="50000" r="50000" b="50000"/>
-          </a:path>
+          <a:path path="circle"/>
         </a:gradFill>
       </a:bgFillStyleLst>
     </a:fmtScheme>
   </a:themeElements>
   <a:objectDefaults>
     <a:spDef>
-      <a:spPr/>
+      <a:spPr bwMode="auto"/>
       <a:bodyPr/>
       <a:lstStyle/>
       <a:style>
@@ -8744,7 +9206,7 @@
       </a:style>
     </a:spDef>
     <a:lnDef>
-      <a:spPr/>
+      <a:spPr bwMode="auto"/>
       <a:bodyPr/>
       <a:lstStyle/>
       <a:style>
@@ -8763,6 +9225,5 @@
       </a:style>
     </a:lnDef>
   </a:objectDefaults>
-  <a:extraClrSchemeLst/>
 </a:theme>
 </file>